--- a/docs/3rdPartyAS_Poc_Introduction.pptx
+++ b/docs/3rdPartyAS_Poc_Introduction.pptx
@@ -4,23 +4,29 @@
   <p:sldMasterIdLst>
     <p:sldMasterId id="2147483648" r:id="rId1"/>
     <p:sldMasterId id="2147483660" r:id="rId3"/>
+    <p:sldMasterId id="2147483662" r:id="rId4"/>
+    <p:sldMasterId id="2147483664" r:id="rId5"/>
+    <p:sldMasterId id="2147483666" r:id="rId6"/>
   </p:sldMasterIdLst>
   <p:notesMasterIdLst>
-    <p:notesMasterId r:id="rId5"/>
+    <p:notesMasterId r:id="rId8"/>
   </p:notesMasterIdLst>
   <p:sldIdLst>
-    <p:sldId id="256" r:id="rId4"/>
-    <p:sldId id="257" r:id="rId6"/>
-    <p:sldId id="258" r:id="rId7"/>
-    <p:sldId id="259" r:id="rId8"/>
-    <p:sldId id="260" r:id="rId9"/>
-    <p:sldId id="261" r:id="rId10"/>
-    <p:sldId id="262" r:id="rId11"/>
-    <p:sldId id="263" r:id="rId12"/>
-    <p:sldId id="264" r:id="rId13"/>
-    <p:sldId id="265" r:id="rId14"/>
-    <p:sldId id="266" r:id="rId15"/>
-    <p:sldId id="267" r:id="rId16"/>
+    <p:sldId id="256" r:id="rId7"/>
+    <p:sldId id="257" r:id="rId9"/>
+    <p:sldId id="258" r:id="rId10"/>
+    <p:sldId id="259" r:id="rId11"/>
+    <p:sldId id="260" r:id="rId12"/>
+    <p:sldId id="261" r:id="rId13"/>
+    <p:sldId id="262" r:id="rId14"/>
+    <p:sldId id="263" r:id="rId15"/>
+    <p:sldId id="264" r:id="rId16"/>
+    <p:sldId id="265" r:id="rId17"/>
+    <p:sldId id="266" r:id="rId18"/>
+    <p:sldId id="267" r:id="rId19"/>
+    <p:sldId id="268" r:id="rId20"/>
+    <p:sldId id="272" r:id="rId21"/>
+    <p:sldId id="273" r:id="rId22"/>
   </p:sldIdLst>
   <p:sldSz cx="12192000" cy="6858000"/>
   <p:notesSz cx="6858000" cy="9144000"/>
@@ -1667,6 +1673,822 @@
 </p:notes>
 </file>
 
+<file path=ppt/notesSlides/notesSlide13.xml><?xml version="1.0" encoding="utf-8"?>
+<p:notes xmlns:a="http://schemas.openxmlformats.org/drawingml/2006/main" xmlns:r="http://schemas.openxmlformats.org/officeDocument/2006/relationships" xmlns:p="http://schemas.openxmlformats.org/presentationml/2006/main">
+  <p:cSld>
+    <p:spTree>
+      <p:nvGrpSpPr>
+        <p:cNvPr id="1" name=""/>
+        <p:cNvGrpSpPr/>
+        <p:nvPr/>
+      </p:nvGrpSpPr>
+      <p:grpSpPr>
+        <a:xfrm>
+          <a:off x="0" y="0"/>
+          <a:ext cx="0" cy="0"/>
+          <a:chOff x="0" y="0"/>
+          <a:chExt cx="0" cy="0"/>
+        </a:xfrm>
+      </p:grpSpPr>
+      <p:sp>
+        <p:nvSpPr>
+          <p:cNvPr id="2" name="Header Placeholder 1"/>
+          <p:cNvSpPr>
+            <a:spLocks noGrp="1"/>
+          </p:cNvSpPr>
+          <p:nvPr>
+            <p:ph type="hdr" sz="quarter"/>
+          </p:nvPr>
+        </p:nvSpPr>
+        <p:spPr>
+          <a:xfrm>
+            <a:off x="0" y="0"/>
+            <a:ext cx="3962400" cy="342900"/>
+          </a:xfrm>
+          <a:prstGeom prst="rect">
+            <a:avLst/>
+          </a:prstGeom>
+        </p:spPr>
+        <p:txBody>
+          <a:bodyPr vert="horz" lIns="91440" tIns="45720" rIns="91440" bIns="45720" rtlCol="0"/>
+          <a:lstStyle>
+            <a:lvl1pPr algn="l">
+              <a:defRPr sz="1200"/>
+            </a:lvl1pPr>
+          </a:lstStyle>
+          <a:p/>
+        </p:txBody>
+      </p:sp>
+      <p:sp>
+        <p:nvSpPr>
+          <p:cNvPr id="3" name="Date Placeholder 2"/>
+          <p:cNvSpPr>
+            <a:spLocks noGrp="1"/>
+          </p:cNvSpPr>
+          <p:nvPr>
+            <p:ph type="dt" idx="1"/>
+          </p:nvPr>
+        </p:nvSpPr>
+        <p:spPr>
+          <a:xfrm>
+            <a:off x="5180013" y="0"/>
+            <a:ext cx="3962400" cy="342900"/>
+          </a:xfrm>
+          <a:prstGeom prst="rect">
+            <a:avLst/>
+          </a:prstGeom>
+        </p:spPr>
+        <p:txBody>
+          <a:bodyPr vert="horz" lIns="91440" tIns="45720" rIns="91440" bIns="45720" rtlCol="0"/>
+          <a:lstStyle>
+            <a:lvl1pPr algn="r">
+              <a:defRPr sz="1200"/>
+            </a:lvl1pPr>
+          </a:lstStyle>
+          <a:p>
+            <a:r>
+              <a:rPr lang="cs-CZ" smtClean="0"/>
+              <a:t>1.7.2013</a:t>
+            </a:r>
+            <a:endParaRPr lang="cs-CZ" smtClean="0"/>
+          </a:p>
+        </p:txBody>
+      </p:sp>
+      <p:sp>
+        <p:nvSpPr>
+          <p:cNvPr id="4" name="Slide Image Placeholder 3"/>
+          <p:cNvSpPr>
+            <a:spLocks noGrp="1" noRot="1" noChangeAspect="1"/>
+          </p:cNvSpPr>
+          <p:nvPr>
+            <p:ph type="sldImg" idx="2"/>
+          </p:nvPr>
+        </p:nvSpPr>
+        <p:spPr>
+          <a:xfrm>
+            <a:off x="2857500" y="512763"/>
+            <a:ext cx="3429000" cy="2566987"/>
+          </a:xfrm>
+          <a:prstGeom prst="rect">
+            <a:avLst/>
+          </a:prstGeom>
+          <a:noFill/>
+          <a:ln w="12700">
+            <a:solidFill>
+              <a:prstClr val="black"/>
+            </a:solidFill>
+          </a:ln>
+        </p:spPr>
+        <p:txBody>
+          <a:bodyPr vert="horz" lIns="91440" tIns="45720" rIns="91440" bIns="45720" rtlCol="0" anchor="ctr"/>
+          <a:lstStyle/>
+          <a:p/>
+        </p:txBody>
+      </p:sp>
+      <p:sp>
+        <p:nvSpPr>
+          <p:cNvPr id="5" name="Notes Placeholder 4"/>
+          <p:cNvSpPr>
+            <a:spLocks noGrp="1"/>
+          </p:cNvSpPr>
+          <p:nvPr>
+            <p:ph type="body" sz="quarter" idx="3"/>
+          </p:nvPr>
+        </p:nvSpPr>
+        <p:spPr>
+          <a:xfrm>
+            <a:off x="914400" y="3251200"/>
+            <a:ext cx="7315200" cy="3081338"/>
+          </a:xfrm>
+          <a:prstGeom prst="rect">
+            <a:avLst/>
+          </a:prstGeom>
+        </p:spPr>
+        <p:txBody>
+          <a:bodyPr vert="horz" lIns="91440" tIns="45720" rIns="91440" bIns="45720" rtlCol="0" anchor="ctr"/>
+          <a:lstStyle>
+            <a:lvl1pPr algn="l">
+              <a:defRPr sz="1400" b="0" i="0" u="none" strike="noStrike"/>
+            </a:lvl1pPr>
+          </a:lstStyle>
+          <a:p>
+            <a:pPr marL="0" indent="0" algn="l">
+              <a:lnSpc>
+                <a:spcPct val="100000"/>
+              </a:lnSpc>
+            </a:pPr>
+            <a:r>
+              <a:rPr lang="en-US" sz="1400" b="0" i="0" u="none" strike="noStrike">
+                <a:solidFill>
+                  <a:srgbClr val="000000"/>
+                </a:solidFill>
+              </a:rPr>
+              <a:t>This POC validates the core technical feasibility of a third-party IMS Application Server: a sippy-based B2BUA signalling plane, declarative YAML routing engine, multi-format number translation, structured logging, and real-time ops console.</a:t>
+            </a:r>
+            <a:endParaRPr lang="en-US" sz="1400" b="0" i="0" u="none" strike="noStrike">
+              <a:solidFill>
+                <a:srgbClr val="000000"/>
+              </a:solidFill>
+            </a:endParaRPr>
+          </a:p>
+          <a:p>
+            <a:pPr marL="0" indent="0" algn="l">
+              <a:lnSpc>
+                <a:spcPct val="100000"/>
+              </a:lnSpc>
+            </a:pPr>
+            <a:r>
+              <a:rPr lang="en-US" sz="1400" b="0" i="0" u="none" strike="noStrike">
+                <a:solidFill>
+                  <a:srgbClr val="000000"/>
+                </a:solidFill>
+              </a:rPr>
+              <a:t>All M0-M4 milestones are complete, 119 tests pass, and 6 architecture decisions are documented. Current version v0.5.0, Apache-2.0 open source.</a:t>
+            </a:r>
+            <a:endParaRPr lang="en-US" sz="1400" b="0" i="0" u="none" strike="noStrike">
+              <a:solidFill>
+                <a:srgbClr val="000000"/>
+              </a:solidFill>
+            </a:endParaRPr>
+          </a:p>
+          <a:p>
+            <a:pPr marL="0" indent="0" algn="l">
+              <a:lnSpc>
+                <a:spcPct val="100000"/>
+              </a:lnSpc>
+            </a:pPr>
+            <a:r>
+              <a:rPr lang="en-US" sz="1400" b="0" i="0" u="none" strike="noStrike">
+                <a:solidFill>
+                  <a:srgbClr val="000000"/>
+                </a:solidFill>
+              </a:rPr>
+              <a:t>Next step: evolve to production-grade deployment following the registered restriction and TODO roadmap.</a:t>
+            </a:r>
+            <a:endParaRPr lang="en-US" sz="1400" b="0" i="0" u="none" strike="noStrike">
+              <a:solidFill>
+                <a:srgbClr val="000000"/>
+              </a:solidFill>
+            </a:endParaRPr>
+          </a:p>
+        </p:txBody>
+      </p:sp>
+      <p:sp>
+        <p:nvSpPr>
+          <p:cNvPr id="6" name="Footer Placeholder 5"/>
+          <p:cNvSpPr>
+            <a:spLocks noGrp="1"/>
+          </p:cNvSpPr>
+          <p:nvPr>
+            <p:ph type="ftr" sz="quarter" idx="4"/>
+          </p:nvPr>
+        </p:nvSpPr>
+        <p:spPr>
+          <a:xfrm>
+            <a:off x="0" y="6502400"/>
+            <a:ext cx="3962400" cy="341313"/>
+          </a:xfrm>
+          <a:prstGeom prst="rect">
+            <a:avLst/>
+          </a:prstGeom>
+        </p:spPr>
+        <p:txBody>
+          <a:bodyPr vert="horz" lIns="91440" tIns="45720" rIns="91440" bIns="45720" rtlCol="0" anchor="b"/>
+          <a:lstStyle>
+            <a:lvl1pPr algn="l">
+              <a:defRPr sz="1200"/>
+            </a:lvl1pPr>
+          </a:lstStyle>
+          <a:p/>
+        </p:txBody>
+      </p:sp>
+      <p:sp>
+        <p:nvSpPr>
+          <p:cNvPr id="7" name="Slide Number Placeholder 6"/>
+          <p:cNvSpPr>
+            <a:spLocks noGrp="1"/>
+          </p:cNvSpPr>
+          <p:nvPr>
+            <p:ph type="sldNum" sz="quarter" idx="5"/>
+          </p:nvPr>
+        </p:nvSpPr>
+        <p:spPr>
+          <a:xfrm>
+            <a:off x="5180013" y="6502400"/>
+            <a:ext cx="3962400" cy="341313"/>
+          </a:xfrm>
+          <a:prstGeom prst="rect">
+            <a:avLst/>
+          </a:prstGeom>
+        </p:spPr>
+        <p:txBody>
+          <a:bodyPr vert="horz" lIns="91440" tIns="45720" rIns="91440" bIns="45720" rtlCol="0" anchor="b"/>
+          <a:lstStyle>
+            <a:lvl1pPr algn="r">
+              <a:defRPr sz="1200"/>
+            </a:lvl1pPr>
+          </a:lstStyle>
+          <a:p>
+            <a:r>
+              <a:rPr lang="cs-CZ" smtClean="0"/>
+              <a:t>‹#›</a:t>
+            </a:r>
+            <a:endParaRPr lang="cs-CZ" smtClean="0"/>
+          </a:p>
+        </p:txBody>
+      </p:sp>
+    </p:spTree>
+  </p:cSld>
+  <p:clrMapOvr>
+    <a:masterClrMapping/>
+  </p:clrMapOvr>
+</p:notes>
+</file>
+
+<file path=ppt/notesSlides/notesSlide14.xml><?xml version="1.0" encoding="utf-8"?>
+<p:notes xmlns:a="http://schemas.openxmlformats.org/drawingml/2006/main" xmlns:r="http://schemas.openxmlformats.org/officeDocument/2006/relationships" xmlns:p="http://schemas.openxmlformats.org/presentationml/2006/main">
+  <p:cSld>
+    <p:spTree>
+      <p:nvGrpSpPr>
+        <p:cNvPr id="1" name=""/>
+        <p:cNvGrpSpPr/>
+        <p:nvPr/>
+      </p:nvGrpSpPr>
+      <p:grpSpPr>
+        <a:xfrm>
+          <a:off x="0" y="0"/>
+          <a:ext cx="0" cy="0"/>
+          <a:chOff x="0" y="0"/>
+          <a:chExt cx="0" cy="0"/>
+        </a:xfrm>
+      </p:grpSpPr>
+      <p:sp>
+        <p:nvSpPr>
+          <p:cNvPr id="2" name="Header Placeholder 1"/>
+          <p:cNvSpPr>
+            <a:spLocks noGrp="1"/>
+          </p:cNvSpPr>
+          <p:nvPr>
+            <p:ph type="hdr" sz="quarter"/>
+          </p:nvPr>
+        </p:nvSpPr>
+        <p:spPr>
+          <a:xfrm>
+            <a:off x="0" y="0"/>
+            <a:ext cx="3962400" cy="342900"/>
+          </a:xfrm>
+          <a:prstGeom prst="rect">
+            <a:avLst/>
+          </a:prstGeom>
+        </p:spPr>
+        <p:txBody>
+          <a:bodyPr vert="horz" lIns="91440" tIns="45720" rIns="91440" bIns="45720" rtlCol="0"/>
+          <a:lstStyle>
+            <a:lvl1pPr algn="l">
+              <a:defRPr sz="1200"/>
+            </a:lvl1pPr>
+          </a:lstStyle>
+          <a:p/>
+        </p:txBody>
+      </p:sp>
+      <p:sp>
+        <p:nvSpPr>
+          <p:cNvPr id="3" name="Date Placeholder 2"/>
+          <p:cNvSpPr>
+            <a:spLocks noGrp="1"/>
+          </p:cNvSpPr>
+          <p:nvPr>
+            <p:ph type="dt" idx="1"/>
+          </p:nvPr>
+        </p:nvSpPr>
+        <p:spPr>
+          <a:xfrm>
+            <a:off x="5180013" y="0"/>
+            <a:ext cx="3962400" cy="342900"/>
+          </a:xfrm>
+          <a:prstGeom prst="rect">
+            <a:avLst/>
+          </a:prstGeom>
+        </p:spPr>
+        <p:txBody>
+          <a:bodyPr vert="horz" lIns="91440" tIns="45720" rIns="91440" bIns="45720" rtlCol="0"/>
+          <a:lstStyle>
+            <a:lvl1pPr algn="r">
+              <a:defRPr sz="1200"/>
+            </a:lvl1pPr>
+          </a:lstStyle>
+          <a:p>
+            <a:r>
+              <a:rPr lang="cs-CZ" smtClean="0"/>
+              <a:t>1.7.2013</a:t>
+            </a:r>
+            <a:endParaRPr lang="cs-CZ" smtClean="0"/>
+          </a:p>
+        </p:txBody>
+      </p:sp>
+      <p:sp>
+        <p:nvSpPr>
+          <p:cNvPr id="4" name="Slide Image Placeholder 3"/>
+          <p:cNvSpPr>
+            <a:spLocks noGrp="1" noRot="1" noChangeAspect="1"/>
+          </p:cNvSpPr>
+          <p:nvPr>
+            <p:ph type="sldImg" idx="2"/>
+          </p:nvPr>
+        </p:nvSpPr>
+        <p:spPr>
+          <a:xfrm>
+            <a:off x="2857500" y="512763"/>
+            <a:ext cx="3429000" cy="2566987"/>
+          </a:xfrm>
+          <a:prstGeom prst="rect">
+            <a:avLst/>
+          </a:prstGeom>
+          <a:noFill/>
+          <a:ln w="12700">
+            <a:solidFill>
+              <a:prstClr val="black"/>
+            </a:solidFill>
+          </a:ln>
+        </p:spPr>
+        <p:txBody>
+          <a:bodyPr vert="horz" lIns="91440" tIns="45720" rIns="91440" bIns="45720" rtlCol="0" anchor="ctr"/>
+          <a:lstStyle/>
+          <a:p/>
+        </p:txBody>
+      </p:sp>
+      <p:sp>
+        <p:nvSpPr>
+          <p:cNvPr id="5" name="Notes Placeholder 4"/>
+          <p:cNvSpPr>
+            <a:spLocks noGrp="1"/>
+          </p:cNvSpPr>
+          <p:nvPr>
+            <p:ph type="body" sz="quarter" idx="3"/>
+          </p:nvPr>
+        </p:nvSpPr>
+        <p:spPr>
+          <a:xfrm>
+            <a:off x="914400" y="3251200"/>
+            <a:ext cx="7315200" cy="3081338"/>
+          </a:xfrm>
+          <a:prstGeom prst="rect">
+            <a:avLst/>
+          </a:prstGeom>
+        </p:spPr>
+        <p:txBody>
+          <a:bodyPr vert="horz" lIns="91440" tIns="45720" rIns="91440" bIns="45720" rtlCol="0" anchor="ctr"/>
+          <a:lstStyle>
+            <a:lvl1pPr algn="l">
+              <a:defRPr sz="1400" b="0" i="0" u="none" strike="noStrike"/>
+            </a:lvl1pPr>
+          </a:lstStyle>
+          <a:p>
+            <a:pPr marL="0" indent="0" algn="l">
+              <a:lnSpc>
+                <a:spcPct val="100000"/>
+              </a:lnSpc>
+            </a:pPr>
+            <a:r>
+              <a:rPr lang="en-US" sz="1400" b="0" i="0" u="none" strike="noStrike">
+                <a:solidFill>
+                  <a:srgbClr val="000000"/>
+                </a:solidFill>
+              </a:rPr>
+              <a:t>This POC validates the core technical feasibility of a third-party IMS Application Server: a sippy-based B2BUA signalling plane, declarative YAML routing engine, multi-format number translation, structured logging, and real-time ops console.</a:t>
+            </a:r>
+            <a:endParaRPr lang="en-US" sz="1400" b="0" i="0" u="none" strike="noStrike">
+              <a:solidFill>
+                <a:srgbClr val="000000"/>
+              </a:solidFill>
+            </a:endParaRPr>
+          </a:p>
+          <a:p>
+            <a:pPr marL="0" indent="0" algn="l">
+              <a:lnSpc>
+                <a:spcPct val="100000"/>
+              </a:lnSpc>
+            </a:pPr>
+            <a:r>
+              <a:rPr lang="en-US" sz="1400" b="0" i="0" u="none" strike="noStrike">
+                <a:solidFill>
+                  <a:srgbClr val="000000"/>
+                </a:solidFill>
+              </a:rPr>
+              <a:t>All M0-M4 milestones are complete, 119 tests pass, and 6 architecture decisions are documented. Current version v0.5.0, Apache-2.0 open source.</a:t>
+            </a:r>
+            <a:endParaRPr lang="en-US" sz="1400" b="0" i="0" u="none" strike="noStrike">
+              <a:solidFill>
+                <a:srgbClr val="000000"/>
+              </a:solidFill>
+            </a:endParaRPr>
+          </a:p>
+          <a:p>
+            <a:pPr marL="0" indent="0" algn="l">
+              <a:lnSpc>
+                <a:spcPct val="100000"/>
+              </a:lnSpc>
+            </a:pPr>
+            <a:r>
+              <a:rPr lang="en-US" sz="1400" b="0" i="0" u="none" strike="noStrike">
+                <a:solidFill>
+                  <a:srgbClr val="000000"/>
+                </a:solidFill>
+              </a:rPr>
+              <a:t>Next step: evolve to production-grade deployment following the registered restriction and TODO roadmap.</a:t>
+            </a:r>
+            <a:endParaRPr lang="en-US" sz="1400" b="0" i="0" u="none" strike="noStrike">
+              <a:solidFill>
+                <a:srgbClr val="000000"/>
+              </a:solidFill>
+            </a:endParaRPr>
+          </a:p>
+        </p:txBody>
+      </p:sp>
+      <p:sp>
+        <p:nvSpPr>
+          <p:cNvPr id="6" name="Footer Placeholder 5"/>
+          <p:cNvSpPr>
+            <a:spLocks noGrp="1"/>
+          </p:cNvSpPr>
+          <p:nvPr>
+            <p:ph type="ftr" sz="quarter" idx="4"/>
+          </p:nvPr>
+        </p:nvSpPr>
+        <p:spPr>
+          <a:xfrm>
+            <a:off x="0" y="6502400"/>
+            <a:ext cx="3962400" cy="341313"/>
+          </a:xfrm>
+          <a:prstGeom prst="rect">
+            <a:avLst/>
+          </a:prstGeom>
+        </p:spPr>
+        <p:txBody>
+          <a:bodyPr vert="horz" lIns="91440" tIns="45720" rIns="91440" bIns="45720" rtlCol="0" anchor="b"/>
+          <a:lstStyle>
+            <a:lvl1pPr algn="l">
+              <a:defRPr sz="1200"/>
+            </a:lvl1pPr>
+          </a:lstStyle>
+          <a:p/>
+        </p:txBody>
+      </p:sp>
+      <p:sp>
+        <p:nvSpPr>
+          <p:cNvPr id="7" name="Slide Number Placeholder 6"/>
+          <p:cNvSpPr>
+            <a:spLocks noGrp="1"/>
+          </p:cNvSpPr>
+          <p:nvPr>
+            <p:ph type="sldNum" sz="quarter" idx="5"/>
+          </p:nvPr>
+        </p:nvSpPr>
+        <p:spPr>
+          <a:xfrm>
+            <a:off x="5180013" y="6502400"/>
+            <a:ext cx="3962400" cy="341313"/>
+          </a:xfrm>
+          <a:prstGeom prst="rect">
+            <a:avLst/>
+          </a:prstGeom>
+        </p:spPr>
+        <p:txBody>
+          <a:bodyPr vert="horz" lIns="91440" tIns="45720" rIns="91440" bIns="45720" rtlCol="0" anchor="b"/>
+          <a:lstStyle>
+            <a:lvl1pPr algn="r">
+              <a:defRPr sz="1200"/>
+            </a:lvl1pPr>
+          </a:lstStyle>
+          <a:p>
+            <a:r>
+              <a:rPr lang="cs-CZ" smtClean="0"/>
+              <a:t>‹#›</a:t>
+            </a:r>
+            <a:endParaRPr lang="cs-CZ" smtClean="0"/>
+          </a:p>
+        </p:txBody>
+      </p:sp>
+    </p:spTree>
+  </p:cSld>
+  <p:clrMapOvr>
+    <a:masterClrMapping/>
+  </p:clrMapOvr>
+</p:notes>
+</file>
+
+<file path=ppt/notesSlides/notesSlide15.xml><?xml version="1.0" encoding="utf-8"?>
+<p:notes xmlns:a="http://schemas.openxmlformats.org/drawingml/2006/main" xmlns:r="http://schemas.openxmlformats.org/officeDocument/2006/relationships" xmlns:p="http://schemas.openxmlformats.org/presentationml/2006/main">
+  <p:cSld>
+    <p:spTree>
+      <p:nvGrpSpPr>
+        <p:cNvPr id="1" name=""/>
+        <p:cNvGrpSpPr/>
+        <p:nvPr/>
+      </p:nvGrpSpPr>
+      <p:grpSpPr>
+        <a:xfrm>
+          <a:off x="0" y="0"/>
+          <a:ext cx="0" cy="0"/>
+          <a:chOff x="0" y="0"/>
+          <a:chExt cx="0" cy="0"/>
+        </a:xfrm>
+      </p:grpSpPr>
+      <p:sp>
+        <p:nvSpPr>
+          <p:cNvPr id="2" name="Header Placeholder 1"/>
+          <p:cNvSpPr>
+            <a:spLocks noGrp="1"/>
+          </p:cNvSpPr>
+          <p:nvPr>
+            <p:ph type="hdr" sz="quarter"/>
+          </p:nvPr>
+        </p:nvSpPr>
+        <p:spPr>
+          <a:xfrm>
+            <a:off x="0" y="0"/>
+            <a:ext cx="3962400" cy="342900"/>
+          </a:xfrm>
+          <a:prstGeom prst="rect">
+            <a:avLst/>
+          </a:prstGeom>
+        </p:spPr>
+        <p:txBody>
+          <a:bodyPr vert="horz" lIns="91440" tIns="45720" rIns="91440" bIns="45720" rtlCol="0"/>
+          <a:lstStyle>
+            <a:lvl1pPr algn="l">
+              <a:defRPr sz="1200"/>
+            </a:lvl1pPr>
+          </a:lstStyle>
+          <a:p/>
+        </p:txBody>
+      </p:sp>
+      <p:sp>
+        <p:nvSpPr>
+          <p:cNvPr id="3" name="Date Placeholder 2"/>
+          <p:cNvSpPr>
+            <a:spLocks noGrp="1"/>
+          </p:cNvSpPr>
+          <p:nvPr>
+            <p:ph type="dt" idx="1"/>
+          </p:nvPr>
+        </p:nvSpPr>
+        <p:spPr>
+          <a:xfrm>
+            <a:off x="5180013" y="0"/>
+            <a:ext cx="3962400" cy="342900"/>
+          </a:xfrm>
+          <a:prstGeom prst="rect">
+            <a:avLst/>
+          </a:prstGeom>
+        </p:spPr>
+        <p:txBody>
+          <a:bodyPr vert="horz" lIns="91440" tIns="45720" rIns="91440" bIns="45720" rtlCol="0"/>
+          <a:lstStyle>
+            <a:lvl1pPr algn="r">
+              <a:defRPr sz="1200"/>
+            </a:lvl1pPr>
+          </a:lstStyle>
+          <a:p>
+            <a:r>
+              <a:rPr lang="cs-CZ" smtClean="0"/>
+              <a:t>1.7.2013</a:t>
+            </a:r>
+            <a:endParaRPr lang="cs-CZ" smtClean="0"/>
+          </a:p>
+        </p:txBody>
+      </p:sp>
+      <p:sp>
+        <p:nvSpPr>
+          <p:cNvPr id="4" name="Slide Image Placeholder 3"/>
+          <p:cNvSpPr>
+            <a:spLocks noGrp="1" noRot="1" noChangeAspect="1"/>
+          </p:cNvSpPr>
+          <p:nvPr>
+            <p:ph type="sldImg" idx="2"/>
+          </p:nvPr>
+        </p:nvSpPr>
+        <p:spPr>
+          <a:xfrm>
+            <a:off x="2857500" y="512763"/>
+            <a:ext cx="3429000" cy="2566987"/>
+          </a:xfrm>
+          <a:prstGeom prst="rect">
+            <a:avLst/>
+          </a:prstGeom>
+          <a:noFill/>
+          <a:ln w="12700">
+            <a:solidFill>
+              <a:prstClr val="black"/>
+            </a:solidFill>
+          </a:ln>
+        </p:spPr>
+        <p:txBody>
+          <a:bodyPr vert="horz" lIns="91440" tIns="45720" rIns="91440" bIns="45720" rtlCol="0" anchor="ctr"/>
+          <a:lstStyle/>
+          <a:p/>
+        </p:txBody>
+      </p:sp>
+      <p:sp>
+        <p:nvSpPr>
+          <p:cNvPr id="5" name="Notes Placeholder 4"/>
+          <p:cNvSpPr>
+            <a:spLocks noGrp="1"/>
+          </p:cNvSpPr>
+          <p:nvPr>
+            <p:ph type="body" sz="quarter" idx="3"/>
+          </p:nvPr>
+        </p:nvSpPr>
+        <p:spPr>
+          <a:xfrm>
+            <a:off x="914400" y="3251200"/>
+            <a:ext cx="7315200" cy="3081338"/>
+          </a:xfrm>
+          <a:prstGeom prst="rect">
+            <a:avLst/>
+          </a:prstGeom>
+        </p:spPr>
+        <p:txBody>
+          <a:bodyPr vert="horz" lIns="91440" tIns="45720" rIns="91440" bIns="45720" rtlCol="0" anchor="ctr"/>
+          <a:lstStyle>
+            <a:lvl1pPr algn="l">
+              <a:defRPr sz="1400" b="0" i="0" u="none" strike="noStrike"/>
+            </a:lvl1pPr>
+          </a:lstStyle>
+          <a:p>
+            <a:pPr marL="0" indent="0" algn="l">
+              <a:lnSpc>
+                <a:spcPct val="100000"/>
+              </a:lnSpc>
+            </a:pPr>
+            <a:r>
+              <a:rPr lang="en-US" sz="1400" b="0" i="0" u="none" strike="noStrike">
+                <a:solidFill>
+                  <a:srgbClr val="000000"/>
+                </a:solidFill>
+              </a:rPr>
+              <a:t>This POC validates the core technical feasibility of a third-party IMS Application Server: a sippy-based B2BUA signalling plane, declarative YAML routing engine, multi-format number translation, structured logging, and real-time ops console.</a:t>
+            </a:r>
+            <a:endParaRPr lang="en-US" sz="1400" b="0" i="0" u="none" strike="noStrike">
+              <a:solidFill>
+                <a:srgbClr val="000000"/>
+              </a:solidFill>
+            </a:endParaRPr>
+          </a:p>
+          <a:p>
+            <a:pPr marL="0" indent="0" algn="l">
+              <a:lnSpc>
+                <a:spcPct val="100000"/>
+              </a:lnSpc>
+            </a:pPr>
+            <a:r>
+              <a:rPr lang="en-US" sz="1400" b="0" i="0" u="none" strike="noStrike">
+                <a:solidFill>
+                  <a:srgbClr val="000000"/>
+                </a:solidFill>
+              </a:rPr>
+              <a:t>All M0-M4 milestones are complete, 119 tests pass, and 6 architecture decisions are documented. Current version v0.5.0, Apache-2.0 open source.</a:t>
+            </a:r>
+            <a:endParaRPr lang="en-US" sz="1400" b="0" i="0" u="none" strike="noStrike">
+              <a:solidFill>
+                <a:srgbClr val="000000"/>
+              </a:solidFill>
+            </a:endParaRPr>
+          </a:p>
+          <a:p>
+            <a:pPr marL="0" indent="0" algn="l">
+              <a:lnSpc>
+                <a:spcPct val="100000"/>
+              </a:lnSpc>
+            </a:pPr>
+            <a:r>
+              <a:rPr lang="en-US" sz="1400" b="0" i="0" u="none" strike="noStrike">
+                <a:solidFill>
+                  <a:srgbClr val="000000"/>
+                </a:solidFill>
+              </a:rPr>
+              <a:t>Next step: evolve to production-grade deployment following the registered restriction and TODO roadmap.</a:t>
+            </a:r>
+            <a:endParaRPr lang="en-US" sz="1400" b="0" i="0" u="none" strike="noStrike">
+              <a:solidFill>
+                <a:srgbClr val="000000"/>
+              </a:solidFill>
+            </a:endParaRPr>
+          </a:p>
+        </p:txBody>
+      </p:sp>
+      <p:sp>
+        <p:nvSpPr>
+          <p:cNvPr id="6" name="Footer Placeholder 5"/>
+          <p:cNvSpPr>
+            <a:spLocks noGrp="1"/>
+          </p:cNvSpPr>
+          <p:nvPr>
+            <p:ph type="ftr" sz="quarter" idx="4"/>
+          </p:nvPr>
+        </p:nvSpPr>
+        <p:spPr>
+          <a:xfrm>
+            <a:off x="0" y="6502400"/>
+            <a:ext cx="3962400" cy="341313"/>
+          </a:xfrm>
+          <a:prstGeom prst="rect">
+            <a:avLst/>
+          </a:prstGeom>
+        </p:spPr>
+        <p:txBody>
+          <a:bodyPr vert="horz" lIns="91440" tIns="45720" rIns="91440" bIns="45720" rtlCol="0" anchor="b"/>
+          <a:lstStyle>
+            <a:lvl1pPr algn="l">
+              <a:defRPr sz="1200"/>
+            </a:lvl1pPr>
+          </a:lstStyle>
+          <a:p/>
+        </p:txBody>
+      </p:sp>
+      <p:sp>
+        <p:nvSpPr>
+          <p:cNvPr id="7" name="Slide Number Placeholder 6"/>
+          <p:cNvSpPr>
+            <a:spLocks noGrp="1"/>
+          </p:cNvSpPr>
+          <p:nvPr>
+            <p:ph type="sldNum" sz="quarter" idx="5"/>
+          </p:nvPr>
+        </p:nvSpPr>
+        <p:spPr>
+          <a:xfrm>
+            <a:off x="5180013" y="6502400"/>
+            <a:ext cx="3962400" cy="341313"/>
+          </a:xfrm>
+          <a:prstGeom prst="rect">
+            <a:avLst/>
+          </a:prstGeom>
+        </p:spPr>
+        <p:txBody>
+          <a:bodyPr vert="horz" lIns="91440" tIns="45720" rIns="91440" bIns="45720" rtlCol="0" anchor="b"/>
+          <a:lstStyle>
+            <a:lvl1pPr algn="r">
+              <a:defRPr sz="1200"/>
+            </a:lvl1pPr>
+          </a:lstStyle>
+          <a:p>
+            <a:r>
+              <a:rPr lang="cs-CZ" smtClean="0"/>
+              <a:t>‹#›</a:t>
+            </a:r>
+            <a:endParaRPr lang="cs-CZ" smtClean="0"/>
+          </a:p>
+        </p:txBody>
+      </p:sp>
+    </p:spTree>
+  </p:cSld>
+  <p:clrMapOvr>
+    <a:masterClrMapping/>
+  </p:clrMapOvr>
+</p:notes>
+</file>
+
 <file path=ppt/notesSlides/notesSlide2.xml><?xml version="1.0" encoding="utf-8"?>
 <p:notes xmlns:a="http://schemas.openxmlformats.org/drawingml/2006/main" xmlns:r="http://schemas.openxmlformats.org/officeDocument/2006/relationships" xmlns:p="http://schemas.openxmlformats.org/presentationml/2006/main">
   <p:cSld>
@@ -5849,6 +6671,81 @@
 </file>
 
 <file path=ppt/slideLayouts/slideLayout12.xml><?xml version="1.0" encoding="utf-8"?>
+<p:sldLayout xmlns:a="http://schemas.openxmlformats.org/drawingml/2006/main" xmlns:r="http://schemas.openxmlformats.org/officeDocument/2006/relationships" xmlns:p="http://schemas.openxmlformats.org/presentationml/2006/main" type="title" preserve="1">
+  <p:cSld>
+    <p:spTree>
+      <p:nvGrpSpPr>
+        <p:cNvPr id="1" name=""/>
+        <p:cNvGrpSpPr/>
+        <p:nvPr/>
+      </p:nvGrpSpPr>
+      <p:grpSpPr>
+        <a:xfrm>
+          <a:off x="0" y="0"/>
+          <a:ext cx="0" cy="0"/>
+          <a:chOff x="0" y="0"/>
+          <a:chExt cx="0" cy="0"/>
+        </a:xfrm>
+      </p:grpSpPr>
+    </p:spTree>
+  </p:cSld>
+  <p:clrMapOvr>
+    <a:masterClrMapping/>
+  </p:clrMapOvr>
+</p:sldLayout>
+</file>
+
+<file path=ppt/slideLayouts/slideLayout13.xml><?xml version="1.0" encoding="utf-8"?>
+<p:sldLayout xmlns:a="http://schemas.openxmlformats.org/drawingml/2006/main" xmlns:r="http://schemas.openxmlformats.org/officeDocument/2006/relationships" xmlns:p="http://schemas.openxmlformats.org/presentationml/2006/main" type="title" preserve="1">
+  <p:cSld>
+    <p:spTree>
+      <p:nvGrpSpPr>
+        <p:cNvPr id="1" name=""/>
+        <p:cNvGrpSpPr/>
+        <p:nvPr/>
+      </p:nvGrpSpPr>
+      <p:grpSpPr>
+        <a:xfrm>
+          <a:off x="0" y="0"/>
+          <a:ext cx="0" cy="0"/>
+          <a:chOff x="0" y="0"/>
+          <a:chExt cx="0" cy="0"/>
+        </a:xfrm>
+      </p:grpSpPr>
+    </p:spTree>
+  </p:cSld>
+  <p:clrMapOvr>
+    <a:masterClrMapping/>
+  </p:clrMapOvr>
+</p:sldLayout>
+</file>
+
+<file path=ppt/slideLayouts/slideLayout14.xml><?xml version="1.0" encoding="utf-8"?>
+<p:sldLayout xmlns:a="http://schemas.openxmlformats.org/drawingml/2006/main" xmlns:r="http://schemas.openxmlformats.org/officeDocument/2006/relationships" xmlns:p="http://schemas.openxmlformats.org/presentationml/2006/main" type="title" preserve="1">
+  <p:cSld>
+    <p:spTree>
+      <p:nvGrpSpPr>
+        <p:cNvPr id="1" name=""/>
+        <p:cNvGrpSpPr/>
+        <p:nvPr/>
+      </p:nvGrpSpPr>
+      <p:grpSpPr>
+        <a:xfrm>
+          <a:off x="0" y="0"/>
+          <a:ext cx="0" cy="0"/>
+          <a:chOff x="0" y="0"/>
+          <a:chExt cx="0" cy="0"/>
+        </a:xfrm>
+      </p:grpSpPr>
+    </p:spTree>
+  </p:cSld>
+  <p:clrMapOvr>
+    <a:masterClrMapping/>
+  </p:clrMapOvr>
+</p:sldLayout>
+</file>
+
+<file path=ppt/slideLayouts/slideLayout15.xml><?xml version="1.0" encoding="utf-8"?>
 <p:sldLayout xmlns:a="http://schemas.openxmlformats.org/drawingml/2006/main" xmlns:r="http://schemas.openxmlformats.org/officeDocument/2006/relationships" xmlns:p="http://schemas.openxmlformats.org/presentationml/2006/main" type="title" preserve="1">
   <p:cSld>
     <p:spTree>
@@ -14461,6 +15358,2184 @@
 </p:sldMaster>
 </file>
 
+<file path=ppt/slideMasters/slideMaster3.xml><?xml version="1.0" encoding="utf-8"?>
+<p:sldMaster xmlns:a="http://schemas.openxmlformats.org/drawingml/2006/main" xmlns:r="http://schemas.openxmlformats.org/officeDocument/2006/relationships" xmlns:p="http://schemas.openxmlformats.org/presentationml/2006/main">
+  <p:cSld>
+    <p:bg>
+      <p:bgPr>
+        <a:solidFill>
+          <a:srgbClr val="FFFFFF">
+            <a:alpha val="100000"/>
+          </a:srgbClr>
+        </a:solidFill>
+        <a:effectLst/>
+      </p:bgPr>
+    </p:bg>
+    <p:spTree>
+      <p:nvGrpSpPr>
+        <p:cNvPr id="5" name="Shape 5"/>
+        <p:cNvGrpSpPr/>
+        <p:nvPr/>
+      </p:nvGrpSpPr>
+      <p:grpSpPr>
+        <a:xfrm>
+          <a:off x="0" y="0"/>
+          <a:ext cx="0" cy="0"/>
+          <a:chOff x="0" y="0"/>
+          <a:chExt cx="0" cy="0"/>
+        </a:xfrm>
+      </p:grpSpPr>
+    </p:spTree>
+  </p:cSld>
+  <p:clrMap bg1="lt1" tx1="dk1" bg2="dk2" tx2="lt2" accent1="accent1" accent2="accent2" accent3="accent3" accent4="accent4" accent5="accent5" accent6="accent6" hlink="hlink" folHlink="folHlink"/>
+  <p:sldLayoutIdLst>
+    <p:sldLayoutId id="2147483663" r:id="rId1"/>
+  </p:sldLayoutIdLst>
+  <p:hf sldNum="0" hdr="0" ftr="0" dt="0"/>
+  <p:txStyles>
+    <p:titleStyle>
+      <a:defPPr marR="0" lvl="0" algn="l" rtl="0">
+        <a:lnSpc>
+          <a:spcPct val="100000"/>
+        </a:lnSpc>
+        <a:spcBef>
+          <a:spcPts val="0"/>
+        </a:spcBef>
+        <a:spcAft>
+          <a:spcPts val="0"/>
+        </a:spcAft>
+      </a:defPPr>
+      <a:lvl1pPr marR="0" lvl="0" algn="l" rtl="0">
+        <a:lnSpc>
+          <a:spcPct val="100000"/>
+        </a:lnSpc>
+        <a:spcBef>
+          <a:spcPts val="0"/>
+        </a:spcBef>
+        <a:spcAft>
+          <a:spcPts val="0"/>
+        </a:spcAft>
+        <a:buClr>
+          <a:srgbClr val="000000"/>
+        </a:buClr>
+        <a:buFont typeface="Arial" panose="020B0604020202020204"/>
+        <a:defRPr sz="1400" b="0" i="0" u="none" strike="noStrike" cap="none">
+          <a:solidFill>
+            <a:srgbClr val="000000"/>
+          </a:solidFill>
+          <a:latin typeface="Arial" panose="020B0604020202020204"/>
+          <a:ea typeface="Arial" panose="020B0604020202020204"/>
+          <a:cs typeface="Arial" panose="020B0604020202020204"/>
+          <a:sym typeface="Arial" panose="020B0604020202020204"/>
+        </a:defRPr>
+      </a:lvl1pPr>
+      <a:lvl2pPr marR="0" lvl="1" algn="l" rtl="0">
+        <a:lnSpc>
+          <a:spcPct val="100000"/>
+        </a:lnSpc>
+        <a:spcBef>
+          <a:spcPts val="0"/>
+        </a:spcBef>
+        <a:spcAft>
+          <a:spcPts val="0"/>
+        </a:spcAft>
+        <a:buClr>
+          <a:srgbClr val="000000"/>
+        </a:buClr>
+        <a:buFont typeface="Arial" panose="020B0604020202020204"/>
+        <a:defRPr sz="1400" b="0" i="0" u="none" strike="noStrike" cap="none">
+          <a:solidFill>
+            <a:srgbClr val="000000"/>
+          </a:solidFill>
+          <a:latin typeface="Arial" panose="020B0604020202020204"/>
+          <a:ea typeface="Arial" panose="020B0604020202020204"/>
+          <a:cs typeface="Arial" panose="020B0604020202020204"/>
+          <a:sym typeface="Arial" panose="020B0604020202020204"/>
+        </a:defRPr>
+      </a:lvl2pPr>
+      <a:lvl3pPr marR="0" lvl="2" algn="l" rtl="0">
+        <a:lnSpc>
+          <a:spcPct val="100000"/>
+        </a:lnSpc>
+        <a:spcBef>
+          <a:spcPts val="0"/>
+        </a:spcBef>
+        <a:spcAft>
+          <a:spcPts val="0"/>
+        </a:spcAft>
+        <a:buClr>
+          <a:srgbClr val="000000"/>
+        </a:buClr>
+        <a:buFont typeface="Arial" panose="020B0604020202020204"/>
+        <a:defRPr sz="1400" b="0" i="0" u="none" strike="noStrike" cap="none">
+          <a:solidFill>
+            <a:srgbClr val="000000"/>
+          </a:solidFill>
+          <a:latin typeface="Arial" panose="020B0604020202020204"/>
+          <a:ea typeface="Arial" panose="020B0604020202020204"/>
+          <a:cs typeface="Arial" panose="020B0604020202020204"/>
+          <a:sym typeface="Arial" panose="020B0604020202020204"/>
+        </a:defRPr>
+      </a:lvl3pPr>
+      <a:lvl4pPr marR="0" lvl="3" algn="l" rtl="0">
+        <a:lnSpc>
+          <a:spcPct val="100000"/>
+        </a:lnSpc>
+        <a:spcBef>
+          <a:spcPts val="0"/>
+        </a:spcBef>
+        <a:spcAft>
+          <a:spcPts val="0"/>
+        </a:spcAft>
+        <a:buClr>
+          <a:srgbClr val="000000"/>
+        </a:buClr>
+        <a:buFont typeface="Arial" panose="020B0604020202020204"/>
+        <a:defRPr sz="1400" b="0" i="0" u="none" strike="noStrike" cap="none">
+          <a:solidFill>
+            <a:srgbClr val="000000"/>
+          </a:solidFill>
+          <a:latin typeface="Arial" panose="020B0604020202020204"/>
+          <a:ea typeface="Arial" panose="020B0604020202020204"/>
+          <a:cs typeface="Arial" panose="020B0604020202020204"/>
+          <a:sym typeface="Arial" panose="020B0604020202020204"/>
+        </a:defRPr>
+      </a:lvl4pPr>
+      <a:lvl5pPr marR="0" lvl="4" algn="l" rtl="0">
+        <a:lnSpc>
+          <a:spcPct val="100000"/>
+        </a:lnSpc>
+        <a:spcBef>
+          <a:spcPts val="0"/>
+        </a:spcBef>
+        <a:spcAft>
+          <a:spcPts val="0"/>
+        </a:spcAft>
+        <a:buClr>
+          <a:srgbClr val="000000"/>
+        </a:buClr>
+        <a:buFont typeface="Arial" panose="020B0604020202020204"/>
+        <a:defRPr sz="1400" b="0" i="0" u="none" strike="noStrike" cap="none">
+          <a:solidFill>
+            <a:srgbClr val="000000"/>
+          </a:solidFill>
+          <a:latin typeface="Arial" panose="020B0604020202020204"/>
+          <a:ea typeface="Arial" panose="020B0604020202020204"/>
+          <a:cs typeface="Arial" panose="020B0604020202020204"/>
+          <a:sym typeface="Arial" panose="020B0604020202020204"/>
+        </a:defRPr>
+      </a:lvl5pPr>
+      <a:lvl6pPr marR="0" lvl="5" algn="l" rtl="0">
+        <a:lnSpc>
+          <a:spcPct val="100000"/>
+        </a:lnSpc>
+        <a:spcBef>
+          <a:spcPts val="0"/>
+        </a:spcBef>
+        <a:spcAft>
+          <a:spcPts val="0"/>
+        </a:spcAft>
+        <a:buClr>
+          <a:srgbClr val="000000"/>
+        </a:buClr>
+        <a:buFont typeface="Arial" panose="020B0604020202020204"/>
+        <a:defRPr sz="1400" b="0" i="0" u="none" strike="noStrike" cap="none">
+          <a:solidFill>
+            <a:srgbClr val="000000"/>
+          </a:solidFill>
+          <a:latin typeface="Arial" panose="020B0604020202020204"/>
+          <a:ea typeface="Arial" panose="020B0604020202020204"/>
+          <a:cs typeface="Arial" panose="020B0604020202020204"/>
+          <a:sym typeface="Arial" panose="020B0604020202020204"/>
+        </a:defRPr>
+      </a:lvl6pPr>
+      <a:lvl7pPr marR="0" lvl="6" algn="l" rtl="0">
+        <a:lnSpc>
+          <a:spcPct val="100000"/>
+        </a:lnSpc>
+        <a:spcBef>
+          <a:spcPts val="0"/>
+        </a:spcBef>
+        <a:spcAft>
+          <a:spcPts val="0"/>
+        </a:spcAft>
+        <a:buClr>
+          <a:srgbClr val="000000"/>
+        </a:buClr>
+        <a:buFont typeface="Arial" panose="020B0604020202020204"/>
+        <a:defRPr sz="1400" b="0" i="0" u="none" strike="noStrike" cap="none">
+          <a:solidFill>
+            <a:srgbClr val="000000"/>
+          </a:solidFill>
+          <a:latin typeface="Arial" panose="020B0604020202020204"/>
+          <a:ea typeface="Arial" panose="020B0604020202020204"/>
+          <a:cs typeface="Arial" panose="020B0604020202020204"/>
+          <a:sym typeface="Arial" panose="020B0604020202020204"/>
+        </a:defRPr>
+      </a:lvl7pPr>
+      <a:lvl8pPr marR="0" lvl="7" algn="l" rtl="0">
+        <a:lnSpc>
+          <a:spcPct val="100000"/>
+        </a:lnSpc>
+        <a:spcBef>
+          <a:spcPts val="0"/>
+        </a:spcBef>
+        <a:spcAft>
+          <a:spcPts val="0"/>
+        </a:spcAft>
+        <a:buClr>
+          <a:srgbClr val="000000"/>
+        </a:buClr>
+        <a:buFont typeface="Arial" panose="020B0604020202020204"/>
+        <a:defRPr sz="1400" b="0" i="0" u="none" strike="noStrike" cap="none">
+          <a:solidFill>
+            <a:srgbClr val="000000"/>
+          </a:solidFill>
+          <a:latin typeface="Arial" panose="020B0604020202020204"/>
+          <a:ea typeface="Arial" panose="020B0604020202020204"/>
+          <a:cs typeface="Arial" panose="020B0604020202020204"/>
+          <a:sym typeface="Arial" panose="020B0604020202020204"/>
+        </a:defRPr>
+      </a:lvl8pPr>
+      <a:lvl9pPr marR="0" lvl="8" algn="l" rtl="0">
+        <a:lnSpc>
+          <a:spcPct val="100000"/>
+        </a:lnSpc>
+        <a:spcBef>
+          <a:spcPts val="0"/>
+        </a:spcBef>
+        <a:spcAft>
+          <a:spcPts val="0"/>
+        </a:spcAft>
+        <a:buClr>
+          <a:srgbClr val="000000"/>
+        </a:buClr>
+        <a:buFont typeface="Arial" panose="020B0604020202020204"/>
+        <a:defRPr sz="1400" b="0" i="0" u="none" strike="noStrike" cap="none">
+          <a:solidFill>
+            <a:srgbClr val="000000"/>
+          </a:solidFill>
+          <a:latin typeface="Arial" panose="020B0604020202020204"/>
+          <a:ea typeface="Arial" panose="020B0604020202020204"/>
+          <a:cs typeface="Arial" panose="020B0604020202020204"/>
+          <a:sym typeface="Arial" panose="020B0604020202020204"/>
+        </a:defRPr>
+      </a:lvl9pPr>
+    </p:titleStyle>
+    <p:bodyStyle>
+      <a:defPPr marR="0" lvl="0" algn="l" rtl="0">
+        <a:lnSpc>
+          <a:spcPct val="100000"/>
+        </a:lnSpc>
+        <a:spcBef>
+          <a:spcPts val="0"/>
+        </a:spcBef>
+        <a:spcAft>
+          <a:spcPts val="0"/>
+        </a:spcAft>
+      </a:defPPr>
+      <a:lvl1pPr marR="0" lvl="0" algn="l" rtl="0">
+        <a:lnSpc>
+          <a:spcPct val="100000"/>
+        </a:lnSpc>
+        <a:spcBef>
+          <a:spcPts val="0"/>
+        </a:spcBef>
+        <a:spcAft>
+          <a:spcPts val="0"/>
+        </a:spcAft>
+        <a:buClr>
+          <a:srgbClr val="000000"/>
+        </a:buClr>
+        <a:buFont typeface="Arial" panose="020B0604020202020204"/>
+        <a:defRPr sz="1400" b="0" i="0" u="none" strike="noStrike" cap="none">
+          <a:solidFill>
+            <a:srgbClr val="000000"/>
+          </a:solidFill>
+          <a:latin typeface="Arial" panose="020B0604020202020204"/>
+          <a:ea typeface="Arial" panose="020B0604020202020204"/>
+          <a:cs typeface="Arial" panose="020B0604020202020204"/>
+          <a:sym typeface="Arial" panose="020B0604020202020204"/>
+        </a:defRPr>
+      </a:lvl1pPr>
+      <a:lvl2pPr marR="0" lvl="1" algn="l" rtl="0">
+        <a:lnSpc>
+          <a:spcPct val="100000"/>
+        </a:lnSpc>
+        <a:spcBef>
+          <a:spcPts val="0"/>
+        </a:spcBef>
+        <a:spcAft>
+          <a:spcPts val="0"/>
+        </a:spcAft>
+        <a:buClr>
+          <a:srgbClr val="000000"/>
+        </a:buClr>
+        <a:buFont typeface="Arial" panose="020B0604020202020204"/>
+        <a:defRPr sz="1400" b="0" i="0" u="none" strike="noStrike" cap="none">
+          <a:solidFill>
+            <a:srgbClr val="000000"/>
+          </a:solidFill>
+          <a:latin typeface="Arial" panose="020B0604020202020204"/>
+          <a:ea typeface="Arial" panose="020B0604020202020204"/>
+          <a:cs typeface="Arial" panose="020B0604020202020204"/>
+          <a:sym typeface="Arial" panose="020B0604020202020204"/>
+        </a:defRPr>
+      </a:lvl2pPr>
+      <a:lvl3pPr marR="0" lvl="2" algn="l" rtl="0">
+        <a:lnSpc>
+          <a:spcPct val="100000"/>
+        </a:lnSpc>
+        <a:spcBef>
+          <a:spcPts val="0"/>
+        </a:spcBef>
+        <a:spcAft>
+          <a:spcPts val="0"/>
+        </a:spcAft>
+        <a:buClr>
+          <a:srgbClr val="000000"/>
+        </a:buClr>
+        <a:buFont typeface="Arial" panose="020B0604020202020204"/>
+        <a:defRPr sz="1400" b="0" i="0" u="none" strike="noStrike" cap="none">
+          <a:solidFill>
+            <a:srgbClr val="000000"/>
+          </a:solidFill>
+          <a:latin typeface="Arial" panose="020B0604020202020204"/>
+          <a:ea typeface="Arial" panose="020B0604020202020204"/>
+          <a:cs typeface="Arial" panose="020B0604020202020204"/>
+          <a:sym typeface="Arial" panose="020B0604020202020204"/>
+        </a:defRPr>
+      </a:lvl3pPr>
+      <a:lvl4pPr marR="0" lvl="3" algn="l" rtl="0">
+        <a:lnSpc>
+          <a:spcPct val="100000"/>
+        </a:lnSpc>
+        <a:spcBef>
+          <a:spcPts val="0"/>
+        </a:spcBef>
+        <a:spcAft>
+          <a:spcPts val="0"/>
+        </a:spcAft>
+        <a:buClr>
+          <a:srgbClr val="000000"/>
+        </a:buClr>
+        <a:buFont typeface="Arial" panose="020B0604020202020204"/>
+        <a:defRPr sz="1400" b="0" i="0" u="none" strike="noStrike" cap="none">
+          <a:solidFill>
+            <a:srgbClr val="000000"/>
+          </a:solidFill>
+          <a:latin typeface="Arial" panose="020B0604020202020204"/>
+          <a:ea typeface="Arial" panose="020B0604020202020204"/>
+          <a:cs typeface="Arial" panose="020B0604020202020204"/>
+          <a:sym typeface="Arial" panose="020B0604020202020204"/>
+        </a:defRPr>
+      </a:lvl4pPr>
+      <a:lvl5pPr marR="0" lvl="4" algn="l" rtl="0">
+        <a:lnSpc>
+          <a:spcPct val="100000"/>
+        </a:lnSpc>
+        <a:spcBef>
+          <a:spcPts val="0"/>
+        </a:spcBef>
+        <a:spcAft>
+          <a:spcPts val="0"/>
+        </a:spcAft>
+        <a:buClr>
+          <a:srgbClr val="000000"/>
+        </a:buClr>
+        <a:buFont typeface="Arial" panose="020B0604020202020204"/>
+        <a:defRPr sz="1400" b="0" i="0" u="none" strike="noStrike" cap="none">
+          <a:solidFill>
+            <a:srgbClr val="000000"/>
+          </a:solidFill>
+          <a:latin typeface="Arial" panose="020B0604020202020204"/>
+          <a:ea typeface="Arial" panose="020B0604020202020204"/>
+          <a:cs typeface="Arial" panose="020B0604020202020204"/>
+          <a:sym typeface="Arial" panose="020B0604020202020204"/>
+        </a:defRPr>
+      </a:lvl5pPr>
+      <a:lvl6pPr marR="0" lvl="5" algn="l" rtl="0">
+        <a:lnSpc>
+          <a:spcPct val="100000"/>
+        </a:lnSpc>
+        <a:spcBef>
+          <a:spcPts val="0"/>
+        </a:spcBef>
+        <a:spcAft>
+          <a:spcPts val="0"/>
+        </a:spcAft>
+        <a:buClr>
+          <a:srgbClr val="000000"/>
+        </a:buClr>
+        <a:buFont typeface="Arial" panose="020B0604020202020204"/>
+        <a:defRPr sz="1400" b="0" i="0" u="none" strike="noStrike" cap="none">
+          <a:solidFill>
+            <a:srgbClr val="000000"/>
+          </a:solidFill>
+          <a:latin typeface="Arial" panose="020B0604020202020204"/>
+          <a:ea typeface="Arial" panose="020B0604020202020204"/>
+          <a:cs typeface="Arial" panose="020B0604020202020204"/>
+          <a:sym typeface="Arial" panose="020B0604020202020204"/>
+        </a:defRPr>
+      </a:lvl6pPr>
+      <a:lvl7pPr marR="0" lvl="6" algn="l" rtl="0">
+        <a:lnSpc>
+          <a:spcPct val="100000"/>
+        </a:lnSpc>
+        <a:spcBef>
+          <a:spcPts val="0"/>
+        </a:spcBef>
+        <a:spcAft>
+          <a:spcPts val="0"/>
+        </a:spcAft>
+        <a:buClr>
+          <a:srgbClr val="000000"/>
+        </a:buClr>
+        <a:buFont typeface="Arial" panose="020B0604020202020204"/>
+        <a:defRPr sz="1400" b="0" i="0" u="none" strike="noStrike" cap="none">
+          <a:solidFill>
+            <a:srgbClr val="000000"/>
+          </a:solidFill>
+          <a:latin typeface="Arial" panose="020B0604020202020204"/>
+          <a:ea typeface="Arial" panose="020B0604020202020204"/>
+          <a:cs typeface="Arial" panose="020B0604020202020204"/>
+          <a:sym typeface="Arial" panose="020B0604020202020204"/>
+        </a:defRPr>
+      </a:lvl7pPr>
+      <a:lvl8pPr marR="0" lvl="7" algn="l" rtl="0">
+        <a:lnSpc>
+          <a:spcPct val="100000"/>
+        </a:lnSpc>
+        <a:spcBef>
+          <a:spcPts val="0"/>
+        </a:spcBef>
+        <a:spcAft>
+          <a:spcPts val="0"/>
+        </a:spcAft>
+        <a:buClr>
+          <a:srgbClr val="000000"/>
+        </a:buClr>
+        <a:buFont typeface="Arial" panose="020B0604020202020204"/>
+        <a:defRPr sz="1400" b="0" i="0" u="none" strike="noStrike" cap="none">
+          <a:solidFill>
+            <a:srgbClr val="000000"/>
+          </a:solidFill>
+          <a:latin typeface="Arial" panose="020B0604020202020204"/>
+          <a:ea typeface="Arial" panose="020B0604020202020204"/>
+          <a:cs typeface="Arial" panose="020B0604020202020204"/>
+          <a:sym typeface="Arial" panose="020B0604020202020204"/>
+        </a:defRPr>
+      </a:lvl8pPr>
+      <a:lvl9pPr marR="0" lvl="8" algn="l" rtl="0">
+        <a:lnSpc>
+          <a:spcPct val="100000"/>
+        </a:lnSpc>
+        <a:spcBef>
+          <a:spcPts val="0"/>
+        </a:spcBef>
+        <a:spcAft>
+          <a:spcPts val="0"/>
+        </a:spcAft>
+        <a:buClr>
+          <a:srgbClr val="000000"/>
+        </a:buClr>
+        <a:buFont typeface="Arial" panose="020B0604020202020204"/>
+        <a:defRPr sz="1400" b="0" i="0" u="none" strike="noStrike" cap="none">
+          <a:solidFill>
+            <a:srgbClr val="000000"/>
+          </a:solidFill>
+          <a:latin typeface="Arial" panose="020B0604020202020204"/>
+          <a:ea typeface="Arial" panose="020B0604020202020204"/>
+          <a:cs typeface="Arial" panose="020B0604020202020204"/>
+          <a:sym typeface="Arial" panose="020B0604020202020204"/>
+        </a:defRPr>
+      </a:lvl9pPr>
+    </p:bodyStyle>
+    <p:otherStyle>
+      <a:defPPr marR="0" lvl="0" algn="l" rtl="0">
+        <a:lnSpc>
+          <a:spcPct val="100000"/>
+        </a:lnSpc>
+        <a:spcBef>
+          <a:spcPts val="0"/>
+        </a:spcBef>
+        <a:spcAft>
+          <a:spcPts val="0"/>
+        </a:spcAft>
+      </a:defPPr>
+      <a:lvl1pPr marR="0" lvl="0" algn="l" rtl="0">
+        <a:lnSpc>
+          <a:spcPct val="100000"/>
+        </a:lnSpc>
+        <a:spcBef>
+          <a:spcPts val="0"/>
+        </a:spcBef>
+        <a:spcAft>
+          <a:spcPts val="0"/>
+        </a:spcAft>
+        <a:buClr>
+          <a:srgbClr val="000000"/>
+        </a:buClr>
+        <a:buFont typeface="Arial" panose="020B0604020202020204"/>
+        <a:defRPr sz="1400" b="0" i="0" u="none" strike="noStrike" cap="none">
+          <a:solidFill>
+            <a:srgbClr val="000000"/>
+          </a:solidFill>
+          <a:latin typeface="Arial" panose="020B0604020202020204"/>
+          <a:ea typeface="Arial" panose="020B0604020202020204"/>
+          <a:cs typeface="Arial" panose="020B0604020202020204"/>
+          <a:sym typeface="Arial" panose="020B0604020202020204"/>
+        </a:defRPr>
+      </a:lvl1pPr>
+      <a:lvl2pPr marR="0" lvl="1" algn="l" rtl="0">
+        <a:lnSpc>
+          <a:spcPct val="100000"/>
+        </a:lnSpc>
+        <a:spcBef>
+          <a:spcPts val="0"/>
+        </a:spcBef>
+        <a:spcAft>
+          <a:spcPts val="0"/>
+        </a:spcAft>
+        <a:buClr>
+          <a:srgbClr val="000000"/>
+        </a:buClr>
+        <a:buFont typeface="Arial" panose="020B0604020202020204"/>
+        <a:defRPr sz="1400" b="0" i="0" u="none" strike="noStrike" cap="none">
+          <a:solidFill>
+            <a:srgbClr val="000000"/>
+          </a:solidFill>
+          <a:latin typeface="Arial" panose="020B0604020202020204"/>
+          <a:ea typeface="Arial" panose="020B0604020202020204"/>
+          <a:cs typeface="Arial" panose="020B0604020202020204"/>
+          <a:sym typeface="Arial" panose="020B0604020202020204"/>
+        </a:defRPr>
+      </a:lvl2pPr>
+      <a:lvl3pPr marR="0" lvl="2" algn="l" rtl="0">
+        <a:lnSpc>
+          <a:spcPct val="100000"/>
+        </a:lnSpc>
+        <a:spcBef>
+          <a:spcPts val="0"/>
+        </a:spcBef>
+        <a:spcAft>
+          <a:spcPts val="0"/>
+        </a:spcAft>
+        <a:buClr>
+          <a:srgbClr val="000000"/>
+        </a:buClr>
+        <a:buFont typeface="Arial" panose="020B0604020202020204"/>
+        <a:defRPr sz="1400" b="0" i="0" u="none" strike="noStrike" cap="none">
+          <a:solidFill>
+            <a:srgbClr val="000000"/>
+          </a:solidFill>
+          <a:latin typeface="Arial" panose="020B0604020202020204"/>
+          <a:ea typeface="Arial" panose="020B0604020202020204"/>
+          <a:cs typeface="Arial" panose="020B0604020202020204"/>
+          <a:sym typeface="Arial" panose="020B0604020202020204"/>
+        </a:defRPr>
+      </a:lvl3pPr>
+      <a:lvl4pPr marR="0" lvl="3" algn="l" rtl="0">
+        <a:lnSpc>
+          <a:spcPct val="100000"/>
+        </a:lnSpc>
+        <a:spcBef>
+          <a:spcPts val="0"/>
+        </a:spcBef>
+        <a:spcAft>
+          <a:spcPts val="0"/>
+        </a:spcAft>
+        <a:buClr>
+          <a:srgbClr val="000000"/>
+        </a:buClr>
+        <a:buFont typeface="Arial" panose="020B0604020202020204"/>
+        <a:defRPr sz="1400" b="0" i="0" u="none" strike="noStrike" cap="none">
+          <a:solidFill>
+            <a:srgbClr val="000000"/>
+          </a:solidFill>
+          <a:latin typeface="Arial" panose="020B0604020202020204"/>
+          <a:ea typeface="Arial" panose="020B0604020202020204"/>
+          <a:cs typeface="Arial" panose="020B0604020202020204"/>
+          <a:sym typeface="Arial" panose="020B0604020202020204"/>
+        </a:defRPr>
+      </a:lvl4pPr>
+      <a:lvl5pPr marR="0" lvl="4" algn="l" rtl="0">
+        <a:lnSpc>
+          <a:spcPct val="100000"/>
+        </a:lnSpc>
+        <a:spcBef>
+          <a:spcPts val="0"/>
+        </a:spcBef>
+        <a:spcAft>
+          <a:spcPts val="0"/>
+        </a:spcAft>
+        <a:buClr>
+          <a:srgbClr val="000000"/>
+        </a:buClr>
+        <a:buFont typeface="Arial" panose="020B0604020202020204"/>
+        <a:defRPr sz="1400" b="0" i="0" u="none" strike="noStrike" cap="none">
+          <a:solidFill>
+            <a:srgbClr val="000000"/>
+          </a:solidFill>
+          <a:latin typeface="Arial" panose="020B0604020202020204"/>
+          <a:ea typeface="Arial" panose="020B0604020202020204"/>
+          <a:cs typeface="Arial" panose="020B0604020202020204"/>
+          <a:sym typeface="Arial" panose="020B0604020202020204"/>
+        </a:defRPr>
+      </a:lvl5pPr>
+      <a:lvl6pPr marR="0" lvl="5" algn="l" rtl="0">
+        <a:lnSpc>
+          <a:spcPct val="100000"/>
+        </a:lnSpc>
+        <a:spcBef>
+          <a:spcPts val="0"/>
+        </a:spcBef>
+        <a:spcAft>
+          <a:spcPts val="0"/>
+        </a:spcAft>
+        <a:buClr>
+          <a:srgbClr val="000000"/>
+        </a:buClr>
+        <a:buFont typeface="Arial" panose="020B0604020202020204"/>
+        <a:defRPr sz="1400" b="0" i="0" u="none" strike="noStrike" cap="none">
+          <a:solidFill>
+            <a:srgbClr val="000000"/>
+          </a:solidFill>
+          <a:latin typeface="Arial" panose="020B0604020202020204"/>
+          <a:ea typeface="Arial" panose="020B0604020202020204"/>
+          <a:cs typeface="Arial" panose="020B0604020202020204"/>
+          <a:sym typeface="Arial" panose="020B0604020202020204"/>
+        </a:defRPr>
+      </a:lvl6pPr>
+      <a:lvl7pPr marR="0" lvl="6" algn="l" rtl="0">
+        <a:lnSpc>
+          <a:spcPct val="100000"/>
+        </a:lnSpc>
+        <a:spcBef>
+          <a:spcPts val="0"/>
+        </a:spcBef>
+        <a:spcAft>
+          <a:spcPts val="0"/>
+        </a:spcAft>
+        <a:buClr>
+          <a:srgbClr val="000000"/>
+        </a:buClr>
+        <a:buFont typeface="Arial" panose="020B0604020202020204"/>
+        <a:defRPr sz="1400" b="0" i="0" u="none" strike="noStrike" cap="none">
+          <a:solidFill>
+            <a:srgbClr val="000000"/>
+          </a:solidFill>
+          <a:latin typeface="Arial" panose="020B0604020202020204"/>
+          <a:ea typeface="Arial" panose="020B0604020202020204"/>
+          <a:cs typeface="Arial" panose="020B0604020202020204"/>
+          <a:sym typeface="Arial" panose="020B0604020202020204"/>
+        </a:defRPr>
+      </a:lvl7pPr>
+      <a:lvl8pPr marR="0" lvl="7" algn="l" rtl="0">
+        <a:lnSpc>
+          <a:spcPct val="100000"/>
+        </a:lnSpc>
+        <a:spcBef>
+          <a:spcPts val="0"/>
+        </a:spcBef>
+        <a:spcAft>
+          <a:spcPts val="0"/>
+        </a:spcAft>
+        <a:buClr>
+          <a:srgbClr val="000000"/>
+        </a:buClr>
+        <a:buFont typeface="Arial" panose="020B0604020202020204"/>
+        <a:defRPr sz="1400" b="0" i="0" u="none" strike="noStrike" cap="none">
+          <a:solidFill>
+            <a:srgbClr val="000000"/>
+          </a:solidFill>
+          <a:latin typeface="Arial" panose="020B0604020202020204"/>
+          <a:ea typeface="Arial" panose="020B0604020202020204"/>
+          <a:cs typeface="Arial" panose="020B0604020202020204"/>
+          <a:sym typeface="Arial" panose="020B0604020202020204"/>
+        </a:defRPr>
+      </a:lvl8pPr>
+      <a:lvl9pPr marR="0" lvl="8" algn="l" rtl="0">
+        <a:lnSpc>
+          <a:spcPct val="100000"/>
+        </a:lnSpc>
+        <a:spcBef>
+          <a:spcPts val="0"/>
+        </a:spcBef>
+        <a:spcAft>
+          <a:spcPts val="0"/>
+        </a:spcAft>
+        <a:buClr>
+          <a:srgbClr val="000000"/>
+        </a:buClr>
+        <a:buFont typeface="Arial" panose="020B0604020202020204"/>
+        <a:defRPr sz="1400" b="0" i="0" u="none" strike="noStrike" cap="none">
+          <a:solidFill>
+            <a:srgbClr val="000000"/>
+          </a:solidFill>
+          <a:latin typeface="Arial" panose="020B0604020202020204"/>
+          <a:ea typeface="Arial" panose="020B0604020202020204"/>
+          <a:cs typeface="Arial" panose="020B0604020202020204"/>
+          <a:sym typeface="Arial" panose="020B0604020202020204"/>
+        </a:defRPr>
+      </a:lvl9pPr>
+    </p:otherStyle>
+  </p:txStyles>
+</p:sldMaster>
+</file>
+
+<file path=ppt/slideMasters/slideMaster4.xml><?xml version="1.0" encoding="utf-8"?>
+<p:sldMaster xmlns:a="http://schemas.openxmlformats.org/drawingml/2006/main" xmlns:r="http://schemas.openxmlformats.org/officeDocument/2006/relationships" xmlns:p="http://schemas.openxmlformats.org/presentationml/2006/main">
+  <p:cSld>
+    <p:bg>
+      <p:bgPr>
+        <a:solidFill>
+          <a:srgbClr val="FFFFFF">
+            <a:alpha val="100000"/>
+          </a:srgbClr>
+        </a:solidFill>
+        <a:effectLst/>
+      </p:bgPr>
+    </p:bg>
+    <p:spTree>
+      <p:nvGrpSpPr>
+        <p:cNvPr id="5" name="Shape 5"/>
+        <p:cNvGrpSpPr/>
+        <p:nvPr/>
+      </p:nvGrpSpPr>
+      <p:grpSpPr>
+        <a:xfrm>
+          <a:off x="0" y="0"/>
+          <a:ext cx="0" cy="0"/>
+          <a:chOff x="0" y="0"/>
+          <a:chExt cx="0" cy="0"/>
+        </a:xfrm>
+      </p:grpSpPr>
+    </p:spTree>
+  </p:cSld>
+  <p:clrMap bg1="lt1" tx1="dk1" bg2="dk2" tx2="lt2" accent1="accent1" accent2="accent2" accent3="accent3" accent4="accent4" accent5="accent5" accent6="accent6" hlink="hlink" folHlink="folHlink"/>
+  <p:sldLayoutIdLst>
+    <p:sldLayoutId id="2147483665" r:id="rId1"/>
+  </p:sldLayoutIdLst>
+  <p:hf sldNum="0" hdr="0" ftr="0" dt="0"/>
+  <p:txStyles>
+    <p:titleStyle>
+      <a:defPPr marR="0" lvl="0" algn="l" rtl="0">
+        <a:lnSpc>
+          <a:spcPct val="100000"/>
+        </a:lnSpc>
+        <a:spcBef>
+          <a:spcPts val="0"/>
+        </a:spcBef>
+        <a:spcAft>
+          <a:spcPts val="0"/>
+        </a:spcAft>
+      </a:defPPr>
+      <a:lvl1pPr marR="0" lvl="0" algn="l" rtl="0">
+        <a:lnSpc>
+          <a:spcPct val="100000"/>
+        </a:lnSpc>
+        <a:spcBef>
+          <a:spcPts val="0"/>
+        </a:spcBef>
+        <a:spcAft>
+          <a:spcPts val="0"/>
+        </a:spcAft>
+        <a:buClr>
+          <a:srgbClr val="000000"/>
+        </a:buClr>
+        <a:buFont typeface="Arial" panose="020B0604020202020204"/>
+        <a:defRPr sz="1400" b="0" i="0" u="none" strike="noStrike" cap="none">
+          <a:solidFill>
+            <a:srgbClr val="000000"/>
+          </a:solidFill>
+          <a:latin typeface="Arial" panose="020B0604020202020204"/>
+          <a:ea typeface="Arial" panose="020B0604020202020204"/>
+          <a:cs typeface="Arial" panose="020B0604020202020204"/>
+          <a:sym typeface="Arial" panose="020B0604020202020204"/>
+        </a:defRPr>
+      </a:lvl1pPr>
+      <a:lvl2pPr marR="0" lvl="1" algn="l" rtl="0">
+        <a:lnSpc>
+          <a:spcPct val="100000"/>
+        </a:lnSpc>
+        <a:spcBef>
+          <a:spcPts val="0"/>
+        </a:spcBef>
+        <a:spcAft>
+          <a:spcPts val="0"/>
+        </a:spcAft>
+        <a:buClr>
+          <a:srgbClr val="000000"/>
+        </a:buClr>
+        <a:buFont typeface="Arial" panose="020B0604020202020204"/>
+        <a:defRPr sz="1400" b="0" i="0" u="none" strike="noStrike" cap="none">
+          <a:solidFill>
+            <a:srgbClr val="000000"/>
+          </a:solidFill>
+          <a:latin typeface="Arial" panose="020B0604020202020204"/>
+          <a:ea typeface="Arial" panose="020B0604020202020204"/>
+          <a:cs typeface="Arial" panose="020B0604020202020204"/>
+          <a:sym typeface="Arial" panose="020B0604020202020204"/>
+        </a:defRPr>
+      </a:lvl2pPr>
+      <a:lvl3pPr marR="0" lvl="2" algn="l" rtl="0">
+        <a:lnSpc>
+          <a:spcPct val="100000"/>
+        </a:lnSpc>
+        <a:spcBef>
+          <a:spcPts val="0"/>
+        </a:spcBef>
+        <a:spcAft>
+          <a:spcPts val="0"/>
+        </a:spcAft>
+        <a:buClr>
+          <a:srgbClr val="000000"/>
+        </a:buClr>
+        <a:buFont typeface="Arial" panose="020B0604020202020204"/>
+        <a:defRPr sz="1400" b="0" i="0" u="none" strike="noStrike" cap="none">
+          <a:solidFill>
+            <a:srgbClr val="000000"/>
+          </a:solidFill>
+          <a:latin typeface="Arial" panose="020B0604020202020204"/>
+          <a:ea typeface="Arial" panose="020B0604020202020204"/>
+          <a:cs typeface="Arial" panose="020B0604020202020204"/>
+          <a:sym typeface="Arial" panose="020B0604020202020204"/>
+        </a:defRPr>
+      </a:lvl3pPr>
+      <a:lvl4pPr marR="0" lvl="3" algn="l" rtl="0">
+        <a:lnSpc>
+          <a:spcPct val="100000"/>
+        </a:lnSpc>
+        <a:spcBef>
+          <a:spcPts val="0"/>
+        </a:spcBef>
+        <a:spcAft>
+          <a:spcPts val="0"/>
+        </a:spcAft>
+        <a:buClr>
+          <a:srgbClr val="000000"/>
+        </a:buClr>
+        <a:buFont typeface="Arial" panose="020B0604020202020204"/>
+        <a:defRPr sz="1400" b="0" i="0" u="none" strike="noStrike" cap="none">
+          <a:solidFill>
+            <a:srgbClr val="000000"/>
+          </a:solidFill>
+          <a:latin typeface="Arial" panose="020B0604020202020204"/>
+          <a:ea typeface="Arial" panose="020B0604020202020204"/>
+          <a:cs typeface="Arial" panose="020B0604020202020204"/>
+          <a:sym typeface="Arial" panose="020B0604020202020204"/>
+        </a:defRPr>
+      </a:lvl4pPr>
+      <a:lvl5pPr marR="0" lvl="4" algn="l" rtl="0">
+        <a:lnSpc>
+          <a:spcPct val="100000"/>
+        </a:lnSpc>
+        <a:spcBef>
+          <a:spcPts val="0"/>
+        </a:spcBef>
+        <a:spcAft>
+          <a:spcPts val="0"/>
+        </a:spcAft>
+        <a:buClr>
+          <a:srgbClr val="000000"/>
+        </a:buClr>
+        <a:buFont typeface="Arial" panose="020B0604020202020204"/>
+        <a:defRPr sz="1400" b="0" i="0" u="none" strike="noStrike" cap="none">
+          <a:solidFill>
+            <a:srgbClr val="000000"/>
+          </a:solidFill>
+          <a:latin typeface="Arial" panose="020B0604020202020204"/>
+          <a:ea typeface="Arial" panose="020B0604020202020204"/>
+          <a:cs typeface="Arial" panose="020B0604020202020204"/>
+          <a:sym typeface="Arial" panose="020B0604020202020204"/>
+        </a:defRPr>
+      </a:lvl5pPr>
+      <a:lvl6pPr marR="0" lvl="5" algn="l" rtl="0">
+        <a:lnSpc>
+          <a:spcPct val="100000"/>
+        </a:lnSpc>
+        <a:spcBef>
+          <a:spcPts val="0"/>
+        </a:spcBef>
+        <a:spcAft>
+          <a:spcPts val="0"/>
+        </a:spcAft>
+        <a:buClr>
+          <a:srgbClr val="000000"/>
+        </a:buClr>
+        <a:buFont typeface="Arial" panose="020B0604020202020204"/>
+        <a:defRPr sz="1400" b="0" i="0" u="none" strike="noStrike" cap="none">
+          <a:solidFill>
+            <a:srgbClr val="000000"/>
+          </a:solidFill>
+          <a:latin typeface="Arial" panose="020B0604020202020204"/>
+          <a:ea typeface="Arial" panose="020B0604020202020204"/>
+          <a:cs typeface="Arial" panose="020B0604020202020204"/>
+          <a:sym typeface="Arial" panose="020B0604020202020204"/>
+        </a:defRPr>
+      </a:lvl6pPr>
+      <a:lvl7pPr marR="0" lvl="6" algn="l" rtl="0">
+        <a:lnSpc>
+          <a:spcPct val="100000"/>
+        </a:lnSpc>
+        <a:spcBef>
+          <a:spcPts val="0"/>
+        </a:spcBef>
+        <a:spcAft>
+          <a:spcPts val="0"/>
+        </a:spcAft>
+        <a:buClr>
+          <a:srgbClr val="000000"/>
+        </a:buClr>
+        <a:buFont typeface="Arial" panose="020B0604020202020204"/>
+        <a:defRPr sz="1400" b="0" i="0" u="none" strike="noStrike" cap="none">
+          <a:solidFill>
+            <a:srgbClr val="000000"/>
+          </a:solidFill>
+          <a:latin typeface="Arial" panose="020B0604020202020204"/>
+          <a:ea typeface="Arial" panose="020B0604020202020204"/>
+          <a:cs typeface="Arial" panose="020B0604020202020204"/>
+          <a:sym typeface="Arial" panose="020B0604020202020204"/>
+        </a:defRPr>
+      </a:lvl7pPr>
+      <a:lvl8pPr marR="0" lvl="7" algn="l" rtl="0">
+        <a:lnSpc>
+          <a:spcPct val="100000"/>
+        </a:lnSpc>
+        <a:spcBef>
+          <a:spcPts val="0"/>
+        </a:spcBef>
+        <a:spcAft>
+          <a:spcPts val="0"/>
+        </a:spcAft>
+        <a:buClr>
+          <a:srgbClr val="000000"/>
+        </a:buClr>
+        <a:buFont typeface="Arial" panose="020B0604020202020204"/>
+        <a:defRPr sz="1400" b="0" i="0" u="none" strike="noStrike" cap="none">
+          <a:solidFill>
+            <a:srgbClr val="000000"/>
+          </a:solidFill>
+          <a:latin typeface="Arial" panose="020B0604020202020204"/>
+          <a:ea typeface="Arial" panose="020B0604020202020204"/>
+          <a:cs typeface="Arial" panose="020B0604020202020204"/>
+          <a:sym typeface="Arial" panose="020B0604020202020204"/>
+        </a:defRPr>
+      </a:lvl8pPr>
+      <a:lvl9pPr marR="0" lvl="8" algn="l" rtl="0">
+        <a:lnSpc>
+          <a:spcPct val="100000"/>
+        </a:lnSpc>
+        <a:spcBef>
+          <a:spcPts val="0"/>
+        </a:spcBef>
+        <a:spcAft>
+          <a:spcPts val="0"/>
+        </a:spcAft>
+        <a:buClr>
+          <a:srgbClr val="000000"/>
+        </a:buClr>
+        <a:buFont typeface="Arial" panose="020B0604020202020204"/>
+        <a:defRPr sz="1400" b="0" i="0" u="none" strike="noStrike" cap="none">
+          <a:solidFill>
+            <a:srgbClr val="000000"/>
+          </a:solidFill>
+          <a:latin typeface="Arial" panose="020B0604020202020204"/>
+          <a:ea typeface="Arial" panose="020B0604020202020204"/>
+          <a:cs typeface="Arial" panose="020B0604020202020204"/>
+          <a:sym typeface="Arial" panose="020B0604020202020204"/>
+        </a:defRPr>
+      </a:lvl9pPr>
+    </p:titleStyle>
+    <p:bodyStyle>
+      <a:defPPr marR="0" lvl="0" algn="l" rtl="0">
+        <a:lnSpc>
+          <a:spcPct val="100000"/>
+        </a:lnSpc>
+        <a:spcBef>
+          <a:spcPts val="0"/>
+        </a:spcBef>
+        <a:spcAft>
+          <a:spcPts val="0"/>
+        </a:spcAft>
+      </a:defPPr>
+      <a:lvl1pPr marR="0" lvl="0" algn="l" rtl="0">
+        <a:lnSpc>
+          <a:spcPct val="100000"/>
+        </a:lnSpc>
+        <a:spcBef>
+          <a:spcPts val="0"/>
+        </a:spcBef>
+        <a:spcAft>
+          <a:spcPts val="0"/>
+        </a:spcAft>
+        <a:buClr>
+          <a:srgbClr val="000000"/>
+        </a:buClr>
+        <a:buFont typeface="Arial" panose="020B0604020202020204"/>
+        <a:defRPr sz="1400" b="0" i="0" u="none" strike="noStrike" cap="none">
+          <a:solidFill>
+            <a:srgbClr val="000000"/>
+          </a:solidFill>
+          <a:latin typeface="Arial" panose="020B0604020202020204"/>
+          <a:ea typeface="Arial" panose="020B0604020202020204"/>
+          <a:cs typeface="Arial" panose="020B0604020202020204"/>
+          <a:sym typeface="Arial" panose="020B0604020202020204"/>
+        </a:defRPr>
+      </a:lvl1pPr>
+      <a:lvl2pPr marR="0" lvl="1" algn="l" rtl="0">
+        <a:lnSpc>
+          <a:spcPct val="100000"/>
+        </a:lnSpc>
+        <a:spcBef>
+          <a:spcPts val="0"/>
+        </a:spcBef>
+        <a:spcAft>
+          <a:spcPts val="0"/>
+        </a:spcAft>
+        <a:buClr>
+          <a:srgbClr val="000000"/>
+        </a:buClr>
+        <a:buFont typeface="Arial" panose="020B0604020202020204"/>
+        <a:defRPr sz="1400" b="0" i="0" u="none" strike="noStrike" cap="none">
+          <a:solidFill>
+            <a:srgbClr val="000000"/>
+          </a:solidFill>
+          <a:latin typeface="Arial" panose="020B0604020202020204"/>
+          <a:ea typeface="Arial" panose="020B0604020202020204"/>
+          <a:cs typeface="Arial" panose="020B0604020202020204"/>
+          <a:sym typeface="Arial" panose="020B0604020202020204"/>
+        </a:defRPr>
+      </a:lvl2pPr>
+      <a:lvl3pPr marR="0" lvl="2" algn="l" rtl="0">
+        <a:lnSpc>
+          <a:spcPct val="100000"/>
+        </a:lnSpc>
+        <a:spcBef>
+          <a:spcPts val="0"/>
+        </a:spcBef>
+        <a:spcAft>
+          <a:spcPts val="0"/>
+        </a:spcAft>
+        <a:buClr>
+          <a:srgbClr val="000000"/>
+        </a:buClr>
+        <a:buFont typeface="Arial" panose="020B0604020202020204"/>
+        <a:defRPr sz="1400" b="0" i="0" u="none" strike="noStrike" cap="none">
+          <a:solidFill>
+            <a:srgbClr val="000000"/>
+          </a:solidFill>
+          <a:latin typeface="Arial" panose="020B0604020202020204"/>
+          <a:ea typeface="Arial" panose="020B0604020202020204"/>
+          <a:cs typeface="Arial" panose="020B0604020202020204"/>
+          <a:sym typeface="Arial" panose="020B0604020202020204"/>
+        </a:defRPr>
+      </a:lvl3pPr>
+      <a:lvl4pPr marR="0" lvl="3" algn="l" rtl="0">
+        <a:lnSpc>
+          <a:spcPct val="100000"/>
+        </a:lnSpc>
+        <a:spcBef>
+          <a:spcPts val="0"/>
+        </a:spcBef>
+        <a:spcAft>
+          <a:spcPts val="0"/>
+        </a:spcAft>
+        <a:buClr>
+          <a:srgbClr val="000000"/>
+        </a:buClr>
+        <a:buFont typeface="Arial" panose="020B0604020202020204"/>
+        <a:defRPr sz="1400" b="0" i="0" u="none" strike="noStrike" cap="none">
+          <a:solidFill>
+            <a:srgbClr val="000000"/>
+          </a:solidFill>
+          <a:latin typeface="Arial" panose="020B0604020202020204"/>
+          <a:ea typeface="Arial" panose="020B0604020202020204"/>
+          <a:cs typeface="Arial" panose="020B0604020202020204"/>
+          <a:sym typeface="Arial" panose="020B0604020202020204"/>
+        </a:defRPr>
+      </a:lvl4pPr>
+      <a:lvl5pPr marR="0" lvl="4" algn="l" rtl="0">
+        <a:lnSpc>
+          <a:spcPct val="100000"/>
+        </a:lnSpc>
+        <a:spcBef>
+          <a:spcPts val="0"/>
+        </a:spcBef>
+        <a:spcAft>
+          <a:spcPts val="0"/>
+        </a:spcAft>
+        <a:buClr>
+          <a:srgbClr val="000000"/>
+        </a:buClr>
+        <a:buFont typeface="Arial" panose="020B0604020202020204"/>
+        <a:defRPr sz="1400" b="0" i="0" u="none" strike="noStrike" cap="none">
+          <a:solidFill>
+            <a:srgbClr val="000000"/>
+          </a:solidFill>
+          <a:latin typeface="Arial" panose="020B0604020202020204"/>
+          <a:ea typeface="Arial" panose="020B0604020202020204"/>
+          <a:cs typeface="Arial" panose="020B0604020202020204"/>
+          <a:sym typeface="Arial" panose="020B0604020202020204"/>
+        </a:defRPr>
+      </a:lvl5pPr>
+      <a:lvl6pPr marR="0" lvl="5" algn="l" rtl="0">
+        <a:lnSpc>
+          <a:spcPct val="100000"/>
+        </a:lnSpc>
+        <a:spcBef>
+          <a:spcPts val="0"/>
+        </a:spcBef>
+        <a:spcAft>
+          <a:spcPts val="0"/>
+        </a:spcAft>
+        <a:buClr>
+          <a:srgbClr val="000000"/>
+        </a:buClr>
+        <a:buFont typeface="Arial" panose="020B0604020202020204"/>
+        <a:defRPr sz="1400" b="0" i="0" u="none" strike="noStrike" cap="none">
+          <a:solidFill>
+            <a:srgbClr val="000000"/>
+          </a:solidFill>
+          <a:latin typeface="Arial" panose="020B0604020202020204"/>
+          <a:ea typeface="Arial" panose="020B0604020202020204"/>
+          <a:cs typeface="Arial" panose="020B0604020202020204"/>
+          <a:sym typeface="Arial" panose="020B0604020202020204"/>
+        </a:defRPr>
+      </a:lvl6pPr>
+      <a:lvl7pPr marR="0" lvl="6" algn="l" rtl="0">
+        <a:lnSpc>
+          <a:spcPct val="100000"/>
+        </a:lnSpc>
+        <a:spcBef>
+          <a:spcPts val="0"/>
+        </a:spcBef>
+        <a:spcAft>
+          <a:spcPts val="0"/>
+        </a:spcAft>
+        <a:buClr>
+          <a:srgbClr val="000000"/>
+        </a:buClr>
+        <a:buFont typeface="Arial" panose="020B0604020202020204"/>
+        <a:defRPr sz="1400" b="0" i="0" u="none" strike="noStrike" cap="none">
+          <a:solidFill>
+            <a:srgbClr val="000000"/>
+          </a:solidFill>
+          <a:latin typeface="Arial" panose="020B0604020202020204"/>
+          <a:ea typeface="Arial" panose="020B0604020202020204"/>
+          <a:cs typeface="Arial" panose="020B0604020202020204"/>
+          <a:sym typeface="Arial" panose="020B0604020202020204"/>
+        </a:defRPr>
+      </a:lvl7pPr>
+      <a:lvl8pPr marR="0" lvl="7" algn="l" rtl="0">
+        <a:lnSpc>
+          <a:spcPct val="100000"/>
+        </a:lnSpc>
+        <a:spcBef>
+          <a:spcPts val="0"/>
+        </a:spcBef>
+        <a:spcAft>
+          <a:spcPts val="0"/>
+        </a:spcAft>
+        <a:buClr>
+          <a:srgbClr val="000000"/>
+        </a:buClr>
+        <a:buFont typeface="Arial" panose="020B0604020202020204"/>
+        <a:defRPr sz="1400" b="0" i="0" u="none" strike="noStrike" cap="none">
+          <a:solidFill>
+            <a:srgbClr val="000000"/>
+          </a:solidFill>
+          <a:latin typeface="Arial" panose="020B0604020202020204"/>
+          <a:ea typeface="Arial" panose="020B0604020202020204"/>
+          <a:cs typeface="Arial" panose="020B0604020202020204"/>
+          <a:sym typeface="Arial" panose="020B0604020202020204"/>
+        </a:defRPr>
+      </a:lvl8pPr>
+      <a:lvl9pPr marR="0" lvl="8" algn="l" rtl="0">
+        <a:lnSpc>
+          <a:spcPct val="100000"/>
+        </a:lnSpc>
+        <a:spcBef>
+          <a:spcPts val="0"/>
+        </a:spcBef>
+        <a:spcAft>
+          <a:spcPts val="0"/>
+        </a:spcAft>
+        <a:buClr>
+          <a:srgbClr val="000000"/>
+        </a:buClr>
+        <a:buFont typeface="Arial" panose="020B0604020202020204"/>
+        <a:defRPr sz="1400" b="0" i="0" u="none" strike="noStrike" cap="none">
+          <a:solidFill>
+            <a:srgbClr val="000000"/>
+          </a:solidFill>
+          <a:latin typeface="Arial" panose="020B0604020202020204"/>
+          <a:ea typeface="Arial" panose="020B0604020202020204"/>
+          <a:cs typeface="Arial" panose="020B0604020202020204"/>
+          <a:sym typeface="Arial" panose="020B0604020202020204"/>
+        </a:defRPr>
+      </a:lvl9pPr>
+    </p:bodyStyle>
+    <p:otherStyle>
+      <a:defPPr marR="0" lvl="0" algn="l" rtl="0">
+        <a:lnSpc>
+          <a:spcPct val="100000"/>
+        </a:lnSpc>
+        <a:spcBef>
+          <a:spcPts val="0"/>
+        </a:spcBef>
+        <a:spcAft>
+          <a:spcPts val="0"/>
+        </a:spcAft>
+      </a:defPPr>
+      <a:lvl1pPr marR="0" lvl="0" algn="l" rtl="0">
+        <a:lnSpc>
+          <a:spcPct val="100000"/>
+        </a:lnSpc>
+        <a:spcBef>
+          <a:spcPts val="0"/>
+        </a:spcBef>
+        <a:spcAft>
+          <a:spcPts val="0"/>
+        </a:spcAft>
+        <a:buClr>
+          <a:srgbClr val="000000"/>
+        </a:buClr>
+        <a:buFont typeface="Arial" panose="020B0604020202020204"/>
+        <a:defRPr sz="1400" b="0" i="0" u="none" strike="noStrike" cap="none">
+          <a:solidFill>
+            <a:srgbClr val="000000"/>
+          </a:solidFill>
+          <a:latin typeface="Arial" panose="020B0604020202020204"/>
+          <a:ea typeface="Arial" panose="020B0604020202020204"/>
+          <a:cs typeface="Arial" panose="020B0604020202020204"/>
+          <a:sym typeface="Arial" panose="020B0604020202020204"/>
+        </a:defRPr>
+      </a:lvl1pPr>
+      <a:lvl2pPr marR="0" lvl="1" algn="l" rtl="0">
+        <a:lnSpc>
+          <a:spcPct val="100000"/>
+        </a:lnSpc>
+        <a:spcBef>
+          <a:spcPts val="0"/>
+        </a:spcBef>
+        <a:spcAft>
+          <a:spcPts val="0"/>
+        </a:spcAft>
+        <a:buClr>
+          <a:srgbClr val="000000"/>
+        </a:buClr>
+        <a:buFont typeface="Arial" panose="020B0604020202020204"/>
+        <a:defRPr sz="1400" b="0" i="0" u="none" strike="noStrike" cap="none">
+          <a:solidFill>
+            <a:srgbClr val="000000"/>
+          </a:solidFill>
+          <a:latin typeface="Arial" panose="020B0604020202020204"/>
+          <a:ea typeface="Arial" panose="020B0604020202020204"/>
+          <a:cs typeface="Arial" panose="020B0604020202020204"/>
+          <a:sym typeface="Arial" panose="020B0604020202020204"/>
+        </a:defRPr>
+      </a:lvl2pPr>
+      <a:lvl3pPr marR="0" lvl="2" algn="l" rtl="0">
+        <a:lnSpc>
+          <a:spcPct val="100000"/>
+        </a:lnSpc>
+        <a:spcBef>
+          <a:spcPts val="0"/>
+        </a:spcBef>
+        <a:spcAft>
+          <a:spcPts val="0"/>
+        </a:spcAft>
+        <a:buClr>
+          <a:srgbClr val="000000"/>
+        </a:buClr>
+        <a:buFont typeface="Arial" panose="020B0604020202020204"/>
+        <a:defRPr sz="1400" b="0" i="0" u="none" strike="noStrike" cap="none">
+          <a:solidFill>
+            <a:srgbClr val="000000"/>
+          </a:solidFill>
+          <a:latin typeface="Arial" panose="020B0604020202020204"/>
+          <a:ea typeface="Arial" panose="020B0604020202020204"/>
+          <a:cs typeface="Arial" panose="020B0604020202020204"/>
+          <a:sym typeface="Arial" panose="020B0604020202020204"/>
+        </a:defRPr>
+      </a:lvl3pPr>
+      <a:lvl4pPr marR="0" lvl="3" algn="l" rtl="0">
+        <a:lnSpc>
+          <a:spcPct val="100000"/>
+        </a:lnSpc>
+        <a:spcBef>
+          <a:spcPts val="0"/>
+        </a:spcBef>
+        <a:spcAft>
+          <a:spcPts val="0"/>
+        </a:spcAft>
+        <a:buClr>
+          <a:srgbClr val="000000"/>
+        </a:buClr>
+        <a:buFont typeface="Arial" panose="020B0604020202020204"/>
+        <a:defRPr sz="1400" b="0" i="0" u="none" strike="noStrike" cap="none">
+          <a:solidFill>
+            <a:srgbClr val="000000"/>
+          </a:solidFill>
+          <a:latin typeface="Arial" panose="020B0604020202020204"/>
+          <a:ea typeface="Arial" panose="020B0604020202020204"/>
+          <a:cs typeface="Arial" panose="020B0604020202020204"/>
+          <a:sym typeface="Arial" panose="020B0604020202020204"/>
+        </a:defRPr>
+      </a:lvl4pPr>
+      <a:lvl5pPr marR="0" lvl="4" algn="l" rtl="0">
+        <a:lnSpc>
+          <a:spcPct val="100000"/>
+        </a:lnSpc>
+        <a:spcBef>
+          <a:spcPts val="0"/>
+        </a:spcBef>
+        <a:spcAft>
+          <a:spcPts val="0"/>
+        </a:spcAft>
+        <a:buClr>
+          <a:srgbClr val="000000"/>
+        </a:buClr>
+        <a:buFont typeface="Arial" panose="020B0604020202020204"/>
+        <a:defRPr sz="1400" b="0" i="0" u="none" strike="noStrike" cap="none">
+          <a:solidFill>
+            <a:srgbClr val="000000"/>
+          </a:solidFill>
+          <a:latin typeface="Arial" panose="020B0604020202020204"/>
+          <a:ea typeface="Arial" panose="020B0604020202020204"/>
+          <a:cs typeface="Arial" panose="020B0604020202020204"/>
+          <a:sym typeface="Arial" panose="020B0604020202020204"/>
+        </a:defRPr>
+      </a:lvl5pPr>
+      <a:lvl6pPr marR="0" lvl="5" algn="l" rtl="0">
+        <a:lnSpc>
+          <a:spcPct val="100000"/>
+        </a:lnSpc>
+        <a:spcBef>
+          <a:spcPts val="0"/>
+        </a:spcBef>
+        <a:spcAft>
+          <a:spcPts val="0"/>
+        </a:spcAft>
+        <a:buClr>
+          <a:srgbClr val="000000"/>
+        </a:buClr>
+        <a:buFont typeface="Arial" panose="020B0604020202020204"/>
+        <a:defRPr sz="1400" b="0" i="0" u="none" strike="noStrike" cap="none">
+          <a:solidFill>
+            <a:srgbClr val="000000"/>
+          </a:solidFill>
+          <a:latin typeface="Arial" panose="020B0604020202020204"/>
+          <a:ea typeface="Arial" panose="020B0604020202020204"/>
+          <a:cs typeface="Arial" panose="020B0604020202020204"/>
+          <a:sym typeface="Arial" panose="020B0604020202020204"/>
+        </a:defRPr>
+      </a:lvl6pPr>
+      <a:lvl7pPr marR="0" lvl="6" algn="l" rtl="0">
+        <a:lnSpc>
+          <a:spcPct val="100000"/>
+        </a:lnSpc>
+        <a:spcBef>
+          <a:spcPts val="0"/>
+        </a:spcBef>
+        <a:spcAft>
+          <a:spcPts val="0"/>
+        </a:spcAft>
+        <a:buClr>
+          <a:srgbClr val="000000"/>
+        </a:buClr>
+        <a:buFont typeface="Arial" panose="020B0604020202020204"/>
+        <a:defRPr sz="1400" b="0" i="0" u="none" strike="noStrike" cap="none">
+          <a:solidFill>
+            <a:srgbClr val="000000"/>
+          </a:solidFill>
+          <a:latin typeface="Arial" panose="020B0604020202020204"/>
+          <a:ea typeface="Arial" panose="020B0604020202020204"/>
+          <a:cs typeface="Arial" panose="020B0604020202020204"/>
+          <a:sym typeface="Arial" panose="020B0604020202020204"/>
+        </a:defRPr>
+      </a:lvl7pPr>
+      <a:lvl8pPr marR="0" lvl="7" algn="l" rtl="0">
+        <a:lnSpc>
+          <a:spcPct val="100000"/>
+        </a:lnSpc>
+        <a:spcBef>
+          <a:spcPts val="0"/>
+        </a:spcBef>
+        <a:spcAft>
+          <a:spcPts val="0"/>
+        </a:spcAft>
+        <a:buClr>
+          <a:srgbClr val="000000"/>
+        </a:buClr>
+        <a:buFont typeface="Arial" panose="020B0604020202020204"/>
+        <a:defRPr sz="1400" b="0" i="0" u="none" strike="noStrike" cap="none">
+          <a:solidFill>
+            <a:srgbClr val="000000"/>
+          </a:solidFill>
+          <a:latin typeface="Arial" panose="020B0604020202020204"/>
+          <a:ea typeface="Arial" panose="020B0604020202020204"/>
+          <a:cs typeface="Arial" panose="020B0604020202020204"/>
+          <a:sym typeface="Arial" panose="020B0604020202020204"/>
+        </a:defRPr>
+      </a:lvl8pPr>
+      <a:lvl9pPr marR="0" lvl="8" algn="l" rtl="0">
+        <a:lnSpc>
+          <a:spcPct val="100000"/>
+        </a:lnSpc>
+        <a:spcBef>
+          <a:spcPts val="0"/>
+        </a:spcBef>
+        <a:spcAft>
+          <a:spcPts val="0"/>
+        </a:spcAft>
+        <a:buClr>
+          <a:srgbClr val="000000"/>
+        </a:buClr>
+        <a:buFont typeface="Arial" panose="020B0604020202020204"/>
+        <a:defRPr sz="1400" b="0" i="0" u="none" strike="noStrike" cap="none">
+          <a:solidFill>
+            <a:srgbClr val="000000"/>
+          </a:solidFill>
+          <a:latin typeface="Arial" panose="020B0604020202020204"/>
+          <a:ea typeface="Arial" panose="020B0604020202020204"/>
+          <a:cs typeface="Arial" panose="020B0604020202020204"/>
+          <a:sym typeface="Arial" panose="020B0604020202020204"/>
+        </a:defRPr>
+      </a:lvl9pPr>
+    </p:otherStyle>
+  </p:txStyles>
+</p:sldMaster>
+</file>
+
+<file path=ppt/slideMasters/slideMaster5.xml><?xml version="1.0" encoding="utf-8"?>
+<p:sldMaster xmlns:a="http://schemas.openxmlformats.org/drawingml/2006/main" xmlns:r="http://schemas.openxmlformats.org/officeDocument/2006/relationships" xmlns:p="http://schemas.openxmlformats.org/presentationml/2006/main">
+  <p:cSld>
+    <p:bg>
+      <p:bgPr>
+        <a:solidFill>
+          <a:srgbClr val="FFFFFF">
+            <a:alpha val="100000"/>
+          </a:srgbClr>
+        </a:solidFill>
+        <a:effectLst/>
+      </p:bgPr>
+    </p:bg>
+    <p:spTree>
+      <p:nvGrpSpPr>
+        <p:cNvPr id="5" name="Shape 5"/>
+        <p:cNvGrpSpPr/>
+        <p:nvPr/>
+      </p:nvGrpSpPr>
+      <p:grpSpPr>
+        <a:xfrm>
+          <a:off x="0" y="0"/>
+          <a:ext cx="0" cy="0"/>
+          <a:chOff x="0" y="0"/>
+          <a:chExt cx="0" cy="0"/>
+        </a:xfrm>
+      </p:grpSpPr>
+    </p:spTree>
+  </p:cSld>
+  <p:clrMap bg1="lt1" tx1="dk1" bg2="dk2" tx2="lt2" accent1="accent1" accent2="accent2" accent3="accent3" accent4="accent4" accent5="accent5" accent6="accent6" hlink="hlink" folHlink="folHlink"/>
+  <p:sldLayoutIdLst>
+    <p:sldLayoutId id="2147483667" r:id="rId1"/>
+  </p:sldLayoutIdLst>
+  <p:hf sldNum="0" hdr="0" ftr="0" dt="0"/>
+  <p:txStyles>
+    <p:titleStyle>
+      <a:defPPr marR="0" lvl="0" algn="l" rtl="0">
+        <a:lnSpc>
+          <a:spcPct val="100000"/>
+        </a:lnSpc>
+        <a:spcBef>
+          <a:spcPts val="0"/>
+        </a:spcBef>
+        <a:spcAft>
+          <a:spcPts val="0"/>
+        </a:spcAft>
+      </a:defPPr>
+      <a:lvl1pPr marR="0" lvl="0" algn="l" rtl="0">
+        <a:lnSpc>
+          <a:spcPct val="100000"/>
+        </a:lnSpc>
+        <a:spcBef>
+          <a:spcPts val="0"/>
+        </a:spcBef>
+        <a:spcAft>
+          <a:spcPts val="0"/>
+        </a:spcAft>
+        <a:buClr>
+          <a:srgbClr val="000000"/>
+        </a:buClr>
+        <a:buFont typeface="Arial" panose="020B0604020202020204"/>
+        <a:defRPr sz="1400" b="0" i="0" u="none" strike="noStrike" cap="none">
+          <a:solidFill>
+            <a:srgbClr val="000000"/>
+          </a:solidFill>
+          <a:latin typeface="Arial" panose="020B0604020202020204"/>
+          <a:ea typeface="Arial" panose="020B0604020202020204"/>
+          <a:cs typeface="Arial" panose="020B0604020202020204"/>
+          <a:sym typeface="Arial" panose="020B0604020202020204"/>
+        </a:defRPr>
+      </a:lvl1pPr>
+      <a:lvl2pPr marR="0" lvl="1" algn="l" rtl="0">
+        <a:lnSpc>
+          <a:spcPct val="100000"/>
+        </a:lnSpc>
+        <a:spcBef>
+          <a:spcPts val="0"/>
+        </a:spcBef>
+        <a:spcAft>
+          <a:spcPts val="0"/>
+        </a:spcAft>
+        <a:buClr>
+          <a:srgbClr val="000000"/>
+        </a:buClr>
+        <a:buFont typeface="Arial" panose="020B0604020202020204"/>
+        <a:defRPr sz="1400" b="0" i="0" u="none" strike="noStrike" cap="none">
+          <a:solidFill>
+            <a:srgbClr val="000000"/>
+          </a:solidFill>
+          <a:latin typeface="Arial" panose="020B0604020202020204"/>
+          <a:ea typeface="Arial" panose="020B0604020202020204"/>
+          <a:cs typeface="Arial" panose="020B0604020202020204"/>
+          <a:sym typeface="Arial" panose="020B0604020202020204"/>
+        </a:defRPr>
+      </a:lvl2pPr>
+      <a:lvl3pPr marR="0" lvl="2" algn="l" rtl="0">
+        <a:lnSpc>
+          <a:spcPct val="100000"/>
+        </a:lnSpc>
+        <a:spcBef>
+          <a:spcPts val="0"/>
+        </a:spcBef>
+        <a:spcAft>
+          <a:spcPts val="0"/>
+        </a:spcAft>
+        <a:buClr>
+          <a:srgbClr val="000000"/>
+        </a:buClr>
+        <a:buFont typeface="Arial" panose="020B0604020202020204"/>
+        <a:defRPr sz="1400" b="0" i="0" u="none" strike="noStrike" cap="none">
+          <a:solidFill>
+            <a:srgbClr val="000000"/>
+          </a:solidFill>
+          <a:latin typeface="Arial" panose="020B0604020202020204"/>
+          <a:ea typeface="Arial" panose="020B0604020202020204"/>
+          <a:cs typeface="Arial" panose="020B0604020202020204"/>
+          <a:sym typeface="Arial" panose="020B0604020202020204"/>
+        </a:defRPr>
+      </a:lvl3pPr>
+      <a:lvl4pPr marR="0" lvl="3" algn="l" rtl="0">
+        <a:lnSpc>
+          <a:spcPct val="100000"/>
+        </a:lnSpc>
+        <a:spcBef>
+          <a:spcPts val="0"/>
+        </a:spcBef>
+        <a:spcAft>
+          <a:spcPts val="0"/>
+        </a:spcAft>
+        <a:buClr>
+          <a:srgbClr val="000000"/>
+        </a:buClr>
+        <a:buFont typeface="Arial" panose="020B0604020202020204"/>
+        <a:defRPr sz="1400" b="0" i="0" u="none" strike="noStrike" cap="none">
+          <a:solidFill>
+            <a:srgbClr val="000000"/>
+          </a:solidFill>
+          <a:latin typeface="Arial" panose="020B0604020202020204"/>
+          <a:ea typeface="Arial" panose="020B0604020202020204"/>
+          <a:cs typeface="Arial" panose="020B0604020202020204"/>
+          <a:sym typeface="Arial" panose="020B0604020202020204"/>
+        </a:defRPr>
+      </a:lvl4pPr>
+      <a:lvl5pPr marR="0" lvl="4" algn="l" rtl="0">
+        <a:lnSpc>
+          <a:spcPct val="100000"/>
+        </a:lnSpc>
+        <a:spcBef>
+          <a:spcPts val="0"/>
+        </a:spcBef>
+        <a:spcAft>
+          <a:spcPts val="0"/>
+        </a:spcAft>
+        <a:buClr>
+          <a:srgbClr val="000000"/>
+        </a:buClr>
+        <a:buFont typeface="Arial" panose="020B0604020202020204"/>
+        <a:defRPr sz="1400" b="0" i="0" u="none" strike="noStrike" cap="none">
+          <a:solidFill>
+            <a:srgbClr val="000000"/>
+          </a:solidFill>
+          <a:latin typeface="Arial" panose="020B0604020202020204"/>
+          <a:ea typeface="Arial" panose="020B0604020202020204"/>
+          <a:cs typeface="Arial" panose="020B0604020202020204"/>
+          <a:sym typeface="Arial" panose="020B0604020202020204"/>
+        </a:defRPr>
+      </a:lvl5pPr>
+      <a:lvl6pPr marR="0" lvl="5" algn="l" rtl="0">
+        <a:lnSpc>
+          <a:spcPct val="100000"/>
+        </a:lnSpc>
+        <a:spcBef>
+          <a:spcPts val="0"/>
+        </a:spcBef>
+        <a:spcAft>
+          <a:spcPts val="0"/>
+        </a:spcAft>
+        <a:buClr>
+          <a:srgbClr val="000000"/>
+        </a:buClr>
+        <a:buFont typeface="Arial" panose="020B0604020202020204"/>
+        <a:defRPr sz="1400" b="0" i="0" u="none" strike="noStrike" cap="none">
+          <a:solidFill>
+            <a:srgbClr val="000000"/>
+          </a:solidFill>
+          <a:latin typeface="Arial" panose="020B0604020202020204"/>
+          <a:ea typeface="Arial" panose="020B0604020202020204"/>
+          <a:cs typeface="Arial" panose="020B0604020202020204"/>
+          <a:sym typeface="Arial" panose="020B0604020202020204"/>
+        </a:defRPr>
+      </a:lvl6pPr>
+      <a:lvl7pPr marR="0" lvl="6" algn="l" rtl="0">
+        <a:lnSpc>
+          <a:spcPct val="100000"/>
+        </a:lnSpc>
+        <a:spcBef>
+          <a:spcPts val="0"/>
+        </a:spcBef>
+        <a:spcAft>
+          <a:spcPts val="0"/>
+        </a:spcAft>
+        <a:buClr>
+          <a:srgbClr val="000000"/>
+        </a:buClr>
+        <a:buFont typeface="Arial" panose="020B0604020202020204"/>
+        <a:defRPr sz="1400" b="0" i="0" u="none" strike="noStrike" cap="none">
+          <a:solidFill>
+            <a:srgbClr val="000000"/>
+          </a:solidFill>
+          <a:latin typeface="Arial" panose="020B0604020202020204"/>
+          <a:ea typeface="Arial" panose="020B0604020202020204"/>
+          <a:cs typeface="Arial" panose="020B0604020202020204"/>
+          <a:sym typeface="Arial" panose="020B0604020202020204"/>
+        </a:defRPr>
+      </a:lvl7pPr>
+      <a:lvl8pPr marR="0" lvl="7" algn="l" rtl="0">
+        <a:lnSpc>
+          <a:spcPct val="100000"/>
+        </a:lnSpc>
+        <a:spcBef>
+          <a:spcPts val="0"/>
+        </a:spcBef>
+        <a:spcAft>
+          <a:spcPts val="0"/>
+        </a:spcAft>
+        <a:buClr>
+          <a:srgbClr val="000000"/>
+        </a:buClr>
+        <a:buFont typeface="Arial" panose="020B0604020202020204"/>
+        <a:defRPr sz="1400" b="0" i="0" u="none" strike="noStrike" cap="none">
+          <a:solidFill>
+            <a:srgbClr val="000000"/>
+          </a:solidFill>
+          <a:latin typeface="Arial" panose="020B0604020202020204"/>
+          <a:ea typeface="Arial" panose="020B0604020202020204"/>
+          <a:cs typeface="Arial" panose="020B0604020202020204"/>
+          <a:sym typeface="Arial" panose="020B0604020202020204"/>
+        </a:defRPr>
+      </a:lvl8pPr>
+      <a:lvl9pPr marR="0" lvl="8" algn="l" rtl="0">
+        <a:lnSpc>
+          <a:spcPct val="100000"/>
+        </a:lnSpc>
+        <a:spcBef>
+          <a:spcPts val="0"/>
+        </a:spcBef>
+        <a:spcAft>
+          <a:spcPts val="0"/>
+        </a:spcAft>
+        <a:buClr>
+          <a:srgbClr val="000000"/>
+        </a:buClr>
+        <a:buFont typeface="Arial" panose="020B0604020202020204"/>
+        <a:defRPr sz="1400" b="0" i="0" u="none" strike="noStrike" cap="none">
+          <a:solidFill>
+            <a:srgbClr val="000000"/>
+          </a:solidFill>
+          <a:latin typeface="Arial" panose="020B0604020202020204"/>
+          <a:ea typeface="Arial" panose="020B0604020202020204"/>
+          <a:cs typeface="Arial" panose="020B0604020202020204"/>
+          <a:sym typeface="Arial" panose="020B0604020202020204"/>
+        </a:defRPr>
+      </a:lvl9pPr>
+    </p:titleStyle>
+    <p:bodyStyle>
+      <a:defPPr marR="0" lvl="0" algn="l" rtl="0">
+        <a:lnSpc>
+          <a:spcPct val="100000"/>
+        </a:lnSpc>
+        <a:spcBef>
+          <a:spcPts val="0"/>
+        </a:spcBef>
+        <a:spcAft>
+          <a:spcPts val="0"/>
+        </a:spcAft>
+      </a:defPPr>
+      <a:lvl1pPr marR="0" lvl="0" algn="l" rtl="0">
+        <a:lnSpc>
+          <a:spcPct val="100000"/>
+        </a:lnSpc>
+        <a:spcBef>
+          <a:spcPts val="0"/>
+        </a:spcBef>
+        <a:spcAft>
+          <a:spcPts val="0"/>
+        </a:spcAft>
+        <a:buClr>
+          <a:srgbClr val="000000"/>
+        </a:buClr>
+        <a:buFont typeface="Arial" panose="020B0604020202020204"/>
+        <a:defRPr sz="1400" b="0" i="0" u="none" strike="noStrike" cap="none">
+          <a:solidFill>
+            <a:srgbClr val="000000"/>
+          </a:solidFill>
+          <a:latin typeface="Arial" panose="020B0604020202020204"/>
+          <a:ea typeface="Arial" panose="020B0604020202020204"/>
+          <a:cs typeface="Arial" panose="020B0604020202020204"/>
+          <a:sym typeface="Arial" panose="020B0604020202020204"/>
+        </a:defRPr>
+      </a:lvl1pPr>
+      <a:lvl2pPr marR="0" lvl="1" algn="l" rtl="0">
+        <a:lnSpc>
+          <a:spcPct val="100000"/>
+        </a:lnSpc>
+        <a:spcBef>
+          <a:spcPts val="0"/>
+        </a:spcBef>
+        <a:spcAft>
+          <a:spcPts val="0"/>
+        </a:spcAft>
+        <a:buClr>
+          <a:srgbClr val="000000"/>
+        </a:buClr>
+        <a:buFont typeface="Arial" panose="020B0604020202020204"/>
+        <a:defRPr sz="1400" b="0" i="0" u="none" strike="noStrike" cap="none">
+          <a:solidFill>
+            <a:srgbClr val="000000"/>
+          </a:solidFill>
+          <a:latin typeface="Arial" panose="020B0604020202020204"/>
+          <a:ea typeface="Arial" panose="020B0604020202020204"/>
+          <a:cs typeface="Arial" panose="020B0604020202020204"/>
+          <a:sym typeface="Arial" panose="020B0604020202020204"/>
+        </a:defRPr>
+      </a:lvl2pPr>
+      <a:lvl3pPr marR="0" lvl="2" algn="l" rtl="0">
+        <a:lnSpc>
+          <a:spcPct val="100000"/>
+        </a:lnSpc>
+        <a:spcBef>
+          <a:spcPts val="0"/>
+        </a:spcBef>
+        <a:spcAft>
+          <a:spcPts val="0"/>
+        </a:spcAft>
+        <a:buClr>
+          <a:srgbClr val="000000"/>
+        </a:buClr>
+        <a:buFont typeface="Arial" panose="020B0604020202020204"/>
+        <a:defRPr sz="1400" b="0" i="0" u="none" strike="noStrike" cap="none">
+          <a:solidFill>
+            <a:srgbClr val="000000"/>
+          </a:solidFill>
+          <a:latin typeface="Arial" panose="020B0604020202020204"/>
+          <a:ea typeface="Arial" panose="020B0604020202020204"/>
+          <a:cs typeface="Arial" panose="020B0604020202020204"/>
+          <a:sym typeface="Arial" panose="020B0604020202020204"/>
+        </a:defRPr>
+      </a:lvl3pPr>
+      <a:lvl4pPr marR="0" lvl="3" algn="l" rtl="0">
+        <a:lnSpc>
+          <a:spcPct val="100000"/>
+        </a:lnSpc>
+        <a:spcBef>
+          <a:spcPts val="0"/>
+        </a:spcBef>
+        <a:spcAft>
+          <a:spcPts val="0"/>
+        </a:spcAft>
+        <a:buClr>
+          <a:srgbClr val="000000"/>
+        </a:buClr>
+        <a:buFont typeface="Arial" panose="020B0604020202020204"/>
+        <a:defRPr sz="1400" b="0" i="0" u="none" strike="noStrike" cap="none">
+          <a:solidFill>
+            <a:srgbClr val="000000"/>
+          </a:solidFill>
+          <a:latin typeface="Arial" panose="020B0604020202020204"/>
+          <a:ea typeface="Arial" panose="020B0604020202020204"/>
+          <a:cs typeface="Arial" panose="020B0604020202020204"/>
+          <a:sym typeface="Arial" panose="020B0604020202020204"/>
+        </a:defRPr>
+      </a:lvl4pPr>
+      <a:lvl5pPr marR="0" lvl="4" algn="l" rtl="0">
+        <a:lnSpc>
+          <a:spcPct val="100000"/>
+        </a:lnSpc>
+        <a:spcBef>
+          <a:spcPts val="0"/>
+        </a:spcBef>
+        <a:spcAft>
+          <a:spcPts val="0"/>
+        </a:spcAft>
+        <a:buClr>
+          <a:srgbClr val="000000"/>
+        </a:buClr>
+        <a:buFont typeface="Arial" panose="020B0604020202020204"/>
+        <a:defRPr sz="1400" b="0" i="0" u="none" strike="noStrike" cap="none">
+          <a:solidFill>
+            <a:srgbClr val="000000"/>
+          </a:solidFill>
+          <a:latin typeface="Arial" panose="020B0604020202020204"/>
+          <a:ea typeface="Arial" panose="020B0604020202020204"/>
+          <a:cs typeface="Arial" panose="020B0604020202020204"/>
+          <a:sym typeface="Arial" panose="020B0604020202020204"/>
+        </a:defRPr>
+      </a:lvl5pPr>
+      <a:lvl6pPr marR="0" lvl="5" algn="l" rtl="0">
+        <a:lnSpc>
+          <a:spcPct val="100000"/>
+        </a:lnSpc>
+        <a:spcBef>
+          <a:spcPts val="0"/>
+        </a:spcBef>
+        <a:spcAft>
+          <a:spcPts val="0"/>
+        </a:spcAft>
+        <a:buClr>
+          <a:srgbClr val="000000"/>
+        </a:buClr>
+        <a:buFont typeface="Arial" panose="020B0604020202020204"/>
+        <a:defRPr sz="1400" b="0" i="0" u="none" strike="noStrike" cap="none">
+          <a:solidFill>
+            <a:srgbClr val="000000"/>
+          </a:solidFill>
+          <a:latin typeface="Arial" panose="020B0604020202020204"/>
+          <a:ea typeface="Arial" panose="020B0604020202020204"/>
+          <a:cs typeface="Arial" panose="020B0604020202020204"/>
+          <a:sym typeface="Arial" panose="020B0604020202020204"/>
+        </a:defRPr>
+      </a:lvl6pPr>
+      <a:lvl7pPr marR="0" lvl="6" algn="l" rtl="0">
+        <a:lnSpc>
+          <a:spcPct val="100000"/>
+        </a:lnSpc>
+        <a:spcBef>
+          <a:spcPts val="0"/>
+        </a:spcBef>
+        <a:spcAft>
+          <a:spcPts val="0"/>
+        </a:spcAft>
+        <a:buClr>
+          <a:srgbClr val="000000"/>
+        </a:buClr>
+        <a:buFont typeface="Arial" panose="020B0604020202020204"/>
+        <a:defRPr sz="1400" b="0" i="0" u="none" strike="noStrike" cap="none">
+          <a:solidFill>
+            <a:srgbClr val="000000"/>
+          </a:solidFill>
+          <a:latin typeface="Arial" panose="020B0604020202020204"/>
+          <a:ea typeface="Arial" panose="020B0604020202020204"/>
+          <a:cs typeface="Arial" panose="020B0604020202020204"/>
+          <a:sym typeface="Arial" panose="020B0604020202020204"/>
+        </a:defRPr>
+      </a:lvl7pPr>
+      <a:lvl8pPr marR="0" lvl="7" algn="l" rtl="0">
+        <a:lnSpc>
+          <a:spcPct val="100000"/>
+        </a:lnSpc>
+        <a:spcBef>
+          <a:spcPts val="0"/>
+        </a:spcBef>
+        <a:spcAft>
+          <a:spcPts val="0"/>
+        </a:spcAft>
+        <a:buClr>
+          <a:srgbClr val="000000"/>
+        </a:buClr>
+        <a:buFont typeface="Arial" panose="020B0604020202020204"/>
+        <a:defRPr sz="1400" b="0" i="0" u="none" strike="noStrike" cap="none">
+          <a:solidFill>
+            <a:srgbClr val="000000"/>
+          </a:solidFill>
+          <a:latin typeface="Arial" panose="020B0604020202020204"/>
+          <a:ea typeface="Arial" panose="020B0604020202020204"/>
+          <a:cs typeface="Arial" panose="020B0604020202020204"/>
+          <a:sym typeface="Arial" panose="020B0604020202020204"/>
+        </a:defRPr>
+      </a:lvl8pPr>
+      <a:lvl9pPr marR="0" lvl="8" algn="l" rtl="0">
+        <a:lnSpc>
+          <a:spcPct val="100000"/>
+        </a:lnSpc>
+        <a:spcBef>
+          <a:spcPts val="0"/>
+        </a:spcBef>
+        <a:spcAft>
+          <a:spcPts val="0"/>
+        </a:spcAft>
+        <a:buClr>
+          <a:srgbClr val="000000"/>
+        </a:buClr>
+        <a:buFont typeface="Arial" panose="020B0604020202020204"/>
+        <a:defRPr sz="1400" b="0" i="0" u="none" strike="noStrike" cap="none">
+          <a:solidFill>
+            <a:srgbClr val="000000"/>
+          </a:solidFill>
+          <a:latin typeface="Arial" panose="020B0604020202020204"/>
+          <a:ea typeface="Arial" panose="020B0604020202020204"/>
+          <a:cs typeface="Arial" panose="020B0604020202020204"/>
+          <a:sym typeface="Arial" panose="020B0604020202020204"/>
+        </a:defRPr>
+      </a:lvl9pPr>
+    </p:bodyStyle>
+    <p:otherStyle>
+      <a:defPPr marR="0" lvl="0" algn="l" rtl="0">
+        <a:lnSpc>
+          <a:spcPct val="100000"/>
+        </a:lnSpc>
+        <a:spcBef>
+          <a:spcPts val="0"/>
+        </a:spcBef>
+        <a:spcAft>
+          <a:spcPts val="0"/>
+        </a:spcAft>
+      </a:defPPr>
+      <a:lvl1pPr marR="0" lvl="0" algn="l" rtl="0">
+        <a:lnSpc>
+          <a:spcPct val="100000"/>
+        </a:lnSpc>
+        <a:spcBef>
+          <a:spcPts val="0"/>
+        </a:spcBef>
+        <a:spcAft>
+          <a:spcPts val="0"/>
+        </a:spcAft>
+        <a:buClr>
+          <a:srgbClr val="000000"/>
+        </a:buClr>
+        <a:buFont typeface="Arial" panose="020B0604020202020204"/>
+        <a:defRPr sz="1400" b="0" i="0" u="none" strike="noStrike" cap="none">
+          <a:solidFill>
+            <a:srgbClr val="000000"/>
+          </a:solidFill>
+          <a:latin typeface="Arial" panose="020B0604020202020204"/>
+          <a:ea typeface="Arial" panose="020B0604020202020204"/>
+          <a:cs typeface="Arial" panose="020B0604020202020204"/>
+          <a:sym typeface="Arial" panose="020B0604020202020204"/>
+        </a:defRPr>
+      </a:lvl1pPr>
+      <a:lvl2pPr marR="0" lvl="1" algn="l" rtl="0">
+        <a:lnSpc>
+          <a:spcPct val="100000"/>
+        </a:lnSpc>
+        <a:spcBef>
+          <a:spcPts val="0"/>
+        </a:spcBef>
+        <a:spcAft>
+          <a:spcPts val="0"/>
+        </a:spcAft>
+        <a:buClr>
+          <a:srgbClr val="000000"/>
+        </a:buClr>
+        <a:buFont typeface="Arial" panose="020B0604020202020204"/>
+        <a:defRPr sz="1400" b="0" i="0" u="none" strike="noStrike" cap="none">
+          <a:solidFill>
+            <a:srgbClr val="000000"/>
+          </a:solidFill>
+          <a:latin typeface="Arial" panose="020B0604020202020204"/>
+          <a:ea typeface="Arial" panose="020B0604020202020204"/>
+          <a:cs typeface="Arial" panose="020B0604020202020204"/>
+          <a:sym typeface="Arial" panose="020B0604020202020204"/>
+        </a:defRPr>
+      </a:lvl2pPr>
+      <a:lvl3pPr marR="0" lvl="2" algn="l" rtl="0">
+        <a:lnSpc>
+          <a:spcPct val="100000"/>
+        </a:lnSpc>
+        <a:spcBef>
+          <a:spcPts val="0"/>
+        </a:spcBef>
+        <a:spcAft>
+          <a:spcPts val="0"/>
+        </a:spcAft>
+        <a:buClr>
+          <a:srgbClr val="000000"/>
+        </a:buClr>
+        <a:buFont typeface="Arial" panose="020B0604020202020204"/>
+        <a:defRPr sz="1400" b="0" i="0" u="none" strike="noStrike" cap="none">
+          <a:solidFill>
+            <a:srgbClr val="000000"/>
+          </a:solidFill>
+          <a:latin typeface="Arial" panose="020B0604020202020204"/>
+          <a:ea typeface="Arial" panose="020B0604020202020204"/>
+          <a:cs typeface="Arial" panose="020B0604020202020204"/>
+          <a:sym typeface="Arial" panose="020B0604020202020204"/>
+        </a:defRPr>
+      </a:lvl3pPr>
+      <a:lvl4pPr marR="0" lvl="3" algn="l" rtl="0">
+        <a:lnSpc>
+          <a:spcPct val="100000"/>
+        </a:lnSpc>
+        <a:spcBef>
+          <a:spcPts val="0"/>
+        </a:spcBef>
+        <a:spcAft>
+          <a:spcPts val="0"/>
+        </a:spcAft>
+        <a:buClr>
+          <a:srgbClr val="000000"/>
+        </a:buClr>
+        <a:buFont typeface="Arial" panose="020B0604020202020204"/>
+        <a:defRPr sz="1400" b="0" i="0" u="none" strike="noStrike" cap="none">
+          <a:solidFill>
+            <a:srgbClr val="000000"/>
+          </a:solidFill>
+          <a:latin typeface="Arial" panose="020B0604020202020204"/>
+          <a:ea typeface="Arial" panose="020B0604020202020204"/>
+          <a:cs typeface="Arial" panose="020B0604020202020204"/>
+          <a:sym typeface="Arial" panose="020B0604020202020204"/>
+        </a:defRPr>
+      </a:lvl4pPr>
+      <a:lvl5pPr marR="0" lvl="4" algn="l" rtl="0">
+        <a:lnSpc>
+          <a:spcPct val="100000"/>
+        </a:lnSpc>
+        <a:spcBef>
+          <a:spcPts val="0"/>
+        </a:spcBef>
+        <a:spcAft>
+          <a:spcPts val="0"/>
+        </a:spcAft>
+        <a:buClr>
+          <a:srgbClr val="000000"/>
+        </a:buClr>
+        <a:buFont typeface="Arial" panose="020B0604020202020204"/>
+        <a:defRPr sz="1400" b="0" i="0" u="none" strike="noStrike" cap="none">
+          <a:solidFill>
+            <a:srgbClr val="000000"/>
+          </a:solidFill>
+          <a:latin typeface="Arial" panose="020B0604020202020204"/>
+          <a:ea typeface="Arial" panose="020B0604020202020204"/>
+          <a:cs typeface="Arial" panose="020B0604020202020204"/>
+          <a:sym typeface="Arial" panose="020B0604020202020204"/>
+        </a:defRPr>
+      </a:lvl5pPr>
+      <a:lvl6pPr marR="0" lvl="5" algn="l" rtl="0">
+        <a:lnSpc>
+          <a:spcPct val="100000"/>
+        </a:lnSpc>
+        <a:spcBef>
+          <a:spcPts val="0"/>
+        </a:spcBef>
+        <a:spcAft>
+          <a:spcPts val="0"/>
+        </a:spcAft>
+        <a:buClr>
+          <a:srgbClr val="000000"/>
+        </a:buClr>
+        <a:buFont typeface="Arial" panose="020B0604020202020204"/>
+        <a:defRPr sz="1400" b="0" i="0" u="none" strike="noStrike" cap="none">
+          <a:solidFill>
+            <a:srgbClr val="000000"/>
+          </a:solidFill>
+          <a:latin typeface="Arial" panose="020B0604020202020204"/>
+          <a:ea typeface="Arial" panose="020B0604020202020204"/>
+          <a:cs typeface="Arial" panose="020B0604020202020204"/>
+          <a:sym typeface="Arial" panose="020B0604020202020204"/>
+        </a:defRPr>
+      </a:lvl6pPr>
+      <a:lvl7pPr marR="0" lvl="6" algn="l" rtl="0">
+        <a:lnSpc>
+          <a:spcPct val="100000"/>
+        </a:lnSpc>
+        <a:spcBef>
+          <a:spcPts val="0"/>
+        </a:spcBef>
+        <a:spcAft>
+          <a:spcPts val="0"/>
+        </a:spcAft>
+        <a:buClr>
+          <a:srgbClr val="000000"/>
+        </a:buClr>
+        <a:buFont typeface="Arial" panose="020B0604020202020204"/>
+        <a:defRPr sz="1400" b="0" i="0" u="none" strike="noStrike" cap="none">
+          <a:solidFill>
+            <a:srgbClr val="000000"/>
+          </a:solidFill>
+          <a:latin typeface="Arial" panose="020B0604020202020204"/>
+          <a:ea typeface="Arial" panose="020B0604020202020204"/>
+          <a:cs typeface="Arial" panose="020B0604020202020204"/>
+          <a:sym typeface="Arial" panose="020B0604020202020204"/>
+        </a:defRPr>
+      </a:lvl7pPr>
+      <a:lvl8pPr marR="0" lvl="7" algn="l" rtl="0">
+        <a:lnSpc>
+          <a:spcPct val="100000"/>
+        </a:lnSpc>
+        <a:spcBef>
+          <a:spcPts val="0"/>
+        </a:spcBef>
+        <a:spcAft>
+          <a:spcPts val="0"/>
+        </a:spcAft>
+        <a:buClr>
+          <a:srgbClr val="000000"/>
+        </a:buClr>
+        <a:buFont typeface="Arial" panose="020B0604020202020204"/>
+        <a:defRPr sz="1400" b="0" i="0" u="none" strike="noStrike" cap="none">
+          <a:solidFill>
+            <a:srgbClr val="000000"/>
+          </a:solidFill>
+          <a:latin typeface="Arial" panose="020B0604020202020204"/>
+          <a:ea typeface="Arial" panose="020B0604020202020204"/>
+          <a:cs typeface="Arial" panose="020B0604020202020204"/>
+          <a:sym typeface="Arial" panose="020B0604020202020204"/>
+        </a:defRPr>
+      </a:lvl8pPr>
+      <a:lvl9pPr marR="0" lvl="8" algn="l" rtl="0">
+        <a:lnSpc>
+          <a:spcPct val="100000"/>
+        </a:lnSpc>
+        <a:spcBef>
+          <a:spcPts val="0"/>
+        </a:spcBef>
+        <a:spcAft>
+          <a:spcPts val="0"/>
+        </a:spcAft>
+        <a:buClr>
+          <a:srgbClr val="000000"/>
+        </a:buClr>
+        <a:buFont typeface="Arial" panose="020B0604020202020204"/>
+        <a:defRPr sz="1400" b="0" i="0" u="none" strike="noStrike" cap="none">
+          <a:solidFill>
+            <a:srgbClr val="000000"/>
+          </a:solidFill>
+          <a:latin typeface="Arial" panose="020B0604020202020204"/>
+          <a:ea typeface="Arial" panose="020B0604020202020204"/>
+          <a:cs typeface="Arial" panose="020B0604020202020204"/>
+          <a:sym typeface="Arial" panose="020B0604020202020204"/>
+        </a:defRPr>
+      </a:lvl9pPr>
+    </p:otherStyle>
+  </p:txStyles>
+</p:sldMaster>
+</file>
+
 <file path=ppt/slides/slide1.xml><?xml version="1.0" encoding="utf-8"?>
 <p:sld xmlns:a="http://schemas.openxmlformats.org/drawingml/2006/main" xmlns:r="http://schemas.openxmlformats.org/officeDocument/2006/relationships" xmlns:p="http://schemas.openxmlformats.org/presentationml/2006/main">
   <p:cSld>
@@ -18069,6 +21144,354 @@
           </a:p>
         </p:txBody>
       </p:sp>
+    </p:spTree>
+  </p:cSld>
+  <p:clrMapOvr>
+    <a:masterClrMapping/>
+  </p:clrMapOvr>
+</p:sld>
+</file>
+
+<file path=ppt/slides/slide13.xml><?xml version="1.0" encoding="utf-8"?>
+<p:sld xmlns:a="http://schemas.openxmlformats.org/drawingml/2006/main" xmlns:r="http://schemas.openxmlformats.org/officeDocument/2006/relationships" xmlns:p="http://schemas.openxmlformats.org/presentationml/2006/main">
+  <p:cSld>
+    <p:bg>
+      <p:bgPr>
+        <a:gradFill rotWithShape="1">
+          <a:gsLst>
+            <a:gs pos="0">
+              <a:srgbClr val="0D1326">
+                <a:alpha val="100000"/>
+              </a:srgbClr>
+            </a:gs>
+            <a:gs pos="100000">
+              <a:srgbClr val="2563EB">
+                <a:alpha val="100000"/>
+              </a:srgbClr>
+            </a:gs>
+          </a:gsLst>
+          <a:lin ang="2700000"/>
+        </a:gradFill>
+        <a:effectLst/>
+      </p:bgPr>
+    </p:bg>
+    <p:spTree>
+      <p:nvGrpSpPr>
+        <p:cNvPr id="1" name=""/>
+        <p:cNvGrpSpPr/>
+        <p:nvPr/>
+      </p:nvGrpSpPr>
+      <p:grpSpPr>
+        <a:xfrm>
+          <a:off x="0" y="0"/>
+          <a:ext cx="0" cy="0"/>
+          <a:chOff x="0" y="0"/>
+          <a:chExt cx="0" cy="0"/>
+        </a:xfrm>
+      </p:grpSpPr>
+      <p:sp>
+        <p:nvSpPr>
+          <p:cNvPr id="2" name="AutoShape 2"/>
+          <p:cNvSpPr/>
+          <p:nvPr/>
+        </p:nvSpPr>
+        <p:spPr>
+          <a:xfrm>
+            <a:off x="838200" y="466725"/>
+            <a:ext cx="10160000" cy="381000"/>
+          </a:xfrm>
+          <a:prstGeom prst="rect">
+            <a:avLst/>
+          </a:prstGeom>
+          <a:noFill/>
+          <a:ln w="12700" cap="flat" cmpd="sng">
+            <a:noFill/>
+            <a:prstDash val="solid"/>
+            <a:round/>
+          </a:ln>
+        </p:spPr>
+        <p:txBody>
+          <a:bodyPr vert="horz" wrap="square" lIns="0" tIns="0" rIns="0" bIns="0" rtlCol="0" anchor="ctr" anchorCtr="0"/>
+          <a:lstStyle/>
+          <a:p>
+            <a:pPr marL="0" indent="0" algn="l">
+              <a:lnSpc>
+                <a:spcPct val="125000"/>
+              </a:lnSpc>
+              <a:defRPr/>
+            </a:pPr>
+            <a:r>
+              <a:rPr lang="en-US" sz="1400" b="0" i="0" u="none" strike="noStrike">
+                <a:solidFill>
+                  <a:srgbClr val="BFD7FF"/>
+                </a:solidFill>
+                <a:latin typeface="Inter"/>
+                <a:ea typeface="Inter"/>
+                <a:cs typeface="Inter"/>
+                <a:sym typeface="Inter"/>
+              </a:rPr>
+              <a:t>Demo - Call Trace</a:t>
+            </a:r>
+            <a:endParaRPr lang="en-US" sz="1100"/>
+          </a:p>
+        </p:txBody>
+      </p:sp>
+      <p:pic>
+        <p:nvPicPr>
+          <p:cNvPr id="17" name="图片 16"/>
+          <p:cNvPicPr>
+            <a:picLocks noChangeAspect="1"/>
+          </p:cNvPicPr>
+          <p:nvPr/>
+        </p:nvPicPr>
+        <p:blipFill>
+          <a:blip r:embed="rId1"/>
+          <a:stretch>
+            <a:fillRect/>
+          </a:stretch>
+        </p:blipFill>
+        <p:spPr>
+          <a:xfrm>
+            <a:off x="946150" y="932815"/>
+            <a:ext cx="9944100" cy="5257800"/>
+          </a:xfrm>
+          <a:prstGeom prst="rect">
+            <a:avLst/>
+          </a:prstGeom>
+        </p:spPr>
+      </p:pic>
+    </p:spTree>
+  </p:cSld>
+  <p:clrMapOvr>
+    <a:masterClrMapping/>
+  </p:clrMapOvr>
+</p:sld>
+</file>
+
+<file path=ppt/slides/slide14.xml><?xml version="1.0" encoding="utf-8"?>
+<p:sld xmlns:a="http://schemas.openxmlformats.org/drawingml/2006/main" xmlns:r="http://schemas.openxmlformats.org/officeDocument/2006/relationships" xmlns:p="http://schemas.openxmlformats.org/presentationml/2006/main">
+  <p:cSld>
+    <p:bg>
+      <p:bgPr>
+        <a:gradFill rotWithShape="1">
+          <a:gsLst>
+            <a:gs pos="0">
+              <a:srgbClr val="0D1326">
+                <a:alpha val="100000"/>
+              </a:srgbClr>
+            </a:gs>
+            <a:gs pos="100000">
+              <a:srgbClr val="2563EB">
+                <a:alpha val="100000"/>
+              </a:srgbClr>
+            </a:gs>
+          </a:gsLst>
+          <a:lin ang="2700000"/>
+        </a:gradFill>
+        <a:effectLst/>
+      </p:bgPr>
+    </p:bg>
+    <p:spTree>
+      <p:nvGrpSpPr>
+        <p:cNvPr id="1" name=""/>
+        <p:cNvGrpSpPr/>
+        <p:nvPr/>
+      </p:nvGrpSpPr>
+      <p:grpSpPr>
+        <a:xfrm>
+          <a:off x="0" y="0"/>
+          <a:ext cx="0" cy="0"/>
+          <a:chOff x="0" y="0"/>
+          <a:chExt cx="0" cy="0"/>
+        </a:xfrm>
+      </p:grpSpPr>
+      <p:sp>
+        <p:nvSpPr>
+          <p:cNvPr id="2" name="AutoShape 2"/>
+          <p:cNvSpPr/>
+          <p:nvPr/>
+        </p:nvSpPr>
+        <p:spPr>
+          <a:xfrm>
+            <a:off x="838200" y="466725"/>
+            <a:ext cx="10160000" cy="381000"/>
+          </a:xfrm>
+          <a:prstGeom prst="rect">
+            <a:avLst/>
+          </a:prstGeom>
+          <a:noFill/>
+          <a:ln w="12700" cap="flat" cmpd="sng">
+            <a:noFill/>
+            <a:prstDash val="solid"/>
+            <a:round/>
+          </a:ln>
+        </p:spPr>
+        <p:txBody>
+          <a:bodyPr vert="horz" wrap="square" lIns="0" tIns="0" rIns="0" bIns="0" rtlCol="0" anchor="ctr" anchorCtr="0"/>
+          <a:lstStyle/>
+          <a:p>
+            <a:pPr marL="0" indent="0" algn="l">
+              <a:lnSpc>
+                <a:spcPct val="125000"/>
+              </a:lnSpc>
+              <a:defRPr/>
+            </a:pPr>
+            <a:r>
+              <a:rPr lang="en-US" sz="1400" b="0" i="0" u="none" strike="noStrike">
+                <a:solidFill>
+                  <a:srgbClr val="BFD7FF"/>
+                </a:solidFill>
+                <a:latin typeface="Inter"/>
+                <a:ea typeface="Inter"/>
+                <a:cs typeface="Inter"/>
+                <a:sym typeface="Inter"/>
+              </a:rPr>
+              <a:t>Demo cont - Rules</a:t>
+            </a:r>
+            <a:endParaRPr lang="en-US" sz="1100"/>
+          </a:p>
+        </p:txBody>
+      </p:sp>
+      <p:pic>
+        <p:nvPicPr>
+          <p:cNvPr id="4" name="图片 3"/>
+          <p:cNvPicPr>
+            <a:picLocks noChangeAspect="1"/>
+          </p:cNvPicPr>
+          <p:nvPr/>
+        </p:nvPicPr>
+        <p:blipFill>
+          <a:blip r:embed="rId1"/>
+          <a:stretch>
+            <a:fillRect/>
+          </a:stretch>
+        </p:blipFill>
+        <p:spPr>
+          <a:xfrm>
+            <a:off x="792480" y="891540"/>
+            <a:ext cx="8856980" cy="5762625"/>
+          </a:xfrm>
+          <a:prstGeom prst="rect">
+            <a:avLst/>
+          </a:prstGeom>
+        </p:spPr>
+      </p:pic>
+    </p:spTree>
+  </p:cSld>
+  <p:clrMapOvr>
+    <a:masterClrMapping/>
+  </p:clrMapOvr>
+</p:sld>
+</file>
+
+<file path=ppt/slides/slide15.xml><?xml version="1.0" encoding="utf-8"?>
+<p:sld xmlns:a="http://schemas.openxmlformats.org/drawingml/2006/main" xmlns:r="http://schemas.openxmlformats.org/officeDocument/2006/relationships" xmlns:p="http://schemas.openxmlformats.org/presentationml/2006/main">
+  <p:cSld>
+    <p:bg>
+      <p:bgPr>
+        <a:gradFill rotWithShape="1">
+          <a:gsLst>
+            <a:gs pos="0">
+              <a:srgbClr val="0D1326">
+                <a:alpha val="100000"/>
+              </a:srgbClr>
+            </a:gs>
+            <a:gs pos="100000">
+              <a:srgbClr val="2563EB">
+                <a:alpha val="100000"/>
+              </a:srgbClr>
+            </a:gs>
+          </a:gsLst>
+          <a:lin ang="2700000"/>
+        </a:gradFill>
+        <a:effectLst/>
+      </p:bgPr>
+    </p:bg>
+    <p:spTree>
+      <p:nvGrpSpPr>
+        <p:cNvPr id="1" name=""/>
+        <p:cNvGrpSpPr/>
+        <p:nvPr/>
+      </p:nvGrpSpPr>
+      <p:grpSpPr>
+        <a:xfrm>
+          <a:off x="0" y="0"/>
+          <a:ext cx="0" cy="0"/>
+          <a:chOff x="0" y="0"/>
+          <a:chExt cx="0" cy="0"/>
+        </a:xfrm>
+      </p:grpSpPr>
+      <p:sp>
+        <p:nvSpPr>
+          <p:cNvPr id="2" name="AutoShape 2"/>
+          <p:cNvSpPr/>
+          <p:nvPr/>
+        </p:nvSpPr>
+        <p:spPr>
+          <a:xfrm>
+            <a:off x="838200" y="466725"/>
+            <a:ext cx="10160000" cy="381000"/>
+          </a:xfrm>
+          <a:prstGeom prst="rect">
+            <a:avLst/>
+          </a:prstGeom>
+          <a:noFill/>
+          <a:ln w="12700" cap="flat" cmpd="sng">
+            <a:noFill/>
+            <a:prstDash val="solid"/>
+            <a:round/>
+          </a:ln>
+        </p:spPr>
+        <p:txBody>
+          <a:bodyPr vert="horz" wrap="square" lIns="0" tIns="0" rIns="0" bIns="0" rtlCol="0" anchor="ctr" anchorCtr="0"/>
+          <a:lstStyle/>
+          <a:p>
+            <a:pPr marL="0" indent="0" algn="l">
+              <a:lnSpc>
+                <a:spcPct val="125000"/>
+              </a:lnSpc>
+              <a:defRPr/>
+            </a:pPr>
+            <a:r>
+              <a:rPr lang="en-US" sz="1400" b="0" i="0" u="none" strike="noStrike">
+                <a:solidFill>
+                  <a:srgbClr val="BFD7FF"/>
+                </a:solidFill>
+                <a:latin typeface="Inter"/>
+                <a:ea typeface="Inter"/>
+                <a:cs typeface="Inter"/>
+                <a:sym typeface="Inter"/>
+              </a:rPr>
+              <a:t>Demo cont - Rules</a:t>
+            </a:r>
+            <a:endParaRPr lang="en-US" sz="1100"/>
+          </a:p>
+        </p:txBody>
+      </p:sp>
+      <p:pic>
+        <p:nvPicPr>
+          <p:cNvPr id="4" name="图片 3"/>
+          <p:cNvPicPr>
+            <a:picLocks noChangeAspect="1"/>
+          </p:cNvPicPr>
+          <p:nvPr/>
+        </p:nvPicPr>
+        <p:blipFill>
+          <a:blip r:embed="rId1"/>
+          <a:stretch>
+            <a:fillRect/>
+          </a:stretch>
+        </p:blipFill>
+        <p:spPr>
+          <a:xfrm>
+            <a:off x="792480" y="891540"/>
+            <a:ext cx="8856980" cy="5762625"/>
+          </a:xfrm>
+          <a:prstGeom prst="rect">
+            <a:avLst/>
+          </a:prstGeom>
+        </p:spPr>
+      </p:pic>
     </p:spTree>
   </p:cSld>
   <p:clrMapOvr>
@@ -28025,6 +31448,858 @@
 </file>
 
 <file path=ppt/theme/theme3.xml><?xml version="1.0" encoding="utf-8"?>
+<a:theme xmlns:a="http://schemas.openxmlformats.org/drawingml/2006/main" name="1_默认主题">
+  <a:themeElements>
+    <a:clrScheme name="Office">
+      <a:dk1>
+        <a:srgbClr val="000000"/>
+      </a:dk1>
+      <a:lt1>
+        <a:srgbClr val="FFFFFF"/>
+      </a:lt1>
+      <a:dk2>
+        <a:srgbClr val="44546A"/>
+      </a:dk2>
+      <a:lt2>
+        <a:srgbClr val="E7E6E6"/>
+      </a:lt2>
+      <a:accent1>
+        <a:srgbClr val="4472C4"/>
+      </a:accent1>
+      <a:accent2>
+        <a:srgbClr val="ED7D31"/>
+      </a:accent2>
+      <a:accent3>
+        <a:srgbClr val="A5A5A5"/>
+      </a:accent3>
+      <a:accent4>
+        <a:srgbClr val="FFC000"/>
+      </a:accent4>
+      <a:accent5>
+        <a:srgbClr val="5B9BD5"/>
+      </a:accent5>
+      <a:accent6>
+        <a:srgbClr val="70AD47"/>
+      </a:accent6>
+      <a:hlink>
+        <a:srgbClr val="0563C1"/>
+      </a:hlink>
+      <a:folHlink>
+        <a:srgbClr val="954F72"/>
+      </a:folHlink>
+    </a:clrScheme>
+    <a:fontScheme name="Office">
+      <a:majorFont>
+        <a:latin typeface="Arial"/>
+        <a:ea typeface=""/>
+        <a:cs typeface=""/>
+        <a:font script="Jpan" typeface="ＭＳ Ｐゴシック"/>
+        <a:font script="Hang" typeface="맑은 고딕"/>
+        <a:font script="Hans" typeface="宋体"/>
+        <a:font script="Hant" typeface="新細明體"/>
+        <a:font script="Arab" typeface="Times New Roman"/>
+        <a:font script="Hebr" typeface="Times New Roman"/>
+        <a:font script="Thai" typeface="Angsana New"/>
+        <a:font script="Ethi" typeface="Nyala"/>
+        <a:font script="Beng" typeface="Vrinda"/>
+        <a:font script="Gujr" typeface="Shruti"/>
+        <a:font script="Khmr" typeface="MoolBoran"/>
+        <a:font script="Knda" typeface="Tunga"/>
+        <a:font script="Guru" typeface="Raavi"/>
+        <a:font script="Cans" typeface="Euphemia"/>
+        <a:font script="Cher" typeface="Plantagenet Cherokee"/>
+        <a:font script="Yiii" typeface="Microsoft Yi Baiti"/>
+        <a:font script="Tibt" typeface="Microsoft Himalaya"/>
+        <a:font script="Thaa" typeface="MV Boli"/>
+        <a:font script="Deva" typeface="Mangal"/>
+        <a:font script="Telu" typeface="Gautami"/>
+        <a:font script="Taml" typeface="Latha"/>
+        <a:font script="Syrc" typeface="Estrangelo Edessa"/>
+        <a:font script="Orya" typeface="Kalinga"/>
+        <a:font script="Mlym" typeface="Kartika"/>
+        <a:font script="Laoo" typeface="DokChampa"/>
+        <a:font script="Sinh" typeface="Iskoola Pota"/>
+        <a:font script="Mong" typeface="Mongolian Baiti"/>
+        <a:font script="Viet" typeface="Times New Roman"/>
+        <a:font script="Uigh" typeface="Microsoft Uighur"/>
+        <a:font script="Geor" typeface="Sylfaen"/>
+      </a:majorFont>
+      <a:minorFont>
+        <a:latin typeface="Arial"/>
+        <a:ea typeface=""/>
+        <a:cs typeface=""/>
+        <a:font script="Jpan" typeface="ＭＳ Ｐゴシック"/>
+        <a:font script="Hang" typeface="맑은 고딕"/>
+        <a:font script="Hans" typeface="宋体"/>
+        <a:font script="Hant" typeface="新細明體"/>
+        <a:font script="Arab" typeface="Arial"/>
+        <a:font script="Hebr" typeface="Arial"/>
+        <a:font script="Thai" typeface="Cordia New"/>
+        <a:font script="Ethi" typeface="Nyala"/>
+        <a:font script="Beng" typeface="Vrinda"/>
+        <a:font script="Gujr" typeface="Shruti"/>
+        <a:font script="Khmr" typeface="DaunPenh"/>
+        <a:font script="Knda" typeface="Tunga"/>
+        <a:font script="Guru" typeface="Raavi"/>
+        <a:font script="Cans" typeface="Euphemia"/>
+        <a:font script="Cher" typeface="Plantagenet Cherokee"/>
+        <a:font script="Yiii" typeface="Microsoft Yi Baiti"/>
+        <a:font script="Tibt" typeface="Microsoft Himalaya"/>
+        <a:font script="Thaa" typeface="MV Boli"/>
+        <a:font script="Deva" typeface="Mangal"/>
+        <a:font script="Telu" typeface="Gautami"/>
+        <a:font script="Taml" typeface="Latha"/>
+        <a:font script="Syrc" typeface="Estrangelo Edessa"/>
+        <a:font script="Orya" typeface="Kalinga"/>
+        <a:font script="Mlym" typeface="Kartika"/>
+        <a:font script="Laoo" typeface="DokChampa"/>
+        <a:font script="Sinh" typeface="Iskoola Pota"/>
+        <a:font script="Mong" typeface="Mongolian Baiti"/>
+        <a:font script="Viet" typeface="Arial"/>
+        <a:font script="Uigh" typeface="Microsoft Uighur"/>
+        <a:font script="Geor" typeface="Sylfaen"/>
+      </a:minorFont>
+    </a:fontScheme>
+    <a:fmtScheme name="Office">
+      <a:fillStyleLst>
+        <a:solidFill>
+          <a:schemeClr val="phClr"/>
+        </a:solidFill>
+        <a:gradFill rotWithShape="1">
+          <a:gsLst>
+            <a:gs pos="0">
+              <a:schemeClr val="phClr">
+                <a:tint val="50000"/>
+                <a:satMod val="300000"/>
+              </a:schemeClr>
+            </a:gs>
+            <a:gs pos="35000">
+              <a:schemeClr val="phClr">
+                <a:tint val="37000"/>
+                <a:satMod val="300000"/>
+              </a:schemeClr>
+            </a:gs>
+            <a:gs pos="100000">
+              <a:schemeClr val="phClr">
+                <a:tint val="15000"/>
+                <a:satMod val="350000"/>
+              </a:schemeClr>
+            </a:gs>
+          </a:gsLst>
+          <a:lin ang="16200000" scaled="1"/>
+        </a:gradFill>
+        <a:gradFill rotWithShape="1">
+          <a:gsLst>
+            <a:gs pos="0">
+              <a:schemeClr val="phClr">
+                <a:tint val="100000"/>
+                <a:shade val="100000"/>
+                <a:satMod val="130000"/>
+              </a:schemeClr>
+            </a:gs>
+            <a:gs pos="100000">
+              <a:schemeClr val="phClr">
+                <a:tint val="50000"/>
+                <a:shade val="100000"/>
+                <a:satMod val="350000"/>
+              </a:schemeClr>
+            </a:gs>
+          </a:gsLst>
+          <a:lin ang="16200000" scaled="0"/>
+        </a:gradFill>
+      </a:fillStyleLst>
+      <a:lnStyleLst>
+        <a:ln w="9525" cap="flat" cmpd="sng" algn="ctr">
+          <a:solidFill>
+            <a:schemeClr val="phClr">
+              <a:shade val="95000"/>
+              <a:satMod val="105000"/>
+            </a:schemeClr>
+          </a:solidFill>
+          <a:prstDash val="solid"/>
+        </a:ln>
+        <a:ln w="25400" cap="flat" cmpd="sng" algn="ctr">
+          <a:solidFill>
+            <a:schemeClr val="phClr"/>
+          </a:solidFill>
+          <a:prstDash val="solid"/>
+        </a:ln>
+        <a:ln w="38100" cap="flat" cmpd="sng" algn="ctr">
+          <a:solidFill>
+            <a:schemeClr val="phClr"/>
+          </a:solidFill>
+          <a:prstDash val="solid"/>
+        </a:ln>
+      </a:lnStyleLst>
+      <a:effectStyleLst>
+        <a:effectStyle>
+          <a:effectLst>
+            <a:outerShdw blurRad="40000" dist="20000" dir="5400000" rotWithShape="0">
+              <a:srgbClr val="000000">
+                <a:alpha val="38000"/>
+              </a:srgbClr>
+            </a:outerShdw>
+          </a:effectLst>
+        </a:effectStyle>
+        <a:effectStyle>
+          <a:effectLst>
+            <a:outerShdw blurRad="40000" dist="23000" dir="5400000" rotWithShape="0">
+              <a:srgbClr val="000000">
+                <a:alpha val="35000"/>
+              </a:srgbClr>
+            </a:outerShdw>
+          </a:effectLst>
+        </a:effectStyle>
+        <a:effectStyle>
+          <a:effectLst>
+            <a:outerShdw blurRad="40000" dist="23000" dir="5400000" rotWithShape="0">
+              <a:srgbClr val="000000">
+                <a:alpha val="35000"/>
+              </a:srgbClr>
+            </a:outerShdw>
+          </a:effectLst>
+          <a:scene3d>
+            <a:camera prst="orthographicFront">
+              <a:rot lat="0" lon="0" rev="0"/>
+            </a:camera>
+            <a:lightRig rig="threePt" dir="t">
+              <a:rot lat="0" lon="0" rev="1200000"/>
+            </a:lightRig>
+          </a:scene3d>
+          <a:sp3d>
+            <a:bevelT w="63500" h="25400"/>
+          </a:sp3d>
+        </a:effectStyle>
+      </a:effectStyleLst>
+      <a:bgFillStyleLst>
+        <a:solidFill>
+          <a:schemeClr val="phClr"/>
+        </a:solidFill>
+        <a:gradFill rotWithShape="1">
+          <a:gsLst>
+            <a:gs pos="0">
+              <a:schemeClr val="phClr">
+                <a:tint val="40000"/>
+                <a:satMod val="350000"/>
+              </a:schemeClr>
+            </a:gs>
+            <a:gs pos="40000">
+              <a:schemeClr val="phClr">
+                <a:tint val="45000"/>
+                <a:shade val="99000"/>
+                <a:satMod val="350000"/>
+              </a:schemeClr>
+            </a:gs>
+            <a:gs pos="100000">
+              <a:schemeClr val="phClr">
+                <a:shade val="20000"/>
+                <a:satMod val="255000"/>
+              </a:schemeClr>
+            </a:gs>
+          </a:gsLst>
+          <a:path path="circle">
+            <a:fillToRect l="50000" t="-80000" r="50000" b="180000"/>
+          </a:path>
+        </a:gradFill>
+        <a:gradFill rotWithShape="1">
+          <a:gsLst>
+            <a:gs pos="0">
+              <a:schemeClr val="phClr">
+                <a:tint val="80000"/>
+                <a:satMod val="300000"/>
+              </a:schemeClr>
+            </a:gs>
+            <a:gs pos="100000">
+              <a:schemeClr val="phClr">
+                <a:shade val="30000"/>
+                <a:satMod val="200000"/>
+              </a:schemeClr>
+            </a:gs>
+          </a:gsLst>
+          <a:path path="circle">
+            <a:fillToRect l="50000" t="50000" r="50000" b="50000"/>
+          </a:path>
+        </a:gradFill>
+      </a:bgFillStyleLst>
+    </a:fmtScheme>
+  </a:themeElements>
+  <a:extLst>
+    <a:ext uri="{05A4C25C-085E-4340-85A3-A5531E510DB2}">
+      <thm15:themeFamily xmlns:thm15="http://schemas.microsoft.com/office/thememl/2012/main" name="Office Theme" id="{62F939B6-93AF-4DB8-9C6B-D6C7DFDC589F}" vid="{4A3C46E8-61CC-4603-A589-7422A47A8E4A}"/>
+    </a:ext>
+  </a:extLst>
+</a:theme>
+</file>
+
+<file path=ppt/theme/theme4.xml><?xml version="1.0" encoding="utf-8"?>
+<a:theme xmlns:a="http://schemas.openxmlformats.org/drawingml/2006/main" name="5_默认主题">
+  <a:themeElements>
+    <a:clrScheme name="Office">
+      <a:dk1>
+        <a:srgbClr val="000000"/>
+      </a:dk1>
+      <a:lt1>
+        <a:srgbClr val="FFFFFF"/>
+      </a:lt1>
+      <a:dk2>
+        <a:srgbClr val="44546A"/>
+      </a:dk2>
+      <a:lt2>
+        <a:srgbClr val="E7E6E6"/>
+      </a:lt2>
+      <a:accent1>
+        <a:srgbClr val="4472C4"/>
+      </a:accent1>
+      <a:accent2>
+        <a:srgbClr val="ED7D31"/>
+      </a:accent2>
+      <a:accent3>
+        <a:srgbClr val="A5A5A5"/>
+      </a:accent3>
+      <a:accent4>
+        <a:srgbClr val="FFC000"/>
+      </a:accent4>
+      <a:accent5>
+        <a:srgbClr val="5B9BD5"/>
+      </a:accent5>
+      <a:accent6>
+        <a:srgbClr val="70AD47"/>
+      </a:accent6>
+      <a:hlink>
+        <a:srgbClr val="0563C1"/>
+      </a:hlink>
+      <a:folHlink>
+        <a:srgbClr val="954F72"/>
+      </a:folHlink>
+    </a:clrScheme>
+    <a:fontScheme name="Office">
+      <a:majorFont>
+        <a:latin typeface="Arial"/>
+        <a:ea typeface=""/>
+        <a:cs typeface=""/>
+        <a:font script="Jpan" typeface="ＭＳ Ｐゴシック"/>
+        <a:font script="Hang" typeface="맑은 고딕"/>
+        <a:font script="Hans" typeface="宋体"/>
+        <a:font script="Hant" typeface="新細明體"/>
+        <a:font script="Arab" typeface="Times New Roman"/>
+        <a:font script="Hebr" typeface="Times New Roman"/>
+        <a:font script="Thai" typeface="Angsana New"/>
+        <a:font script="Ethi" typeface="Nyala"/>
+        <a:font script="Beng" typeface="Vrinda"/>
+        <a:font script="Gujr" typeface="Shruti"/>
+        <a:font script="Khmr" typeface="MoolBoran"/>
+        <a:font script="Knda" typeface="Tunga"/>
+        <a:font script="Guru" typeface="Raavi"/>
+        <a:font script="Cans" typeface="Euphemia"/>
+        <a:font script="Cher" typeface="Plantagenet Cherokee"/>
+        <a:font script="Yiii" typeface="Microsoft Yi Baiti"/>
+        <a:font script="Tibt" typeface="Microsoft Himalaya"/>
+        <a:font script="Thaa" typeface="MV Boli"/>
+        <a:font script="Deva" typeface="Mangal"/>
+        <a:font script="Telu" typeface="Gautami"/>
+        <a:font script="Taml" typeface="Latha"/>
+        <a:font script="Syrc" typeface="Estrangelo Edessa"/>
+        <a:font script="Orya" typeface="Kalinga"/>
+        <a:font script="Mlym" typeface="Kartika"/>
+        <a:font script="Laoo" typeface="DokChampa"/>
+        <a:font script="Sinh" typeface="Iskoola Pota"/>
+        <a:font script="Mong" typeface="Mongolian Baiti"/>
+        <a:font script="Viet" typeface="Times New Roman"/>
+        <a:font script="Uigh" typeface="Microsoft Uighur"/>
+        <a:font script="Geor" typeface="Sylfaen"/>
+      </a:majorFont>
+      <a:minorFont>
+        <a:latin typeface="Arial"/>
+        <a:ea typeface=""/>
+        <a:cs typeface=""/>
+        <a:font script="Jpan" typeface="ＭＳ Ｐゴシック"/>
+        <a:font script="Hang" typeface="맑은 고딕"/>
+        <a:font script="Hans" typeface="宋体"/>
+        <a:font script="Hant" typeface="新細明體"/>
+        <a:font script="Arab" typeface="Arial"/>
+        <a:font script="Hebr" typeface="Arial"/>
+        <a:font script="Thai" typeface="Cordia New"/>
+        <a:font script="Ethi" typeface="Nyala"/>
+        <a:font script="Beng" typeface="Vrinda"/>
+        <a:font script="Gujr" typeface="Shruti"/>
+        <a:font script="Khmr" typeface="DaunPenh"/>
+        <a:font script="Knda" typeface="Tunga"/>
+        <a:font script="Guru" typeface="Raavi"/>
+        <a:font script="Cans" typeface="Euphemia"/>
+        <a:font script="Cher" typeface="Plantagenet Cherokee"/>
+        <a:font script="Yiii" typeface="Microsoft Yi Baiti"/>
+        <a:font script="Tibt" typeface="Microsoft Himalaya"/>
+        <a:font script="Thaa" typeface="MV Boli"/>
+        <a:font script="Deva" typeface="Mangal"/>
+        <a:font script="Telu" typeface="Gautami"/>
+        <a:font script="Taml" typeface="Latha"/>
+        <a:font script="Syrc" typeface="Estrangelo Edessa"/>
+        <a:font script="Orya" typeface="Kalinga"/>
+        <a:font script="Mlym" typeface="Kartika"/>
+        <a:font script="Laoo" typeface="DokChampa"/>
+        <a:font script="Sinh" typeface="Iskoola Pota"/>
+        <a:font script="Mong" typeface="Mongolian Baiti"/>
+        <a:font script="Viet" typeface="Arial"/>
+        <a:font script="Uigh" typeface="Microsoft Uighur"/>
+        <a:font script="Geor" typeface="Sylfaen"/>
+      </a:minorFont>
+    </a:fontScheme>
+    <a:fmtScheme name="Office">
+      <a:fillStyleLst>
+        <a:solidFill>
+          <a:schemeClr val="phClr"/>
+        </a:solidFill>
+        <a:gradFill rotWithShape="1">
+          <a:gsLst>
+            <a:gs pos="0">
+              <a:schemeClr val="phClr">
+                <a:tint val="50000"/>
+                <a:satMod val="300000"/>
+              </a:schemeClr>
+            </a:gs>
+            <a:gs pos="35000">
+              <a:schemeClr val="phClr">
+                <a:tint val="37000"/>
+                <a:satMod val="300000"/>
+              </a:schemeClr>
+            </a:gs>
+            <a:gs pos="100000">
+              <a:schemeClr val="phClr">
+                <a:tint val="15000"/>
+                <a:satMod val="350000"/>
+              </a:schemeClr>
+            </a:gs>
+          </a:gsLst>
+          <a:lin ang="16200000" scaled="1"/>
+        </a:gradFill>
+        <a:gradFill rotWithShape="1">
+          <a:gsLst>
+            <a:gs pos="0">
+              <a:schemeClr val="phClr">
+                <a:tint val="100000"/>
+                <a:shade val="100000"/>
+                <a:satMod val="130000"/>
+              </a:schemeClr>
+            </a:gs>
+            <a:gs pos="100000">
+              <a:schemeClr val="phClr">
+                <a:tint val="50000"/>
+                <a:shade val="100000"/>
+                <a:satMod val="350000"/>
+              </a:schemeClr>
+            </a:gs>
+          </a:gsLst>
+          <a:lin ang="16200000" scaled="0"/>
+        </a:gradFill>
+      </a:fillStyleLst>
+      <a:lnStyleLst>
+        <a:ln w="9525" cap="flat" cmpd="sng" algn="ctr">
+          <a:solidFill>
+            <a:schemeClr val="phClr">
+              <a:shade val="95000"/>
+              <a:satMod val="105000"/>
+            </a:schemeClr>
+          </a:solidFill>
+          <a:prstDash val="solid"/>
+        </a:ln>
+        <a:ln w="25400" cap="flat" cmpd="sng" algn="ctr">
+          <a:solidFill>
+            <a:schemeClr val="phClr"/>
+          </a:solidFill>
+          <a:prstDash val="solid"/>
+        </a:ln>
+        <a:ln w="38100" cap="flat" cmpd="sng" algn="ctr">
+          <a:solidFill>
+            <a:schemeClr val="phClr"/>
+          </a:solidFill>
+          <a:prstDash val="solid"/>
+        </a:ln>
+      </a:lnStyleLst>
+      <a:effectStyleLst>
+        <a:effectStyle>
+          <a:effectLst>
+            <a:outerShdw blurRad="40000" dist="20000" dir="5400000" rotWithShape="0">
+              <a:srgbClr val="000000">
+                <a:alpha val="38000"/>
+              </a:srgbClr>
+            </a:outerShdw>
+          </a:effectLst>
+        </a:effectStyle>
+        <a:effectStyle>
+          <a:effectLst>
+            <a:outerShdw blurRad="40000" dist="23000" dir="5400000" rotWithShape="0">
+              <a:srgbClr val="000000">
+                <a:alpha val="35000"/>
+              </a:srgbClr>
+            </a:outerShdw>
+          </a:effectLst>
+        </a:effectStyle>
+        <a:effectStyle>
+          <a:effectLst>
+            <a:outerShdw blurRad="40000" dist="23000" dir="5400000" rotWithShape="0">
+              <a:srgbClr val="000000">
+                <a:alpha val="35000"/>
+              </a:srgbClr>
+            </a:outerShdw>
+          </a:effectLst>
+          <a:scene3d>
+            <a:camera prst="orthographicFront">
+              <a:rot lat="0" lon="0" rev="0"/>
+            </a:camera>
+            <a:lightRig rig="threePt" dir="t">
+              <a:rot lat="0" lon="0" rev="1200000"/>
+            </a:lightRig>
+          </a:scene3d>
+          <a:sp3d>
+            <a:bevelT w="63500" h="25400"/>
+          </a:sp3d>
+        </a:effectStyle>
+      </a:effectStyleLst>
+      <a:bgFillStyleLst>
+        <a:solidFill>
+          <a:schemeClr val="phClr"/>
+        </a:solidFill>
+        <a:gradFill rotWithShape="1">
+          <a:gsLst>
+            <a:gs pos="0">
+              <a:schemeClr val="phClr">
+                <a:tint val="40000"/>
+                <a:satMod val="350000"/>
+              </a:schemeClr>
+            </a:gs>
+            <a:gs pos="40000">
+              <a:schemeClr val="phClr">
+                <a:tint val="45000"/>
+                <a:shade val="99000"/>
+                <a:satMod val="350000"/>
+              </a:schemeClr>
+            </a:gs>
+            <a:gs pos="100000">
+              <a:schemeClr val="phClr">
+                <a:shade val="20000"/>
+                <a:satMod val="255000"/>
+              </a:schemeClr>
+            </a:gs>
+          </a:gsLst>
+          <a:path path="circle">
+            <a:fillToRect l="50000" t="-80000" r="50000" b="180000"/>
+          </a:path>
+        </a:gradFill>
+        <a:gradFill rotWithShape="1">
+          <a:gsLst>
+            <a:gs pos="0">
+              <a:schemeClr val="phClr">
+                <a:tint val="80000"/>
+                <a:satMod val="300000"/>
+              </a:schemeClr>
+            </a:gs>
+            <a:gs pos="100000">
+              <a:schemeClr val="phClr">
+                <a:shade val="30000"/>
+                <a:satMod val="200000"/>
+              </a:schemeClr>
+            </a:gs>
+          </a:gsLst>
+          <a:path path="circle">
+            <a:fillToRect l="50000" t="50000" r="50000" b="50000"/>
+          </a:path>
+        </a:gradFill>
+      </a:bgFillStyleLst>
+    </a:fmtScheme>
+  </a:themeElements>
+  <a:extLst>
+    <a:ext uri="{05A4C25C-085E-4340-85A3-A5531E510DB2}">
+      <thm15:themeFamily xmlns:thm15="http://schemas.microsoft.com/office/thememl/2012/main" name="Office Theme" id="{62F939B6-93AF-4DB8-9C6B-D6C7DFDC589F}" vid="{4A3C46E8-61CC-4603-A589-7422A47A8E4A}"/>
+    </a:ext>
+  </a:extLst>
+</a:theme>
+</file>
+
+<file path=ppt/theme/theme5.xml><?xml version="1.0" encoding="utf-8"?>
+<a:theme xmlns:a="http://schemas.openxmlformats.org/drawingml/2006/main" name="2_默认主题">
+  <a:themeElements>
+    <a:clrScheme name="Office">
+      <a:dk1>
+        <a:srgbClr val="000000"/>
+      </a:dk1>
+      <a:lt1>
+        <a:srgbClr val="FFFFFF"/>
+      </a:lt1>
+      <a:dk2>
+        <a:srgbClr val="44546A"/>
+      </a:dk2>
+      <a:lt2>
+        <a:srgbClr val="E7E6E6"/>
+      </a:lt2>
+      <a:accent1>
+        <a:srgbClr val="4472C4"/>
+      </a:accent1>
+      <a:accent2>
+        <a:srgbClr val="ED7D31"/>
+      </a:accent2>
+      <a:accent3>
+        <a:srgbClr val="A5A5A5"/>
+      </a:accent3>
+      <a:accent4>
+        <a:srgbClr val="FFC000"/>
+      </a:accent4>
+      <a:accent5>
+        <a:srgbClr val="5B9BD5"/>
+      </a:accent5>
+      <a:accent6>
+        <a:srgbClr val="70AD47"/>
+      </a:accent6>
+      <a:hlink>
+        <a:srgbClr val="0563C1"/>
+      </a:hlink>
+      <a:folHlink>
+        <a:srgbClr val="954F72"/>
+      </a:folHlink>
+    </a:clrScheme>
+    <a:fontScheme name="Office">
+      <a:majorFont>
+        <a:latin typeface="Arial"/>
+        <a:ea typeface=""/>
+        <a:cs typeface=""/>
+        <a:font script="Jpan" typeface="ＭＳ Ｐゴシック"/>
+        <a:font script="Hang" typeface="맑은 고딕"/>
+        <a:font script="Hans" typeface="宋体"/>
+        <a:font script="Hant" typeface="新細明體"/>
+        <a:font script="Arab" typeface="Times New Roman"/>
+        <a:font script="Hebr" typeface="Times New Roman"/>
+        <a:font script="Thai" typeface="Angsana New"/>
+        <a:font script="Ethi" typeface="Nyala"/>
+        <a:font script="Beng" typeface="Vrinda"/>
+        <a:font script="Gujr" typeface="Shruti"/>
+        <a:font script="Khmr" typeface="MoolBoran"/>
+        <a:font script="Knda" typeface="Tunga"/>
+        <a:font script="Guru" typeface="Raavi"/>
+        <a:font script="Cans" typeface="Euphemia"/>
+        <a:font script="Cher" typeface="Plantagenet Cherokee"/>
+        <a:font script="Yiii" typeface="Microsoft Yi Baiti"/>
+        <a:font script="Tibt" typeface="Microsoft Himalaya"/>
+        <a:font script="Thaa" typeface="MV Boli"/>
+        <a:font script="Deva" typeface="Mangal"/>
+        <a:font script="Telu" typeface="Gautami"/>
+        <a:font script="Taml" typeface="Latha"/>
+        <a:font script="Syrc" typeface="Estrangelo Edessa"/>
+        <a:font script="Orya" typeface="Kalinga"/>
+        <a:font script="Mlym" typeface="Kartika"/>
+        <a:font script="Laoo" typeface="DokChampa"/>
+        <a:font script="Sinh" typeface="Iskoola Pota"/>
+        <a:font script="Mong" typeface="Mongolian Baiti"/>
+        <a:font script="Viet" typeface="Times New Roman"/>
+        <a:font script="Uigh" typeface="Microsoft Uighur"/>
+        <a:font script="Geor" typeface="Sylfaen"/>
+      </a:majorFont>
+      <a:minorFont>
+        <a:latin typeface="Arial"/>
+        <a:ea typeface=""/>
+        <a:cs typeface=""/>
+        <a:font script="Jpan" typeface="ＭＳ Ｐゴシック"/>
+        <a:font script="Hang" typeface="맑은 고딕"/>
+        <a:font script="Hans" typeface="宋体"/>
+        <a:font script="Hant" typeface="新細明體"/>
+        <a:font script="Arab" typeface="Arial"/>
+        <a:font script="Hebr" typeface="Arial"/>
+        <a:font script="Thai" typeface="Cordia New"/>
+        <a:font script="Ethi" typeface="Nyala"/>
+        <a:font script="Beng" typeface="Vrinda"/>
+        <a:font script="Gujr" typeface="Shruti"/>
+        <a:font script="Khmr" typeface="DaunPenh"/>
+        <a:font script="Knda" typeface="Tunga"/>
+        <a:font script="Guru" typeface="Raavi"/>
+        <a:font script="Cans" typeface="Euphemia"/>
+        <a:font script="Cher" typeface="Plantagenet Cherokee"/>
+        <a:font script="Yiii" typeface="Microsoft Yi Baiti"/>
+        <a:font script="Tibt" typeface="Microsoft Himalaya"/>
+        <a:font script="Thaa" typeface="MV Boli"/>
+        <a:font script="Deva" typeface="Mangal"/>
+        <a:font script="Telu" typeface="Gautami"/>
+        <a:font script="Taml" typeface="Latha"/>
+        <a:font script="Syrc" typeface="Estrangelo Edessa"/>
+        <a:font script="Orya" typeface="Kalinga"/>
+        <a:font script="Mlym" typeface="Kartika"/>
+        <a:font script="Laoo" typeface="DokChampa"/>
+        <a:font script="Sinh" typeface="Iskoola Pota"/>
+        <a:font script="Mong" typeface="Mongolian Baiti"/>
+        <a:font script="Viet" typeface="Arial"/>
+        <a:font script="Uigh" typeface="Microsoft Uighur"/>
+        <a:font script="Geor" typeface="Sylfaen"/>
+      </a:minorFont>
+    </a:fontScheme>
+    <a:fmtScheme name="Office">
+      <a:fillStyleLst>
+        <a:solidFill>
+          <a:schemeClr val="phClr"/>
+        </a:solidFill>
+        <a:gradFill rotWithShape="1">
+          <a:gsLst>
+            <a:gs pos="0">
+              <a:schemeClr val="phClr">
+                <a:tint val="50000"/>
+                <a:satMod val="300000"/>
+              </a:schemeClr>
+            </a:gs>
+            <a:gs pos="35000">
+              <a:schemeClr val="phClr">
+                <a:tint val="37000"/>
+                <a:satMod val="300000"/>
+              </a:schemeClr>
+            </a:gs>
+            <a:gs pos="100000">
+              <a:schemeClr val="phClr">
+                <a:tint val="15000"/>
+                <a:satMod val="350000"/>
+              </a:schemeClr>
+            </a:gs>
+          </a:gsLst>
+          <a:lin ang="16200000" scaled="1"/>
+        </a:gradFill>
+        <a:gradFill rotWithShape="1">
+          <a:gsLst>
+            <a:gs pos="0">
+              <a:schemeClr val="phClr">
+                <a:tint val="100000"/>
+                <a:shade val="100000"/>
+                <a:satMod val="130000"/>
+              </a:schemeClr>
+            </a:gs>
+            <a:gs pos="100000">
+              <a:schemeClr val="phClr">
+                <a:tint val="50000"/>
+                <a:shade val="100000"/>
+                <a:satMod val="350000"/>
+              </a:schemeClr>
+            </a:gs>
+          </a:gsLst>
+          <a:lin ang="16200000" scaled="0"/>
+        </a:gradFill>
+      </a:fillStyleLst>
+      <a:lnStyleLst>
+        <a:ln w="9525" cap="flat" cmpd="sng" algn="ctr">
+          <a:solidFill>
+            <a:schemeClr val="phClr">
+              <a:shade val="95000"/>
+              <a:satMod val="105000"/>
+            </a:schemeClr>
+          </a:solidFill>
+          <a:prstDash val="solid"/>
+        </a:ln>
+        <a:ln w="25400" cap="flat" cmpd="sng" algn="ctr">
+          <a:solidFill>
+            <a:schemeClr val="phClr"/>
+          </a:solidFill>
+          <a:prstDash val="solid"/>
+        </a:ln>
+        <a:ln w="38100" cap="flat" cmpd="sng" algn="ctr">
+          <a:solidFill>
+            <a:schemeClr val="phClr"/>
+          </a:solidFill>
+          <a:prstDash val="solid"/>
+        </a:ln>
+      </a:lnStyleLst>
+      <a:effectStyleLst>
+        <a:effectStyle>
+          <a:effectLst>
+            <a:outerShdw blurRad="40000" dist="20000" dir="5400000" rotWithShape="0">
+              <a:srgbClr val="000000">
+                <a:alpha val="38000"/>
+              </a:srgbClr>
+            </a:outerShdw>
+          </a:effectLst>
+        </a:effectStyle>
+        <a:effectStyle>
+          <a:effectLst>
+            <a:outerShdw blurRad="40000" dist="23000" dir="5400000" rotWithShape="0">
+              <a:srgbClr val="000000">
+                <a:alpha val="35000"/>
+              </a:srgbClr>
+            </a:outerShdw>
+          </a:effectLst>
+        </a:effectStyle>
+        <a:effectStyle>
+          <a:effectLst>
+            <a:outerShdw blurRad="40000" dist="23000" dir="5400000" rotWithShape="0">
+              <a:srgbClr val="000000">
+                <a:alpha val="35000"/>
+              </a:srgbClr>
+            </a:outerShdw>
+          </a:effectLst>
+          <a:scene3d>
+            <a:camera prst="orthographicFront">
+              <a:rot lat="0" lon="0" rev="0"/>
+            </a:camera>
+            <a:lightRig rig="threePt" dir="t">
+              <a:rot lat="0" lon="0" rev="1200000"/>
+            </a:lightRig>
+          </a:scene3d>
+          <a:sp3d>
+            <a:bevelT w="63500" h="25400"/>
+          </a:sp3d>
+        </a:effectStyle>
+      </a:effectStyleLst>
+      <a:bgFillStyleLst>
+        <a:solidFill>
+          <a:schemeClr val="phClr"/>
+        </a:solidFill>
+        <a:gradFill rotWithShape="1">
+          <a:gsLst>
+            <a:gs pos="0">
+              <a:schemeClr val="phClr">
+                <a:tint val="40000"/>
+                <a:satMod val="350000"/>
+              </a:schemeClr>
+            </a:gs>
+            <a:gs pos="40000">
+              <a:schemeClr val="phClr">
+                <a:tint val="45000"/>
+                <a:shade val="99000"/>
+                <a:satMod val="350000"/>
+              </a:schemeClr>
+            </a:gs>
+            <a:gs pos="100000">
+              <a:schemeClr val="phClr">
+                <a:shade val="20000"/>
+                <a:satMod val="255000"/>
+              </a:schemeClr>
+            </a:gs>
+          </a:gsLst>
+          <a:path path="circle">
+            <a:fillToRect l="50000" t="-80000" r="50000" b="180000"/>
+          </a:path>
+        </a:gradFill>
+        <a:gradFill rotWithShape="1">
+          <a:gsLst>
+            <a:gs pos="0">
+              <a:schemeClr val="phClr">
+                <a:tint val="80000"/>
+                <a:satMod val="300000"/>
+              </a:schemeClr>
+            </a:gs>
+            <a:gs pos="100000">
+              <a:schemeClr val="phClr">
+                <a:shade val="30000"/>
+                <a:satMod val="200000"/>
+              </a:schemeClr>
+            </a:gs>
+          </a:gsLst>
+          <a:path path="circle">
+            <a:fillToRect l="50000" t="50000" r="50000" b="50000"/>
+          </a:path>
+        </a:gradFill>
+      </a:bgFillStyleLst>
+    </a:fmtScheme>
+  </a:themeElements>
+  <a:extLst>
+    <a:ext uri="{05A4C25C-085E-4340-85A3-A5531E510DB2}">
+      <thm15:themeFamily xmlns:thm15="http://schemas.microsoft.com/office/thememl/2012/main" name="Office Theme" id="{62F939B6-93AF-4DB8-9C6B-D6C7DFDC589F}" vid="{4A3C46E8-61CC-4603-A589-7422A47A8E4A}"/>
+    </a:ext>
+  </a:extLst>
+</a:theme>
+</file>
+
+<file path=ppt/theme/theme6.xml><?xml version="1.0" encoding="utf-8"?>
 <a:theme xmlns:a="http://schemas.openxmlformats.org/drawingml/2006/main" name="Office 主题​​">
   <a:themeElements>
     <a:clrScheme name="Office">

--- a/docs/3rdPartyAS_Poc_Introduction.pptx
+++ b/docs/3rdPartyAS_Poc_Introduction.pptx
@@ -262,7 +262,7 @@
   <p:extLst>
     <p:ext uri="{EFAFB233-063F-42B5-8137-9DF3F51BA10A}">
       <p15:sldGuideLst xmlns:p15="http://schemas.microsoft.com/office/powerpoint/2012/main">
-        <p15:guide id="1" orient="horz" pos="1640" userDrawn="1">
+        <p15:guide id="1" orient="horz" pos="1624" userDrawn="1">
           <p15:clr>
             <a:srgbClr val="747775"/>
           </p15:clr>
@@ -17801,7 +17801,7 @@
         </p:nvSpPr>
         <p:spPr>
           <a:xfrm>
-            <a:off x="1016000" y="4699000"/>
+            <a:off x="1016000" y="5292090"/>
             <a:ext cx="10160000" cy="304800"/>
           </a:xfrm>
           <a:prstGeom prst="rect">
@@ -17837,6 +17837,72 @@
               <a:t>September 2026</a:t>
             </a:r>
             <a:endParaRPr lang="en-US" sz="1100"/>
+          </a:p>
+        </p:txBody>
+      </p:sp>
+      <p:sp>
+        <p:nvSpPr>
+          <p:cNvPr id="8" name="AutoShape 7"/>
+          <p:cNvSpPr/>
+          <p:nvPr/>
+        </p:nvSpPr>
+        <p:spPr>
+          <a:xfrm>
+            <a:off x="1016000" y="4883150"/>
+            <a:ext cx="10160000" cy="304800"/>
+          </a:xfrm>
+          <a:prstGeom prst="rect">
+            <a:avLst/>
+          </a:prstGeom>
+          <a:noFill/>
+          <a:ln w="12700" cap="flat" cmpd="sng">
+            <a:noFill/>
+            <a:prstDash val="solid"/>
+            <a:round/>
+          </a:ln>
+        </p:spPr>
+        <p:txBody>
+          <a:bodyPr vert="horz" wrap="square" lIns="0" tIns="0" rIns="0" bIns="0" rtlCol="0" anchor="ctr" anchorCtr="0"/>
+          <a:p>
+            <a:pPr marL="0" indent="0" algn="l">
+              <a:lnSpc>
+                <a:spcPct val="125000"/>
+              </a:lnSpc>
+              <a:defRPr/>
+            </a:pPr>
+            <a:r>
+              <a:rPr lang="en-US" sz="1400" b="0" i="0" u="none" strike="noStrike">
+                <a:solidFill>
+                  <a:srgbClr val="BFD7FF"/>
+                </a:solidFill>
+                <a:latin typeface="Inter"/>
+                <a:ea typeface="Inter"/>
+                <a:cs typeface="Inter"/>
+                <a:sym typeface="Inter"/>
+              </a:rPr>
+              <a:t>Dolan </a:t>
+            </a:r>
+            <a:r>
+              <a:rPr lang="en-US" sz="1400" b="0" i="0" u="none" strike="noStrike">
+                <a:solidFill>
+                  <a:srgbClr val="BFD7FF"/>
+                </a:solidFill>
+                <a:latin typeface="Inter"/>
+                <a:ea typeface="Inter"/>
+                <a:cs typeface="Inter"/>
+                <a:sym typeface="Inter"/>
+              </a:rPr>
+              <a:t>Shu</a:t>
+            </a:r>
+            <a:endParaRPr lang="en-US" sz="1400" b="0" i="0" u="none" strike="noStrike">
+              <a:solidFill>
+                <a:srgbClr val="BFD7FF"/>
+              </a:solidFill>
+              <a:latin typeface="Inter"/>
+              <a:ea typeface="Inter"/>
+              <a:cs typeface="Inter"/>
+              <a:sym typeface="Inter"/>
+            </a:endParaRPr>
           </a:p>
         </p:txBody>
       </p:sp>

--- a/docs/3rdPartyAS_Poc_Introduction.pptx
+++ b/docs/3rdPartyAS_Poc_Introduction.pptx
@@ -262,7 +262,7 @@
   <p:extLst>
     <p:ext uri="{EFAFB233-063F-42B5-8137-9DF3F51BA10A}">
       <p15:sldGuideLst xmlns:p15="http://schemas.microsoft.com/office/powerpoint/2012/main">
-        <p15:guide id="1" orient="horz" pos="1624" userDrawn="1">
+        <p15:guide id="1" orient="horz" pos="1640" userDrawn="1">
           <p15:clr>
             <a:srgbClr val="747775"/>
           </p15:clr>
@@ -17801,7 +17801,7 @@
         </p:nvSpPr>
         <p:spPr>
           <a:xfrm>
-            <a:off x="1016000" y="5292090"/>
+            <a:off x="1016000" y="4699000"/>
             <a:ext cx="10160000" cy="304800"/>
           </a:xfrm>
           <a:prstGeom prst="rect">
@@ -17837,72 +17837,6 @@
               <a:t>September 2026</a:t>
             </a:r>
             <a:endParaRPr lang="en-US" sz="1100"/>
-          </a:p>
-        </p:txBody>
-      </p:sp>
-      <p:sp>
-        <p:nvSpPr>
-          <p:cNvPr id="8" name="AutoShape 7"/>
-          <p:cNvSpPr/>
-          <p:nvPr/>
-        </p:nvSpPr>
-        <p:spPr>
-          <a:xfrm>
-            <a:off x="1016000" y="4883150"/>
-            <a:ext cx="10160000" cy="304800"/>
-          </a:xfrm>
-          <a:prstGeom prst="rect">
-            <a:avLst/>
-          </a:prstGeom>
-          <a:noFill/>
-          <a:ln w="12700" cap="flat" cmpd="sng">
-            <a:noFill/>
-            <a:prstDash val="solid"/>
-            <a:round/>
-          </a:ln>
-        </p:spPr>
-        <p:txBody>
-          <a:bodyPr vert="horz" wrap="square" lIns="0" tIns="0" rIns="0" bIns="0" rtlCol="0" anchor="ctr" anchorCtr="0"/>
-          <a:p>
-            <a:pPr marL="0" indent="0" algn="l">
-              <a:lnSpc>
-                <a:spcPct val="125000"/>
-              </a:lnSpc>
-              <a:defRPr/>
-            </a:pPr>
-            <a:r>
-              <a:rPr lang="en-US" sz="1400" b="0" i="0" u="none" strike="noStrike">
-                <a:solidFill>
-                  <a:srgbClr val="BFD7FF"/>
-                </a:solidFill>
-                <a:latin typeface="Inter"/>
-                <a:ea typeface="Inter"/>
-                <a:cs typeface="Inter"/>
-                <a:sym typeface="Inter"/>
-              </a:rPr>
-              <a:t>Dolan </a:t>
-            </a:r>
-            <a:r>
-              <a:rPr lang="en-US" sz="1400" b="0" i="0" u="none" strike="noStrike">
-                <a:solidFill>
-                  <a:srgbClr val="BFD7FF"/>
-                </a:solidFill>
-                <a:latin typeface="Inter"/>
-                <a:ea typeface="Inter"/>
-                <a:cs typeface="Inter"/>
-                <a:sym typeface="Inter"/>
-              </a:rPr>
-              <a:t>Shu</a:t>
-            </a:r>
-            <a:endParaRPr lang="en-US" sz="1400" b="0" i="0" u="none" strike="noStrike">
-              <a:solidFill>
-                <a:srgbClr val="BFD7FF"/>
-              </a:solidFill>
-              <a:latin typeface="Inter"/>
-              <a:ea typeface="Inter"/>
-              <a:cs typeface="Inter"/>
-              <a:sym typeface="Inter"/>
-            </a:endParaRPr>
           </a:p>
         </p:txBody>
       </p:sp>

--- a/docs/3rdPartyAS_Poc_Introduction.pptx
+++ b/docs/3rdPartyAS_Poc_Introduction.pptx
@@ -262,12 +262,12 @@
   <p:extLst>
     <p:ext uri="{EFAFB233-063F-42B5-8137-9DF3F51BA10A}">
       <p15:sldGuideLst xmlns:p15="http://schemas.microsoft.com/office/powerpoint/2012/main">
-        <p15:guide id="1" orient="horz" pos="1640" userDrawn="1">
+        <p15:guide id="1" orient="horz" pos="1624" userDrawn="1">
           <p15:clr>
             <a:srgbClr val="747775"/>
           </p15:clr>
         </p15:guide>
-        <p15:guide id="2" pos="2920" userDrawn="1">
+        <p15:guide id="2" pos="2880" userDrawn="1">
           <p15:clr>
             <a:srgbClr val="747775"/>
           </p15:clr>
@@ -17801,7 +17801,7 @@
         </p:nvSpPr>
         <p:spPr>
           <a:xfrm>
-            <a:off x="1016000" y="4699000"/>
+            <a:off x="1016000" y="5292090"/>
             <a:ext cx="10160000" cy="304800"/>
           </a:xfrm>
           <a:prstGeom prst="rect">
@@ -17837,6 +17837,72 @@
               <a:t>September 2026</a:t>
             </a:r>
             <a:endParaRPr lang="en-US" sz="1100"/>
+          </a:p>
+        </p:txBody>
+      </p:sp>
+      <p:sp>
+        <p:nvSpPr>
+          <p:cNvPr id="8" name="AutoShape 7"/>
+          <p:cNvSpPr/>
+          <p:nvPr/>
+        </p:nvSpPr>
+        <p:spPr>
+          <a:xfrm>
+            <a:off x="1016000" y="4883150"/>
+            <a:ext cx="10160000" cy="304800"/>
+          </a:xfrm>
+          <a:prstGeom prst="rect">
+            <a:avLst/>
+          </a:prstGeom>
+          <a:noFill/>
+          <a:ln w="12700" cap="flat" cmpd="sng">
+            <a:noFill/>
+            <a:prstDash val="solid"/>
+            <a:round/>
+          </a:ln>
+        </p:spPr>
+        <p:txBody>
+          <a:bodyPr vert="horz" wrap="square" lIns="0" tIns="0" rIns="0" bIns="0" rtlCol="0" anchor="ctr" anchorCtr="0"/>
+          <a:p>
+            <a:pPr marL="0" indent="0" algn="l">
+              <a:lnSpc>
+                <a:spcPct val="125000"/>
+              </a:lnSpc>
+              <a:defRPr/>
+            </a:pPr>
+            <a:r>
+              <a:rPr lang="en-US" sz="1400" b="0" i="0" u="none" strike="noStrike">
+                <a:solidFill>
+                  <a:srgbClr val="BFD7FF"/>
+                </a:solidFill>
+                <a:latin typeface="Inter"/>
+                <a:ea typeface="Inter"/>
+                <a:cs typeface="Inter"/>
+                <a:sym typeface="Inter"/>
+              </a:rPr>
+              <a:t>Dolan </a:t>
+            </a:r>
+            <a:r>
+              <a:rPr lang="en-US" sz="1400" b="0" i="0" u="none" strike="noStrike">
+                <a:solidFill>
+                  <a:srgbClr val="BFD7FF"/>
+                </a:solidFill>
+                <a:latin typeface="Inter"/>
+                <a:ea typeface="Inter"/>
+                <a:cs typeface="Inter"/>
+                <a:sym typeface="Inter"/>
+              </a:rPr>
+              <a:t>Shu</a:t>
+            </a:r>
+            <a:endParaRPr lang="en-US" sz="1400" b="0" i="0" u="none" strike="noStrike">
+              <a:solidFill>
+                <a:srgbClr val="BFD7FF"/>
+              </a:solidFill>
+              <a:latin typeface="Inter"/>
+              <a:ea typeface="Inter"/>
+              <a:cs typeface="Inter"/>
+              <a:sym typeface="Inter"/>
+            </a:endParaRPr>
           </a:p>
         </p:txBody>
       </p:sp>
@@ -29899,7 +29965,7 @@
         </p:nvGraphicFramePr>
         <p:xfrm>
           <a:off x="762000" y="2032000"/>
-          <a:ext cx="4826000" cy="2595880"/>
+          <a:ext cx="4826000" cy="2966720"/>
         </p:xfrm>
         <a:graphic>
           <a:graphicData uri="http://schemas.openxmlformats.org/drawingml/2006/table">
@@ -30449,7 +30515,7 @@
                           <a:cs typeface="Inter"/>
                           <a:sym typeface="Inter"/>
                         </a:rPr>
-                        <a:t>License</a:t>
+                        <a:t>CICD</a:t>
                       </a:r>
                       <a:endParaRPr lang="en-US" sz="1100"/>
                     </a:p>
@@ -30474,6 +30540,90 @@
                   <a:txBody>
                     <a:bodyPr rtlCol="0"/>
                     <a:lstStyle/>
+                    <a:p>
+                      <a:pPr marL="0" indent="0" algn="l">
+                        <a:lnSpc>
+                          <a:spcPct val="100000"/>
+                        </a:lnSpc>
+                        <a:defRPr/>
+                      </a:pPr>
+                      <a:r>
+                        <a:rPr lang="en-US" sz="1100" b="0" i="0" u="none" strike="noStrike">
+                          <a:solidFill>
+                            <a:srgbClr val="536174"/>
+                          </a:solidFill>
+                          <a:latin typeface="Inter"/>
+                          <a:ea typeface="Inter"/>
+                          <a:cs typeface="Inter"/>
+                          <a:sym typeface="Inter"/>
+                        </a:rPr>
+                        <a:t>github action</a:t>
+                      </a:r>
+                      <a:endParaRPr lang="en-US" sz="1100"/>
+                    </a:p>
+                  </a:txBody>
+                  <a:tcPr marL="101600" marR="101600" marT="101600" marB="101600" anchor="t" anchorCtr="0">
+                    <a:lnL>
+                      <a:noFill/>
+                    </a:lnL>
+                    <a:lnR>
+                      <a:noFill/>
+                    </a:lnR>
+                    <a:lnT>
+                      <a:noFill/>
+                    </a:lnT>
+                    <a:lnB>
+                      <a:noFill/>
+                    </a:lnB>
+                    <a:noFill/>
+                  </a:tcPr>
+                </a:tc>
+              </a:tr>
+              <a:tr h="370840">
+                <a:tc>
+                  <a:txBody>
+                    <a:bodyPr/>
+                    <a:p>
+                      <a:pPr marL="0" indent="0" algn="l">
+                        <a:lnSpc>
+                          <a:spcPct val="100000"/>
+                        </a:lnSpc>
+                        <a:defRPr/>
+                      </a:pPr>
+                      <a:r>
+                        <a:rPr lang="en-US" sz="1100" b="1" i="0" u="none" strike="noStrike">
+                          <a:solidFill>
+                            <a:srgbClr val="0D1326"/>
+                          </a:solidFill>
+                          <a:latin typeface="Inter"/>
+                          <a:ea typeface="Inter"/>
+                          <a:cs typeface="Inter"/>
+                          <a:sym typeface="Inter"/>
+                        </a:rPr>
+                        <a:t>License</a:t>
+                      </a:r>
+                      <a:endParaRPr lang="en-US" sz="1100"/>
+                    </a:p>
+                  </a:txBody>
+                  <a:tcPr marL="101600" marR="101600" marT="101600" marB="101600" anchor="t" anchorCtr="0">
+                    <a:lnL>
+                      <a:noFill/>
+                    </a:lnL>
+                    <a:lnR>
+                      <a:noFill/>
+                    </a:lnR>
+                    <a:lnT>
+                      <a:noFill/>
+                    </a:lnT>
+                    <a:lnB>
+                      <a:noFill/>
+                    </a:lnB>
+                    <a:noFill/>
+                  </a:tcPr>
+                </a:tc>
+                <a:tc>
+                  <a:txBody>
+                    <a:bodyPr/>
                     <a:p>
                       <a:pPr marL="0" indent="0" algn="l">
                         <a:lnSpc>

--- a/docs/3rdPartyAS_Poc_Introduction.pptx
+++ b/docs/3rdPartyAS_Poc_Introduction.pptx
@@ -6,27 +6,25 @@
     <p:sldMasterId id="2147483660" r:id="rId3"/>
     <p:sldMasterId id="2147483662" r:id="rId4"/>
     <p:sldMasterId id="2147483664" r:id="rId5"/>
-    <p:sldMasterId id="2147483666" r:id="rId6"/>
   </p:sldMasterIdLst>
   <p:notesMasterIdLst>
-    <p:notesMasterId r:id="rId8"/>
+    <p:notesMasterId r:id="rId7"/>
   </p:notesMasterIdLst>
   <p:sldIdLst>
-    <p:sldId id="256" r:id="rId7"/>
-    <p:sldId id="257" r:id="rId9"/>
-    <p:sldId id="258" r:id="rId10"/>
-    <p:sldId id="259" r:id="rId11"/>
-    <p:sldId id="260" r:id="rId12"/>
-    <p:sldId id="261" r:id="rId13"/>
-    <p:sldId id="262" r:id="rId14"/>
-    <p:sldId id="263" r:id="rId15"/>
-    <p:sldId id="264" r:id="rId16"/>
-    <p:sldId id="265" r:id="rId17"/>
-    <p:sldId id="266" r:id="rId18"/>
-    <p:sldId id="267" r:id="rId19"/>
-    <p:sldId id="268" r:id="rId20"/>
-    <p:sldId id="272" r:id="rId21"/>
-    <p:sldId id="273" r:id="rId22"/>
+    <p:sldId id="256" r:id="rId6"/>
+    <p:sldId id="257" r:id="rId8"/>
+    <p:sldId id="258" r:id="rId9"/>
+    <p:sldId id="259" r:id="rId10"/>
+    <p:sldId id="260" r:id="rId11"/>
+    <p:sldId id="261" r:id="rId12"/>
+    <p:sldId id="262" r:id="rId13"/>
+    <p:sldId id="263" r:id="rId14"/>
+    <p:sldId id="264" r:id="rId15"/>
+    <p:sldId id="265" r:id="rId16"/>
+    <p:sldId id="266" r:id="rId17"/>
+    <p:sldId id="267" r:id="rId18"/>
+    <p:sldId id="268" r:id="rId19"/>
+    <p:sldId id="272" r:id="rId20"/>
   </p:sldIdLst>
   <p:sldSz cx="12192000" cy="6858000"/>
   <p:notesSz cx="6858000" cy="9144000"/>
@@ -2217,278 +2215,6 @@
 </p:notes>
 </file>
 
-<file path=ppt/notesSlides/notesSlide15.xml><?xml version="1.0" encoding="utf-8"?>
-<p:notes xmlns:a="http://schemas.openxmlformats.org/drawingml/2006/main" xmlns:r="http://schemas.openxmlformats.org/officeDocument/2006/relationships" xmlns:p="http://schemas.openxmlformats.org/presentationml/2006/main">
-  <p:cSld>
-    <p:spTree>
-      <p:nvGrpSpPr>
-        <p:cNvPr id="1" name=""/>
-        <p:cNvGrpSpPr/>
-        <p:nvPr/>
-      </p:nvGrpSpPr>
-      <p:grpSpPr>
-        <a:xfrm>
-          <a:off x="0" y="0"/>
-          <a:ext cx="0" cy="0"/>
-          <a:chOff x="0" y="0"/>
-          <a:chExt cx="0" cy="0"/>
-        </a:xfrm>
-      </p:grpSpPr>
-      <p:sp>
-        <p:nvSpPr>
-          <p:cNvPr id="2" name="Header Placeholder 1"/>
-          <p:cNvSpPr>
-            <a:spLocks noGrp="1"/>
-          </p:cNvSpPr>
-          <p:nvPr>
-            <p:ph type="hdr" sz="quarter"/>
-          </p:nvPr>
-        </p:nvSpPr>
-        <p:spPr>
-          <a:xfrm>
-            <a:off x="0" y="0"/>
-            <a:ext cx="3962400" cy="342900"/>
-          </a:xfrm>
-          <a:prstGeom prst="rect">
-            <a:avLst/>
-          </a:prstGeom>
-        </p:spPr>
-        <p:txBody>
-          <a:bodyPr vert="horz" lIns="91440" tIns="45720" rIns="91440" bIns="45720" rtlCol="0"/>
-          <a:lstStyle>
-            <a:lvl1pPr algn="l">
-              <a:defRPr sz="1200"/>
-            </a:lvl1pPr>
-          </a:lstStyle>
-          <a:p/>
-        </p:txBody>
-      </p:sp>
-      <p:sp>
-        <p:nvSpPr>
-          <p:cNvPr id="3" name="Date Placeholder 2"/>
-          <p:cNvSpPr>
-            <a:spLocks noGrp="1"/>
-          </p:cNvSpPr>
-          <p:nvPr>
-            <p:ph type="dt" idx="1"/>
-          </p:nvPr>
-        </p:nvSpPr>
-        <p:spPr>
-          <a:xfrm>
-            <a:off x="5180013" y="0"/>
-            <a:ext cx="3962400" cy="342900"/>
-          </a:xfrm>
-          <a:prstGeom prst="rect">
-            <a:avLst/>
-          </a:prstGeom>
-        </p:spPr>
-        <p:txBody>
-          <a:bodyPr vert="horz" lIns="91440" tIns="45720" rIns="91440" bIns="45720" rtlCol="0"/>
-          <a:lstStyle>
-            <a:lvl1pPr algn="r">
-              <a:defRPr sz="1200"/>
-            </a:lvl1pPr>
-          </a:lstStyle>
-          <a:p>
-            <a:r>
-              <a:rPr lang="cs-CZ" smtClean="0"/>
-              <a:t>1.7.2013</a:t>
-            </a:r>
-            <a:endParaRPr lang="cs-CZ" smtClean="0"/>
-          </a:p>
-        </p:txBody>
-      </p:sp>
-      <p:sp>
-        <p:nvSpPr>
-          <p:cNvPr id="4" name="Slide Image Placeholder 3"/>
-          <p:cNvSpPr>
-            <a:spLocks noGrp="1" noRot="1" noChangeAspect="1"/>
-          </p:cNvSpPr>
-          <p:nvPr>
-            <p:ph type="sldImg" idx="2"/>
-          </p:nvPr>
-        </p:nvSpPr>
-        <p:spPr>
-          <a:xfrm>
-            <a:off x="2857500" y="512763"/>
-            <a:ext cx="3429000" cy="2566987"/>
-          </a:xfrm>
-          <a:prstGeom prst="rect">
-            <a:avLst/>
-          </a:prstGeom>
-          <a:noFill/>
-          <a:ln w="12700">
-            <a:solidFill>
-              <a:prstClr val="black"/>
-            </a:solidFill>
-          </a:ln>
-        </p:spPr>
-        <p:txBody>
-          <a:bodyPr vert="horz" lIns="91440" tIns="45720" rIns="91440" bIns="45720" rtlCol="0" anchor="ctr"/>
-          <a:lstStyle/>
-          <a:p/>
-        </p:txBody>
-      </p:sp>
-      <p:sp>
-        <p:nvSpPr>
-          <p:cNvPr id="5" name="Notes Placeholder 4"/>
-          <p:cNvSpPr>
-            <a:spLocks noGrp="1"/>
-          </p:cNvSpPr>
-          <p:nvPr>
-            <p:ph type="body" sz="quarter" idx="3"/>
-          </p:nvPr>
-        </p:nvSpPr>
-        <p:spPr>
-          <a:xfrm>
-            <a:off x="914400" y="3251200"/>
-            <a:ext cx="7315200" cy="3081338"/>
-          </a:xfrm>
-          <a:prstGeom prst="rect">
-            <a:avLst/>
-          </a:prstGeom>
-        </p:spPr>
-        <p:txBody>
-          <a:bodyPr vert="horz" lIns="91440" tIns="45720" rIns="91440" bIns="45720" rtlCol="0" anchor="ctr"/>
-          <a:lstStyle>
-            <a:lvl1pPr algn="l">
-              <a:defRPr sz="1400" b="0" i="0" u="none" strike="noStrike"/>
-            </a:lvl1pPr>
-          </a:lstStyle>
-          <a:p>
-            <a:pPr marL="0" indent="0" algn="l">
-              <a:lnSpc>
-                <a:spcPct val="100000"/>
-              </a:lnSpc>
-            </a:pPr>
-            <a:r>
-              <a:rPr lang="en-US" sz="1400" b="0" i="0" u="none" strike="noStrike">
-                <a:solidFill>
-                  <a:srgbClr val="000000"/>
-                </a:solidFill>
-              </a:rPr>
-              <a:t>This POC validates the core technical feasibility of a third-party IMS Application Server: a sippy-based B2BUA signalling plane, declarative YAML routing engine, multi-format number translation, structured logging, and real-time ops console.</a:t>
-            </a:r>
-            <a:endParaRPr lang="en-US" sz="1400" b="0" i="0" u="none" strike="noStrike">
-              <a:solidFill>
-                <a:srgbClr val="000000"/>
-              </a:solidFill>
-            </a:endParaRPr>
-          </a:p>
-          <a:p>
-            <a:pPr marL="0" indent="0" algn="l">
-              <a:lnSpc>
-                <a:spcPct val="100000"/>
-              </a:lnSpc>
-            </a:pPr>
-            <a:r>
-              <a:rPr lang="en-US" sz="1400" b="0" i="0" u="none" strike="noStrike">
-                <a:solidFill>
-                  <a:srgbClr val="000000"/>
-                </a:solidFill>
-              </a:rPr>
-              <a:t>All M0-M4 milestones are complete, 119 tests pass, and 6 architecture decisions are documented. Current version v0.5.0, Apache-2.0 open source.</a:t>
-            </a:r>
-            <a:endParaRPr lang="en-US" sz="1400" b="0" i="0" u="none" strike="noStrike">
-              <a:solidFill>
-                <a:srgbClr val="000000"/>
-              </a:solidFill>
-            </a:endParaRPr>
-          </a:p>
-          <a:p>
-            <a:pPr marL="0" indent="0" algn="l">
-              <a:lnSpc>
-                <a:spcPct val="100000"/>
-              </a:lnSpc>
-            </a:pPr>
-            <a:r>
-              <a:rPr lang="en-US" sz="1400" b="0" i="0" u="none" strike="noStrike">
-                <a:solidFill>
-                  <a:srgbClr val="000000"/>
-                </a:solidFill>
-              </a:rPr>
-              <a:t>Next step: evolve to production-grade deployment following the registered restriction and TODO roadmap.</a:t>
-            </a:r>
-            <a:endParaRPr lang="en-US" sz="1400" b="0" i="0" u="none" strike="noStrike">
-              <a:solidFill>
-                <a:srgbClr val="000000"/>
-              </a:solidFill>
-            </a:endParaRPr>
-          </a:p>
-        </p:txBody>
-      </p:sp>
-      <p:sp>
-        <p:nvSpPr>
-          <p:cNvPr id="6" name="Footer Placeholder 5"/>
-          <p:cNvSpPr>
-            <a:spLocks noGrp="1"/>
-          </p:cNvSpPr>
-          <p:nvPr>
-            <p:ph type="ftr" sz="quarter" idx="4"/>
-          </p:nvPr>
-        </p:nvSpPr>
-        <p:spPr>
-          <a:xfrm>
-            <a:off x="0" y="6502400"/>
-            <a:ext cx="3962400" cy="341313"/>
-          </a:xfrm>
-          <a:prstGeom prst="rect">
-            <a:avLst/>
-          </a:prstGeom>
-        </p:spPr>
-        <p:txBody>
-          <a:bodyPr vert="horz" lIns="91440" tIns="45720" rIns="91440" bIns="45720" rtlCol="0" anchor="b"/>
-          <a:lstStyle>
-            <a:lvl1pPr algn="l">
-              <a:defRPr sz="1200"/>
-            </a:lvl1pPr>
-          </a:lstStyle>
-          <a:p/>
-        </p:txBody>
-      </p:sp>
-      <p:sp>
-        <p:nvSpPr>
-          <p:cNvPr id="7" name="Slide Number Placeholder 6"/>
-          <p:cNvSpPr>
-            <a:spLocks noGrp="1"/>
-          </p:cNvSpPr>
-          <p:nvPr>
-            <p:ph type="sldNum" sz="quarter" idx="5"/>
-          </p:nvPr>
-        </p:nvSpPr>
-        <p:spPr>
-          <a:xfrm>
-            <a:off x="5180013" y="6502400"/>
-            <a:ext cx="3962400" cy="341313"/>
-          </a:xfrm>
-          <a:prstGeom prst="rect">
-            <a:avLst/>
-          </a:prstGeom>
-        </p:spPr>
-        <p:txBody>
-          <a:bodyPr vert="horz" lIns="91440" tIns="45720" rIns="91440" bIns="45720" rtlCol="0" anchor="b"/>
-          <a:lstStyle>
-            <a:lvl1pPr algn="r">
-              <a:defRPr sz="1200"/>
-            </a:lvl1pPr>
-          </a:lstStyle>
-          <a:p>
-            <a:r>
-              <a:rPr lang="cs-CZ" smtClean="0"/>
-              <a:t>‹#›</a:t>
-            </a:r>
-            <a:endParaRPr lang="cs-CZ" smtClean="0"/>
-          </a:p>
-        </p:txBody>
-      </p:sp>
-    </p:spTree>
-  </p:cSld>
-  <p:clrMapOvr>
-    <a:masterClrMapping/>
-  </p:clrMapOvr>
-</p:notes>
-</file>
-
 <file path=ppt/notesSlides/notesSlide2.xml><?xml version="1.0" encoding="utf-8"?>
 <p:notes xmlns:a="http://schemas.openxmlformats.org/drawingml/2006/main" xmlns:r="http://schemas.openxmlformats.org/officeDocument/2006/relationships" xmlns:p="http://schemas.openxmlformats.org/presentationml/2006/main">
   <p:cSld>
@@ -6721,31 +6447,6 @@
 </file>
 
 <file path=ppt/slideLayouts/slideLayout14.xml><?xml version="1.0" encoding="utf-8"?>
-<p:sldLayout xmlns:a="http://schemas.openxmlformats.org/drawingml/2006/main" xmlns:r="http://schemas.openxmlformats.org/officeDocument/2006/relationships" xmlns:p="http://schemas.openxmlformats.org/presentationml/2006/main" type="title" preserve="1">
-  <p:cSld>
-    <p:spTree>
-      <p:nvGrpSpPr>
-        <p:cNvPr id="1" name=""/>
-        <p:cNvGrpSpPr/>
-        <p:nvPr/>
-      </p:nvGrpSpPr>
-      <p:grpSpPr>
-        <a:xfrm>
-          <a:off x="0" y="0"/>
-          <a:ext cx="0" cy="0"/>
-          <a:chOff x="0" y="0"/>
-          <a:chExt cx="0" cy="0"/>
-        </a:xfrm>
-      </p:grpSpPr>
-    </p:spTree>
-  </p:cSld>
-  <p:clrMapOvr>
-    <a:masterClrMapping/>
-  </p:clrMapOvr>
-</p:sldLayout>
-</file>
-
-<file path=ppt/slideLayouts/slideLayout15.xml><?xml version="1.0" encoding="utf-8"?>
 <p:sldLayout xmlns:a="http://schemas.openxmlformats.org/drawingml/2006/main" xmlns:r="http://schemas.openxmlformats.org/officeDocument/2006/relationships" xmlns:p="http://schemas.openxmlformats.org/presentationml/2006/main" type="title" preserve="1">
   <p:cSld>
     <p:spTree>
@@ -16810,732 +16511,6 @@
 </p:sldMaster>
 </file>
 
-<file path=ppt/slideMasters/slideMaster5.xml><?xml version="1.0" encoding="utf-8"?>
-<p:sldMaster xmlns:a="http://schemas.openxmlformats.org/drawingml/2006/main" xmlns:r="http://schemas.openxmlformats.org/officeDocument/2006/relationships" xmlns:p="http://schemas.openxmlformats.org/presentationml/2006/main">
-  <p:cSld>
-    <p:bg>
-      <p:bgPr>
-        <a:solidFill>
-          <a:srgbClr val="FFFFFF">
-            <a:alpha val="100000"/>
-          </a:srgbClr>
-        </a:solidFill>
-        <a:effectLst/>
-      </p:bgPr>
-    </p:bg>
-    <p:spTree>
-      <p:nvGrpSpPr>
-        <p:cNvPr id="5" name="Shape 5"/>
-        <p:cNvGrpSpPr/>
-        <p:nvPr/>
-      </p:nvGrpSpPr>
-      <p:grpSpPr>
-        <a:xfrm>
-          <a:off x="0" y="0"/>
-          <a:ext cx="0" cy="0"/>
-          <a:chOff x="0" y="0"/>
-          <a:chExt cx="0" cy="0"/>
-        </a:xfrm>
-      </p:grpSpPr>
-    </p:spTree>
-  </p:cSld>
-  <p:clrMap bg1="lt1" tx1="dk1" bg2="dk2" tx2="lt2" accent1="accent1" accent2="accent2" accent3="accent3" accent4="accent4" accent5="accent5" accent6="accent6" hlink="hlink" folHlink="folHlink"/>
-  <p:sldLayoutIdLst>
-    <p:sldLayoutId id="2147483667" r:id="rId1"/>
-  </p:sldLayoutIdLst>
-  <p:hf sldNum="0" hdr="0" ftr="0" dt="0"/>
-  <p:txStyles>
-    <p:titleStyle>
-      <a:defPPr marR="0" lvl="0" algn="l" rtl="0">
-        <a:lnSpc>
-          <a:spcPct val="100000"/>
-        </a:lnSpc>
-        <a:spcBef>
-          <a:spcPts val="0"/>
-        </a:spcBef>
-        <a:spcAft>
-          <a:spcPts val="0"/>
-        </a:spcAft>
-      </a:defPPr>
-      <a:lvl1pPr marR="0" lvl="0" algn="l" rtl="0">
-        <a:lnSpc>
-          <a:spcPct val="100000"/>
-        </a:lnSpc>
-        <a:spcBef>
-          <a:spcPts val="0"/>
-        </a:spcBef>
-        <a:spcAft>
-          <a:spcPts val="0"/>
-        </a:spcAft>
-        <a:buClr>
-          <a:srgbClr val="000000"/>
-        </a:buClr>
-        <a:buFont typeface="Arial" panose="020B0604020202020204"/>
-        <a:defRPr sz="1400" b="0" i="0" u="none" strike="noStrike" cap="none">
-          <a:solidFill>
-            <a:srgbClr val="000000"/>
-          </a:solidFill>
-          <a:latin typeface="Arial" panose="020B0604020202020204"/>
-          <a:ea typeface="Arial" panose="020B0604020202020204"/>
-          <a:cs typeface="Arial" panose="020B0604020202020204"/>
-          <a:sym typeface="Arial" panose="020B0604020202020204"/>
-        </a:defRPr>
-      </a:lvl1pPr>
-      <a:lvl2pPr marR="0" lvl="1" algn="l" rtl="0">
-        <a:lnSpc>
-          <a:spcPct val="100000"/>
-        </a:lnSpc>
-        <a:spcBef>
-          <a:spcPts val="0"/>
-        </a:spcBef>
-        <a:spcAft>
-          <a:spcPts val="0"/>
-        </a:spcAft>
-        <a:buClr>
-          <a:srgbClr val="000000"/>
-        </a:buClr>
-        <a:buFont typeface="Arial" panose="020B0604020202020204"/>
-        <a:defRPr sz="1400" b="0" i="0" u="none" strike="noStrike" cap="none">
-          <a:solidFill>
-            <a:srgbClr val="000000"/>
-          </a:solidFill>
-          <a:latin typeface="Arial" panose="020B0604020202020204"/>
-          <a:ea typeface="Arial" panose="020B0604020202020204"/>
-          <a:cs typeface="Arial" panose="020B0604020202020204"/>
-          <a:sym typeface="Arial" panose="020B0604020202020204"/>
-        </a:defRPr>
-      </a:lvl2pPr>
-      <a:lvl3pPr marR="0" lvl="2" algn="l" rtl="0">
-        <a:lnSpc>
-          <a:spcPct val="100000"/>
-        </a:lnSpc>
-        <a:spcBef>
-          <a:spcPts val="0"/>
-        </a:spcBef>
-        <a:spcAft>
-          <a:spcPts val="0"/>
-        </a:spcAft>
-        <a:buClr>
-          <a:srgbClr val="000000"/>
-        </a:buClr>
-        <a:buFont typeface="Arial" panose="020B0604020202020204"/>
-        <a:defRPr sz="1400" b="0" i="0" u="none" strike="noStrike" cap="none">
-          <a:solidFill>
-            <a:srgbClr val="000000"/>
-          </a:solidFill>
-          <a:latin typeface="Arial" panose="020B0604020202020204"/>
-          <a:ea typeface="Arial" panose="020B0604020202020204"/>
-          <a:cs typeface="Arial" panose="020B0604020202020204"/>
-          <a:sym typeface="Arial" panose="020B0604020202020204"/>
-        </a:defRPr>
-      </a:lvl3pPr>
-      <a:lvl4pPr marR="0" lvl="3" algn="l" rtl="0">
-        <a:lnSpc>
-          <a:spcPct val="100000"/>
-        </a:lnSpc>
-        <a:spcBef>
-          <a:spcPts val="0"/>
-        </a:spcBef>
-        <a:spcAft>
-          <a:spcPts val="0"/>
-        </a:spcAft>
-        <a:buClr>
-          <a:srgbClr val="000000"/>
-        </a:buClr>
-        <a:buFont typeface="Arial" panose="020B0604020202020204"/>
-        <a:defRPr sz="1400" b="0" i="0" u="none" strike="noStrike" cap="none">
-          <a:solidFill>
-            <a:srgbClr val="000000"/>
-          </a:solidFill>
-          <a:latin typeface="Arial" panose="020B0604020202020204"/>
-          <a:ea typeface="Arial" panose="020B0604020202020204"/>
-          <a:cs typeface="Arial" panose="020B0604020202020204"/>
-          <a:sym typeface="Arial" panose="020B0604020202020204"/>
-        </a:defRPr>
-      </a:lvl4pPr>
-      <a:lvl5pPr marR="0" lvl="4" algn="l" rtl="0">
-        <a:lnSpc>
-          <a:spcPct val="100000"/>
-        </a:lnSpc>
-        <a:spcBef>
-          <a:spcPts val="0"/>
-        </a:spcBef>
-        <a:spcAft>
-          <a:spcPts val="0"/>
-        </a:spcAft>
-        <a:buClr>
-          <a:srgbClr val="000000"/>
-        </a:buClr>
-        <a:buFont typeface="Arial" panose="020B0604020202020204"/>
-        <a:defRPr sz="1400" b="0" i="0" u="none" strike="noStrike" cap="none">
-          <a:solidFill>
-            <a:srgbClr val="000000"/>
-          </a:solidFill>
-          <a:latin typeface="Arial" panose="020B0604020202020204"/>
-          <a:ea typeface="Arial" panose="020B0604020202020204"/>
-          <a:cs typeface="Arial" panose="020B0604020202020204"/>
-          <a:sym typeface="Arial" panose="020B0604020202020204"/>
-        </a:defRPr>
-      </a:lvl5pPr>
-      <a:lvl6pPr marR="0" lvl="5" algn="l" rtl="0">
-        <a:lnSpc>
-          <a:spcPct val="100000"/>
-        </a:lnSpc>
-        <a:spcBef>
-          <a:spcPts val="0"/>
-        </a:spcBef>
-        <a:spcAft>
-          <a:spcPts val="0"/>
-        </a:spcAft>
-        <a:buClr>
-          <a:srgbClr val="000000"/>
-        </a:buClr>
-        <a:buFont typeface="Arial" panose="020B0604020202020204"/>
-        <a:defRPr sz="1400" b="0" i="0" u="none" strike="noStrike" cap="none">
-          <a:solidFill>
-            <a:srgbClr val="000000"/>
-          </a:solidFill>
-          <a:latin typeface="Arial" panose="020B0604020202020204"/>
-          <a:ea typeface="Arial" panose="020B0604020202020204"/>
-          <a:cs typeface="Arial" panose="020B0604020202020204"/>
-          <a:sym typeface="Arial" panose="020B0604020202020204"/>
-        </a:defRPr>
-      </a:lvl6pPr>
-      <a:lvl7pPr marR="0" lvl="6" algn="l" rtl="0">
-        <a:lnSpc>
-          <a:spcPct val="100000"/>
-        </a:lnSpc>
-        <a:spcBef>
-          <a:spcPts val="0"/>
-        </a:spcBef>
-        <a:spcAft>
-          <a:spcPts val="0"/>
-        </a:spcAft>
-        <a:buClr>
-          <a:srgbClr val="000000"/>
-        </a:buClr>
-        <a:buFont typeface="Arial" panose="020B0604020202020204"/>
-        <a:defRPr sz="1400" b="0" i="0" u="none" strike="noStrike" cap="none">
-          <a:solidFill>
-            <a:srgbClr val="000000"/>
-          </a:solidFill>
-          <a:latin typeface="Arial" panose="020B0604020202020204"/>
-          <a:ea typeface="Arial" panose="020B0604020202020204"/>
-          <a:cs typeface="Arial" panose="020B0604020202020204"/>
-          <a:sym typeface="Arial" panose="020B0604020202020204"/>
-        </a:defRPr>
-      </a:lvl7pPr>
-      <a:lvl8pPr marR="0" lvl="7" algn="l" rtl="0">
-        <a:lnSpc>
-          <a:spcPct val="100000"/>
-        </a:lnSpc>
-        <a:spcBef>
-          <a:spcPts val="0"/>
-        </a:spcBef>
-        <a:spcAft>
-          <a:spcPts val="0"/>
-        </a:spcAft>
-        <a:buClr>
-          <a:srgbClr val="000000"/>
-        </a:buClr>
-        <a:buFont typeface="Arial" panose="020B0604020202020204"/>
-        <a:defRPr sz="1400" b="0" i="0" u="none" strike="noStrike" cap="none">
-          <a:solidFill>
-            <a:srgbClr val="000000"/>
-          </a:solidFill>
-          <a:latin typeface="Arial" panose="020B0604020202020204"/>
-          <a:ea typeface="Arial" panose="020B0604020202020204"/>
-          <a:cs typeface="Arial" panose="020B0604020202020204"/>
-          <a:sym typeface="Arial" panose="020B0604020202020204"/>
-        </a:defRPr>
-      </a:lvl8pPr>
-      <a:lvl9pPr marR="0" lvl="8" algn="l" rtl="0">
-        <a:lnSpc>
-          <a:spcPct val="100000"/>
-        </a:lnSpc>
-        <a:spcBef>
-          <a:spcPts val="0"/>
-        </a:spcBef>
-        <a:spcAft>
-          <a:spcPts val="0"/>
-        </a:spcAft>
-        <a:buClr>
-          <a:srgbClr val="000000"/>
-        </a:buClr>
-        <a:buFont typeface="Arial" panose="020B0604020202020204"/>
-        <a:defRPr sz="1400" b="0" i="0" u="none" strike="noStrike" cap="none">
-          <a:solidFill>
-            <a:srgbClr val="000000"/>
-          </a:solidFill>
-          <a:latin typeface="Arial" panose="020B0604020202020204"/>
-          <a:ea typeface="Arial" panose="020B0604020202020204"/>
-          <a:cs typeface="Arial" panose="020B0604020202020204"/>
-          <a:sym typeface="Arial" panose="020B0604020202020204"/>
-        </a:defRPr>
-      </a:lvl9pPr>
-    </p:titleStyle>
-    <p:bodyStyle>
-      <a:defPPr marR="0" lvl="0" algn="l" rtl="0">
-        <a:lnSpc>
-          <a:spcPct val="100000"/>
-        </a:lnSpc>
-        <a:spcBef>
-          <a:spcPts val="0"/>
-        </a:spcBef>
-        <a:spcAft>
-          <a:spcPts val="0"/>
-        </a:spcAft>
-      </a:defPPr>
-      <a:lvl1pPr marR="0" lvl="0" algn="l" rtl="0">
-        <a:lnSpc>
-          <a:spcPct val="100000"/>
-        </a:lnSpc>
-        <a:spcBef>
-          <a:spcPts val="0"/>
-        </a:spcBef>
-        <a:spcAft>
-          <a:spcPts val="0"/>
-        </a:spcAft>
-        <a:buClr>
-          <a:srgbClr val="000000"/>
-        </a:buClr>
-        <a:buFont typeface="Arial" panose="020B0604020202020204"/>
-        <a:defRPr sz="1400" b="0" i="0" u="none" strike="noStrike" cap="none">
-          <a:solidFill>
-            <a:srgbClr val="000000"/>
-          </a:solidFill>
-          <a:latin typeface="Arial" panose="020B0604020202020204"/>
-          <a:ea typeface="Arial" panose="020B0604020202020204"/>
-          <a:cs typeface="Arial" panose="020B0604020202020204"/>
-          <a:sym typeface="Arial" panose="020B0604020202020204"/>
-        </a:defRPr>
-      </a:lvl1pPr>
-      <a:lvl2pPr marR="0" lvl="1" algn="l" rtl="0">
-        <a:lnSpc>
-          <a:spcPct val="100000"/>
-        </a:lnSpc>
-        <a:spcBef>
-          <a:spcPts val="0"/>
-        </a:spcBef>
-        <a:spcAft>
-          <a:spcPts val="0"/>
-        </a:spcAft>
-        <a:buClr>
-          <a:srgbClr val="000000"/>
-        </a:buClr>
-        <a:buFont typeface="Arial" panose="020B0604020202020204"/>
-        <a:defRPr sz="1400" b="0" i="0" u="none" strike="noStrike" cap="none">
-          <a:solidFill>
-            <a:srgbClr val="000000"/>
-          </a:solidFill>
-          <a:latin typeface="Arial" panose="020B0604020202020204"/>
-          <a:ea typeface="Arial" panose="020B0604020202020204"/>
-          <a:cs typeface="Arial" panose="020B0604020202020204"/>
-          <a:sym typeface="Arial" panose="020B0604020202020204"/>
-        </a:defRPr>
-      </a:lvl2pPr>
-      <a:lvl3pPr marR="0" lvl="2" algn="l" rtl="0">
-        <a:lnSpc>
-          <a:spcPct val="100000"/>
-        </a:lnSpc>
-        <a:spcBef>
-          <a:spcPts val="0"/>
-        </a:spcBef>
-        <a:spcAft>
-          <a:spcPts val="0"/>
-        </a:spcAft>
-        <a:buClr>
-          <a:srgbClr val="000000"/>
-        </a:buClr>
-        <a:buFont typeface="Arial" panose="020B0604020202020204"/>
-        <a:defRPr sz="1400" b="0" i="0" u="none" strike="noStrike" cap="none">
-          <a:solidFill>
-            <a:srgbClr val="000000"/>
-          </a:solidFill>
-          <a:latin typeface="Arial" panose="020B0604020202020204"/>
-          <a:ea typeface="Arial" panose="020B0604020202020204"/>
-          <a:cs typeface="Arial" panose="020B0604020202020204"/>
-          <a:sym typeface="Arial" panose="020B0604020202020204"/>
-        </a:defRPr>
-      </a:lvl3pPr>
-      <a:lvl4pPr marR="0" lvl="3" algn="l" rtl="0">
-        <a:lnSpc>
-          <a:spcPct val="100000"/>
-        </a:lnSpc>
-        <a:spcBef>
-          <a:spcPts val="0"/>
-        </a:spcBef>
-        <a:spcAft>
-          <a:spcPts val="0"/>
-        </a:spcAft>
-        <a:buClr>
-          <a:srgbClr val="000000"/>
-        </a:buClr>
-        <a:buFont typeface="Arial" panose="020B0604020202020204"/>
-        <a:defRPr sz="1400" b="0" i="0" u="none" strike="noStrike" cap="none">
-          <a:solidFill>
-            <a:srgbClr val="000000"/>
-          </a:solidFill>
-          <a:latin typeface="Arial" panose="020B0604020202020204"/>
-          <a:ea typeface="Arial" panose="020B0604020202020204"/>
-          <a:cs typeface="Arial" panose="020B0604020202020204"/>
-          <a:sym typeface="Arial" panose="020B0604020202020204"/>
-        </a:defRPr>
-      </a:lvl4pPr>
-      <a:lvl5pPr marR="0" lvl="4" algn="l" rtl="0">
-        <a:lnSpc>
-          <a:spcPct val="100000"/>
-        </a:lnSpc>
-        <a:spcBef>
-          <a:spcPts val="0"/>
-        </a:spcBef>
-        <a:spcAft>
-          <a:spcPts val="0"/>
-        </a:spcAft>
-        <a:buClr>
-          <a:srgbClr val="000000"/>
-        </a:buClr>
-        <a:buFont typeface="Arial" panose="020B0604020202020204"/>
-        <a:defRPr sz="1400" b="0" i="0" u="none" strike="noStrike" cap="none">
-          <a:solidFill>
-            <a:srgbClr val="000000"/>
-          </a:solidFill>
-          <a:latin typeface="Arial" panose="020B0604020202020204"/>
-          <a:ea typeface="Arial" panose="020B0604020202020204"/>
-          <a:cs typeface="Arial" panose="020B0604020202020204"/>
-          <a:sym typeface="Arial" panose="020B0604020202020204"/>
-        </a:defRPr>
-      </a:lvl5pPr>
-      <a:lvl6pPr marR="0" lvl="5" algn="l" rtl="0">
-        <a:lnSpc>
-          <a:spcPct val="100000"/>
-        </a:lnSpc>
-        <a:spcBef>
-          <a:spcPts val="0"/>
-        </a:spcBef>
-        <a:spcAft>
-          <a:spcPts val="0"/>
-        </a:spcAft>
-        <a:buClr>
-          <a:srgbClr val="000000"/>
-        </a:buClr>
-        <a:buFont typeface="Arial" panose="020B0604020202020204"/>
-        <a:defRPr sz="1400" b="0" i="0" u="none" strike="noStrike" cap="none">
-          <a:solidFill>
-            <a:srgbClr val="000000"/>
-          </a:solidFill>
-          <a:latin typeface="Arial" panose="020B0604020202020204"/>
-          <a:ea typeface="Arial" panose="020B0604020202020204"/>
-          <a:cs typeface="Arial" panose="020B0604020202020204"/>
-          <a:sym typeface="Arial" panose="020B0604020202020204"/>
-        </a:defRPr>
-      </a:lvl6pPr>
-      <a:lvl7pPr marR="0" lvl="6" algn="l" rtl="0">
-        <a:lnSpc>
-          <a:spcPct val="100000"/>
-        </a:lnSpc>
-        <a:spcBef>
-          <a:spcPts val="0"/>
-        </a:spcBef>
-        <a:spcAft>
-          <a:spcPts val="0"/>
-        </a:spcAft>
-        <a:buClr>
-          <a:srgbClr val="000000"/>
-        </a:buClr>
-        <a:buFont typeface="Arial" panose="020B0604020202020204"/>
-        <a:defRPr sz="1400" b="0" i="0" u="none" strike="noStrike" cap="none">
-          <a:solidFill>
-            <a:srgbClr val="000000"/>
-          </a:solidFill>
-          <a:latin typeface="Arial" panose="020B0604020202020204"/>
-          <a:ea typeface="Arial" panose="020B0604020202020204"/>
-          <a:cs typeface="Arial" panose="020B0604020202020204"/>
-          <a:sym typeface="Arial" panose="020B0604020202020204"/>
-        </a:defRPr>
-      </a:lvl7pPr>
-      <a:lvl8pPr marR="0" lvl="7" algn="l" rtl="0">
-        <a:lnSpc>
-          <a:spcPct val="100000"/>
-        </a:lnSpc>
-        <a:spcBef>
-          <a:spcPts val="0"/>
-        </a:spcBef>
-        <a:spcAft>
-          <a:spcPts val="0"/>
-        </a:spcAft>
-        <a:buClr>
-          <a:srgbClr val="000000"/>
-        </a:buClr>
-        <a:buFont typeface="Arial" panose="020B0604020202020204"/>
-        <a:defRPr sz="1400" b="0" i="0" u="none" strike="noStrike" cap="none">
-          <a:solidFill>
-            <a:srgbClr val="000000"/>
-          </a:solidFill>
-          <a:latin typeface="Arial" panose="020B0604020202020204"/>
-          <a:ea typeface="Arial" panose="020B0604020202020204"/>
-          <a:cs typeface="Arial" panose="020B0604020202020204"/>
-          <a:sym typeface="Arial" panose="020B0604020202020204"/>
-        </a:defRPr>
-      </a:lvl8pPr>
-      <a:lvl9pPr marR="0" lvl="8" algn="l" rtl="0">
-        <a:lnSpc>
-          <a:spcPct val="100000"/>
-        </a:lnSpc>
-        <a:spcBef>
-          <a:spcPts val="0"/>
-        </a:spcBef>
-        <a:spcAft>
-          <a:spcPts val="0"/>
-        </a:spcAft>
-        <a:buClr>
-          <a:srgbClr val="000000"/>
-        </a:buClr>
-        <a:buFont typeface="Arial" panose="020B0604020202020204"/>
-        <a:defRPr sz="1400" b="0" i="0" u="none" strike="noStrike" cap="none">
-          <a:solidFill>
-            <a:srgbClr val="000000"/>
-          </a:solidFill>
-          <a:latin typeface="Arial" panose="020B0604020202020204"/>
-          <a:ea typeface="Arial" panose="020B0604020202020204"/>
-          <a:cs typeface="Arial" panose="020B0604020202020204"/>
-          <a:sym typeface="Arial" panose="020B0604020202020204"/>
-        </a:defRPr>
-      </a:lvl9pPr>
-    </p:bodyStyle>
-    <p:otherStyle>
-      <a:defPPr marR="0" lvl="0" algn="l" rtl="0">
-        <a:lnSpc>
-          <a:spcPct val="100000"/>
-        </a:lnSpc>
-        <a:spcBef>
-          <a:spcPts val="0"/>
-        </a:spcBef>
-        <a:spcAft>
-          <a:spcPts val="0"/>
-        </a:spcAft>
-      </a:defPPr>
-      <a:lvl1pPr marR="0" lvl="0" algn="l" rtl="0">
-        <a:lnSpc>
-          <a:spcPct val="100000"/>
-        </a:lnSpc>
-        <a:spcBef>
-          <a:spcPts val="0"/>
-        </a:spcBef>
-        <a:spcAft>
-          <a:spcPts val="0"/>
-        </a:spcAft>
-        <a:buClr>
-          <a:srgbClr val="000000"/>
-        </a:buClr>
-        <a:buFont typeface="Arial" panose="020B0604020202020204"/>
-        <a:defRPr sz="1400" b="0" i="0" u="none" strike="noStrike" cap="none">
-          <a:solidFill>
-            <a:srgbClr val="000000"/>
-          </a:solidFill>
-          <a:latin typeface="Arial" panose="020B0604020202020204"/>
-          <a:ea typeface="Arial" panose="020B0604020202020204"/>
-          <a:cs typeface="Arial" panose="020B0604020202020204"/>
-          <a:sym typeface="Arial" panose="020B0604020202020204"/>
-        </a:defRPr>
-      </a:lvl1pPr>
-      <a:lvl2pPr marR="0" lvl="1" algn="l" rtl="0">
-        <a:lnSpc>
-          <a:spcPct val="100000"/>
-        </a:lnSpc>
-        <a:spcBef>
-          <a:spcPts val="0"/>
-        </a:spcBef>
-        <a:spcAft>
-          <a:spcPts val="0"/>
-        </a:spcAft>
-        <a:buClr>
-          <a:srgbClr val="000000"/>
-        </a:buClr>
-        <a:buFont typeface="Arial" panose="020B0604020202020204"/>
-        <a:defRPr sz="1400" b="0" i="0" u="none" strike="noStrike" cap="none">
-          <a:solidFill>
-            <a:srgbClr val="000000"/>
-          </a:solidFill>
-          <a:latin typeface="Arial" panose="020B0604020202020204"/>
-          <a:ea typeface="Arial" panose="020B0604020202020204"/>
-          <a:cs typeface="Arial" panose="020B0604020202020204"/>
-          <a:sym typeface="Arial" panose="020B0604020202020204"/>
-        </a:defRPr>
-      </a:lvl2pPr>
-      <a:lvl3pPr marR="0" lvl="2" algn="l" rtl="0">
-        <a:lnSpc>
-          <a:spcPct val="100000"/>
-        </a:lnSpc>
-        <a:spcBef>
-          <a:spcPts val="0"/>
-        </a:spcBef>
-        <a:spcAft>
-          <a:spcPts val="0"/>
-        </a:spcAft>
-        <a:buClr>
-          <a:srgbClr val="000000"/>
-        </a:buClr>
-        <a:buFont typeface="Arial" panose="020B0604020202020204"/>
-        <a:defRPr sz="1400" b="0" i="0" u="none" strike="noStrike" cap="none">
-          <a:solidFill>
-            <a:srgbClr val="000000"/>
-          </a:solidFill>
-          <a:latin typeface="Arial" panose="020B0604020202020204"/>
-          <a:ea typeface="Arial" panose="020B0604020202020204"/>
-          <a:cs typeface="Arial" panose="020B0604020202020204"/>
-          <a:sym typeface="Arial" panose="020B0604020202020204"/>
-        </a:defRPr>
-      </a:lvl3pPr>
-      <a:lvl4pPr marR="0" lvl="3" algn="l" rtl="0">
-        <a:lnSpc>
-          <a:spcPct val="100000"/>
-        </a:lnSpc>
-        <a:spcBef>
-          <a:spcPts val="0"/>
-        </a:spcBef>
-        <a:spcAft>
-          <a:spcPts val="0"/>
-        </a:spcAft>
-        <a:buClr>
-          <a:srgbClr val="000000"/>
-        </a:buClr>
-        <a:buFont typeface="Arial" panose="020B0604020202020204"/>
-        <a:defRPr sz="1400" b="0" i="0" u="none" strike="noStrike" cap="none">
-          <a:solidFill>
-            <a:srgbClr val="000000"/>
-          </a:solidFill>
-          <a:latin typeface="Arial" panose="020B0604020202020204"/>
-          <a:ea typeface="Arial" panose="020B0604020202020204"/>
-          <a:cs typeface="Arial" panose="020B0604020202020204"/>
-          <a:sym typeface="Arial" panose="020B0604020202020204"/>
-        </a:defRPr>
-      </a:lvl4pPr>
-      <a:lvl5pPr marR="0" lvl="4" algn="l" rtl="0">
-        <a:lnSpc>
-          <a:spcPct val="100000"/>
-        </a:lnSpc>
-        <a:spcBef>
-          <a:spcPts val="0"/>
-        </a:spcBef>
-        <a:spcAft>
-          <a:spcPts val="0"/>
-        </a:spcAft>
-        <a:buClr>
-          <a:srgbClr val="000000"/>
-        </a:buClr>
-        <a:buFont typeface="Arial" panose="020B0604020202020204"/>
-        <a:defRPr sz="1400" b="0" i="0" u="none" strike="noStrike" cap="none">
-          <a:solidFill>
-            <a:srgbClr val="000000"/>
-          </a:solidFill>
-          <a:latin typeface="Arial" panose="020B0604020202020204"/>
-          <a:ea typeface="Arial" panose="020B0604020202020204"/>
-          <a:cs typeface="Arial" panose="020B0604020202020204"/>
-          <a:sym typeface="Arial" panose="020B0604020202020204"/>
-        </a:defRPr>
-      </a:lvl5pPr>
-      <a:lvl6pPr marR="0" lvl="5" algn="l" rtl="0">
-        <a:lnSpc>
-          <a:spcPct val="100000"/>
-        </a:lnSpc>
-        <a:spcBef>
-          <a:spcPts val="0"/>
-        </a:spcBef>
-        <a:spcAft>
-          <a:spcPts val="0"/>
-        </a:spcAft>
-        <a:buClr>
-          <a:srgbClr val="000000"/>
-        </a:buClr>
-        <a:buFont typeface="Arial" panose="020B0604020202020204"/>
-        <a:defRPr sz="1400" b="0" i="0" u="none" strike="noStrike" cap="none">
-          <a:solidFill>
-            <a:srgbClr val="000000"/>
-          </a:solidFill>
-          <a:latin typeface="Arial" panose="020B0604020202020204"/>
-          <a:ea typeface="Arial" panose="020B0604020202020204"/>
-          <a:cs typeface="Arial" panose="020B0604020202020204"/>
-          <a:sym typeface="Arial" panose="020B0604020202020204"/>
-        </a:defRPr>
-      </a:lvl6pPr>
-      <a:lvl7pPr marR="0" lvl="6" algn="l" rtl="0">
-        <a:lnSpc>
-          <a:spcPct val="100000"/>
-        </a:lnSpc>
-        <a:spcBef>
-          <a:spcPts val="0"/>
-        </a:spcBef>
-        <a:spcAft>
-          <a:spcPts val="0"/>
-        </a:spcAft>
-        <a:buClr>
-          <a:srgbClr val="000000"/>
-        </a:buClr>
-        <a:buFont typeface="Arial" panose="020B0604020202020204"/>
-        <a:defRPr sz="1400" b="0" i="0" u="none" strike="noStrike" cap="none">
-          <a:solidFill>
-            <a:srgbClr val="000000"/>
-          </a:solidFill>
-          <a:latin typeface="Arial" panose="020B0604020202020204"/>
-          <a:ea typeface="Arial" panose="020B0604020202020204"/>
-          <a:cs typeface="Arial" panose="020B0604020202020204"/>
-          <a:sym typeface="Arial" panose="020B0604020202020204"/>
-        </a:defRPr>
-      </a:lvl7pPr>
-      <a:lvl8pPr marR="0" lvl="7" algn="l" rtl="0">
-        <a:lnSpc>
-          <a:spcPct val="100000"/>
-        </a:lnSpc>
-        <a:spcBef>
-          <a:spcPts val="0"/>
-        </a:spcBef>
-        <a:spcAft>
-          <a:spcPts val="0"/>
-        </a:spcAft>
-        <a:buClr>
-          <a:srgbClr val="000000"/>
-        </a:buClr>
-        <a:buFont typeface="Arial" panose="020B0604020202020204"/>
-        <a:defRPr sz="1400" b="0" i="0" u="none" strike="noStrike" cap="none">
-          <a:solidFill>
-            <a:srgbClr val="000000"/>
-          </a:solidFill>
-          <a:latin typeface="Arial" panose="020B0604020202020204"/>
-          <a:ea typeface="Arial" panose="020B0604020202020204"/>
-          <a:cs typeface="Arial" panose="020B0604020202020204"/>
-          <a:sym typeface="Arial" panose="020B0604020202020204"/>
-        </a:defRPr>
-      </a:lvl8pPr>
-      <a:lvl9pPr marR="0" lvl="8" algn="l" rtl="0">
-        <a:lnSpc>
-          <a:spcPct val="100000"/>
-        </a:lnSpc>
-        <a:spcBef>
-          <a:spcPts val="0"/>
-        </a:spcBef>
-        <a:spcAft>
-          <a:spcPts val="0"/>
-        </a:spcAft>
-        <a:buClr>
-          <a:srgbClr val="000000"/>
-        </a:buClr>
-        <a:buFont typeface="Arial" panose="020B0604020202020204"/>
-        <a:defRPr sz="1400" b="0" i="0" u="none" strike="noStrike" cap="none">
-          <a:solidFill>
-            <a:srgbClr val="000000"/>
-          </a:solidFill>
-          <a:latin typeface="Arial" panose="020B0604020202020204"/>
-          <a:ea typeface="Arial" panose="020B0604020202020204"/>
-          <a:cs typeface="Arial" panose="020B0604020202020204"/>
-          <a:sym typeface="Arial" panose="020B0604020202020204"/>
-        </a:defRPr>
-      </a:lvl9pPr>
-    </p:otherStyle>
-  </p:txStyles>
-</p:sldMaster>
-</file>
-
 <file path=ppt/slides/slide1.xml><?xml version="1.0" encoding="utf-8"?>
 <p:sld xmlns:a="http://schemas.openxmlformats.org/drawingml/2006/main" xmlns:r="http://schemas.openxmlformats.org/officeDocument/2006/relationships" xmlns:p="http://schemas.openxmlformats.org/presentationml/2006/main">
   <p:cSld>
@@ -21335,122 +20310,6 @@
 </file>
 
 <file path=ppt/slides/slide14.xml><?xml version="1.0" encoding="utf-8"?>
-<p:sld xmlns:a="http://schemas.openxmlformats.org/drawingml/2006/main" xmlns:r="http://schemas.openxmlformats.org/officeDocument/2006/relationships" xmlns:p="http://schemas.openxmlformats.org/presentationml/2006/main">
-  <p:cSld>
-    <p:bg>
-      <p:bgPr>
-        <a:gradFill rotWithShape="1">
-          <a:gsLst>
-            <a:gs pos="0">
-              <a:srgbClr val="0D1326">
-                <a:alpha val="100000"/>
-              </a:srgbClr>
-            </a:gs>
-            <a:gs pos="100000">
-              <a:srgbClr val="2563EB">
-                <a:alpha val="100000"/>
-              </a:srgbClr>
-            </a:gs>
-          </a:gsLst>
-          <a:lin ang="2700000"/>
-        </a:gradFill>
-        <a:effectLst/>
-      </p:bgPr>
-    </p:bg>
-    <p:spTree>
-      <p:nvGrpSpPr>
-        <p:cNvPr id="1" name=""/>
-        <p:cNvGrpSpPr/>
-        <p:nvPr/>
-      </p:nvGrpSpPr>
-      <p:grpSpPr>
-        <a:xfrm>
-          <a:off x="0" y="0"/>
-          <a:ext cx="0" cy="0"/>
-          <a:chOff x="0" y="0"/>
-          <a:chExt cx="0" cy="0"/>
-        </a:xfrm>
-      </p:grpSpPr>
-      <p:sp>
-        <p:nvSpPr>
-          <p:cNvPr id="2" name="AutoShape 2"/>
-          <p:cNvSpPr/>
-          <p:nvPr/>
-        </p:nvSpPr>
-        <p:spPr>
-          <a:xfrm>
-            <a:off x="838200" y="466725"/>
-            <a:ext cx="10160000" cy="381000"/>
-          </a:xfrm>
-          <a:prstGeom prst="rect">
-            <a:avLst/>
-          </a:prstGeom>
-          <a:noFill/>
-          <a:ln w="12700" cap="flat" cmpd="sng">
-            <a:noFill/>
-            <a:prstDash val="solid"/>
-            <a:round/>
-          </a:ln>
-        </p:spPr>
-        <p:txBody>
-          <a:bodyPr vert="horz" wrap="square" lIns="0" tIns="0" rIns="0" bIns="0" rtlCol="0" anchor="ctr" anchorCtr="0"/>
-          <a:lstStyle/>
-          <a:p>
-            <a:pPr marL="0" indent="0" algn="l">
-              <a:lnSpc>
-                <a:spcPct val="125000"/>
-              </a:lnSpc>
-              <a:defRPr/>
-            </a:pPr>
-            <a:r>
-              <a:rPr lang="en-US" sz="1400" b="0" i="0" u="none" strike="noStrike">
-                <a:solidFill>
-                  <a:srgbClr val="BFD7FF"/>
-                </a:solidFill>
-                <a:latin typeface="Inter"/>
-                <a:ea typeface="Inter"/>
-                <a:cs typeface="Inter"/>
-                <a:sym typeface="Inter"/>
-              </a:rPr>
-              <a:t>Demo cont - Rules</a:t>
-            </a:r>
-            <a:endParaRPr lang="en-US" sz="1100"/>
-          </a:p>
-        </p:txBody>
-      </p:sp>
-      <p:pic>
-        <p:nvPicPr>
-          <p:cNvPr id="4" name="图片 3"/>
-          <p:cNvPicPr>
-            <a:picLocks noChangeAspect="1"/>
-          </p:cNvPicPr>
-          <p:nvPr/>
-        </p:nvPicPr>
-        <p:blipFill>
-          <a:blip r:embed="rId1"/>
-          <a:stretch>
-            <a:fillRect/>
-          </a:stretch>
-        </p:blipFill>
-        <p:spPr>
-          <a:xfrm>
-            <a:off x="792480" y="891540"/>
-            <a:ext cx="8856980" cy="5762625"/>
-          </a:xfrm>
-          <a:prstGeom prst="rect">
-            <a:avLst/>
-          </a:prstGeom>
-        </p:spPr>
-      </p:pic>
-    </p:spTree>
-  </p:cSld>
-  <p:clrMapOvr>
-    <a:masterClrMapping/>
-  </p:clrMapOvr>
-</p:sld>
-</file>
-
-<file path=ppt/slides/slide15.xml><?xml version="1.0" encoding="utf-8"?>
 <p:sld xmlns:a="http://schemas.openxmlformats.org/drawingml/2006/main" xmlns:r="http://schemas.openxmlformats.org/officeDocument/2006/relationships" xmlns:p="http://schemas.openxmlformats.org/presentationml/2006/main">
   <p:cSld>
     <p:bg>
@@ -32166,290 +31025,6 @@
 </file>
 
 <file path=ppt/theme/theme5.xml><?xml version="1.0" encoding="utf-8"?>
-<a:theme xmlns:a="http://schemas.openxmlformats.org/drawingml/2006/main" name="2_默认主题">
-  <a:themeElements>
-    <a:clrScheme name="Office">
-      <a:dk1>
-        <a:srgbClr val="000000"/>
-      </a:dk1>
-      <a:lt1>
-        <a:srgbClr val="FFFFFF"/>
-      </a:lt1>
-      <a:dk2>
-        <a:srgbClr val="44546A"/>
-      </a:dk2>
-      <a:lt2>
-        <a:srgbClr val="E7E6E6"/>
-      </a:lt2>
-      <a:accent1>
-        <a:srgbClr val="4472C4"/>
-      </a:accent1>
-      <a:accent2>
-        <a:srgbClr val="ED7D31"/>
-      </a:accent2>
-      <a:accent3>
-        <a:srgbClr val="A5A5A5"/>
-      </a:accent3>
-      <a:accent4>
-        <a:srgbClr val="FFC000"/>
-      </a:accent4>
-      <a:accent5>
-        <a:srgbClr val="5B9BD5"/>
-      </a:accent5>
-      <a:accent6>
-        <a:srgbClr val="70AD47"/>
-      </a:accent6>
-      <a:hlink>
-        <a:srgbClr val="0563C1"/>
-      </a:hlink>
-      <a:folHlink>
-        <a:srgbClr val="954F72"/>
-      </a:folHlink>
-    </a:clrScheme>
-    <a:fontScheme name="Office">
-      <a:majorFont>
-        <a:latin typeface="Arial"/>
-        <a:ea typeface=""/>
-        <a:cs typeface=""/>
-        <a:font script="Jpan" typeface="ＭＳ Ｐゴシック"/>
-        <a:font script="Hang" typeface="맑은 고딕"/>
-        <a:font script="Hans" typeface="宋体"/>
-        <a:font script="Hant" typeface="新細明體"/>
-        <a:font script="Arab" typeface="Times New Roman"/>
-        <a:font script="Hebr" typeface="Times New Roman"/>
-        <a:font script="Thai" typeface="Angsana New"/>
-        <a:font script="Ethi" typeface="Nyala"/>
-        <a:font script="Beng" typeface="Vrinda"/>
-        <a:font script="Gujr" typeface="Shruti"/>
-        <a:font script="Khmr" typeface="MoolBoran"/>
-        <a:font script="Knda" typeface="Tunga"/>
-        <a:font script="Guru" typeface="Raavi"/>
-        <a:font script="Cans" typeface="Euphemia"/>
-        <a:font script="Cher" typeface="Plantagenet Cherokee"/>
-        <a:font script="Yiii" typeface="Microsoft Yi Baiti"/>
-        <a:font script="Tibt" typeface="Microsoft Himalaya"/>
-        <a:font script="Thaa" typeface="MV Boli"/>
-        <a:font script="Deva" typeface="Mangal"/>
-        <a:font script="Telu" typeface="Gautami"/>
-        <a:font script="Taml" typeface="Latha"/>
-        <a:font script="Syrc" typeface="Estrangelo Edessa"/>
-        <a:font script="Orya" typeface="Kalinga"/>
-        <a:font script="Mlym" typeface="Kartika"/>
-        <a:font script="Laoo" typeface="DokChampa"/>
-        <a:font script="Sinh" typeface="Iskoola Pota"/>
-        <a:font script="Mong" typeface="Mongolian Baiti"/>
-        <a:font script="Viet" typeface="Times New Roman"/>
-        <a:font script="Uigh" typeface="Microsoft Uighur"/>
-        <a:font script="Geor" typeface="Sylfaen"/>
-      </a:majorFont>
-      <a:minorFont>
-        <a:latin typeface="Arial"/>
-        <a:ea typeface=""/>
-        <a:cs typeface=""/>
-        <a:font script="Jpan" typeface="ＭＳ Ｐゴシック"/>
-        <a:font script="Hang" typeface="맑은 고딕"/>
-        <a:font script="Hans" typeface="宋体"/>
-        <a:font script="Hant" typeface="新細明體"/>
-        <a:font script="Arab" typeface="Arial"/>
-        <a:font script="Hebr" typeface="Arial"/>
-        <a:font script="Thai" typeface="Cordia New"/>
-        <a:font script="Ethi" typeface="Nyala"/>
-        <a:font script="Beng" typeface="Vrinda"/>
-        <a:font script="Gujr" typeface="Shruti"/>
-        <a:font script="Khmr" typeface="DaunPenh"/>
-        <a:font script="Knda" typeface="Tunga"/>
-        <a:font script="Guru" typeface="Raavi"/>
-        <a:font script="Cans" typeface="Euphemia"/>
-        <a:font script="Cher" typeface="Plantagenet Cherokee"/>
-        <a:font script="Yiii" typeface="Microsoft Yi Baiti"/>
-        <a:font script="Tibt" typeface="Microsoft Himalaya"/>
-        <a:font script="Thaa" typeface="MV Boli"/>
-        <a:font script="Deva" typeface="Mangal"/>
-        <a:font script="Telu" typeface="Gautami"/>
-        <a:font script="Taml" typeface="Latha"/>
-        <a:font script="Syrc" typeface="Estrangelo Edessa"/>
-        <a:font script="Orya" typeface="Kalinga"/>
-        <a:font script="Mlym" typeface="Kartika"/>
-        <a:font script="Laoo" typeface="DokChampa"/>
-        <a:font script="Sinh" typeface="Iskoola Pota"/>
-        <a:font script="Mong" typeface="Mongolian Baiti"/>
-        <a:font script="Viet" typeface="Arial"/>
-        <a:font script="Uigh" typeface="Microsoft Uighur"/>
-        <a:font script="Geor" typeface="Sylfaen"/>
-      </a:minorFont>
-    </a:fontScheme>
-    <a:fmtScheme name="Office">
-      <a:fillStyleLst>
-        <a:solidFill>
-          <a:schemeClr val="phClr"/>
-        </a:solidFill>
-        <a:gradFill rotWithShape="1">
-          <a:gsLst>
-            <a:gs pos="0">
-              <a:schemeClr val="phClr">
-                <a:tint val="50000"/>
-                <a:satMod val="300000"/>
-              </a:schemeClr>
-            </a:gs>
-            <a:gs pos="35000">
-              <a:schemeClr val="phClr">
-                <a:tint val="37000"/>
-                <a:satMod val="300000"/>
-              </a:schemeClr>
-            </a:gs>
-            <a:gs pos="100000">
-              <a:schemeClr val="phClr">
-                <a:tint val="15000"/>
-                <a:satMod val="350000"/>
-              </a:schemeClr>
-            </a:gs>
-          </a:gsLst>
-          <a:lin ang="16200000" scaled="1"/>
-        </a:gradFill>
-        <a:gradFill rotWithShape="1">
-          <a:gsLst>
-            <a:gs pos="0">
-              <a:schemeClr val="phClr">
-                <a:tint val="100000"/>
-                <a:shade val="100000"/>
-                <a:satMod val="130000"/>
-              </a:schemeClr>
-            </a:gs>
-            <a:gs pos="100000">
-              <a:schemeClr val="phClr">
-                <a:tint val="50000"/>
-                <a:shade val="100000"/>
-                <a:satMod val="350000"/>
-              </a:schemeClr>
-            </a:gs>
-          </a:gsLst>
-          <a:lin ang="16200000" scaled="0"/>
-        </a:gradFill>
-      </a:fillStyleLst>
-      <a:lnStyleLst>
-        <a:ln w="9525" cap="flat" cmpd="sng" algn="ctr">
-          <a:solidFill>
-            <a:schemeClr val="phClr">
-              <a:shade val="95000"/>
-              <a:satMod val="105000"/>
-            </a:schemeClr>
-          </a:solidFill>
-          <a:prstDash val="solid"/>
-        </a:ln>
-        <a:ln w="25400" cap="flat" cmpd="sng" algn="ctr">
-          <a:solidFill>
-            <a:schemeClr val="phClr"/>
-          </a:solidFill>
-          <a:prstDash val="solid"/>
-        </a:ln>
-        <a:ln w="38100" cap="flat" cmpd="sng" algn="ctr">
-          <a:solidFill>
-            <a:schemeClr val="phClr"/>
-          </a:solidFill>
-          <a:prstDash val="solid"/>
-        </a:ln>
-      </a:lnStyleLst>
-      <a:effectStyleLst>
-        <a:effectStyle>
-          <a:effectLst>
-            <a:outerShdw blurRad="40000" dist="20000" dir="5400000" rotWithShape="0">
-              <a:srgbClr val="000000">
-                <a:alpha val="38000"/>
-              </a:srgbClr>
-            </a:outerShdw>
-          </a:effectLst>
-        </a:effectStyle>
-        <a:effectStyle>
-          <a:effectLst>
-            <a:outerShdw blurRad="40000" dist="23000" dir="5400000" rotWithShape="0">
-              <a:srgbClr val="000000">
-                <a:alpha val="35000"/>
-              </a:srgbClr>
-            </a:outerShdw>
-          </a:effectLst>
-        </a:effectStyle>
-        <a:effectStyle>
-          <a:effectLst>
-            <a:outerShdw blurRad="40000" dist="23000" dir="5400000" rotWithShape="0">
-              <a:srgbClr val="000000">
-                <a:alpha val="35000"/>
-              </a:srgbClr>
-            </a:outerShdw>
-          </a:effectLst>
-          <a:scene3d>
-            <a:camera prst="orthographicFront">
-              <a:rot lat="0" lon="0" rev="0"/>
-            </a:camera>
-            <a:lightRig rig="threePt" dir="t">
-              <a:rot lat="0" lon="0" rev="1200000"/>
-            </a:lightRig>
-          </a:scene3d>
-          <a:sp3d>
-            <a:bevelT w="63500" h="25400"/>
-          </a:sp3d>
-        </a:effectStyle>
-      </a:effectStyleLst>
-      <a:bgFillStyleLst>
-        <a:solidFill>
-          <a:schemeClr val="phClr"/>
-        </a:solidFill>
-        <a:gradFill rotWithShape="1">
-          <a:gsLst>
-            <a:gs pos="0">
-              <a:schemeClr val="phClr">
-                <a:tint val="40000"/>
-                <a:satMod val="350000"/>
-              </a:schemeClr>
-            </a:gs>
-            <a:gs pos="40000">
-              <a:schemeClr val="phClr">
-                <a:tint val="45000"/>
-                <a:shade val="99000"/>
-                <a:satMod val="350000"/>
-              </a:schemeClr>
-            </a:gs>
-            <a:gs pos="100000">
-              <a:schemeClr val="phClr">
-                <a:shade val="20000"/>
-                <a:satMod val="255000"/>
-              </a:schemeClr>
-            </a:gs>
-          </a:gsLst>
-          <a:path path="circle">
-            <a:fillToRect l="50000" t="-80000" r="50000" b="180000"/>
-          </a:path>
-        </a:gradFill>
-        <a:gradFill rotWithShape="1">
-          <a:gsLst>
-            <a:gs pos="0">
-              <a:schemeClr val="phClr">
-                <a:tint val="80000"/>
-                <a:satMod val="300000"/>
-              </a:schemeClr>
-            </a:gs>
-            <a:gs pos="100000">
-              <a:schemeClr val="phClr">
-                <a:shade val="30000"/>
-                <a:satMod val="200000"/>
-              </a:schemeClr>
-            </a:gs>
-          </a:gsLst>
-          <a:path path="circle">
-            <a:fillToRect l="50000" t="50000" r="50000" b="50000"/>
-          </a:path>
-        </a:gradFill>
-      </a:bgFillStyleLst>
-    </a:fmtScheme>
-  </a:themeElements>
-  <a:extLst>
-    <a:ext uri="{05A4C25C-085E-4340-85A3-A5531E510DB2}">
-      <thm15:themeFamily xmlns:thm15="http://schemas.microsoft.com/office/thememl/2012/main" name="Office Theme" id="{62F939B6-93AF-4DB8-9C6B-D6C7DFDC589F}" vid="{4A3C46E8-61CC-4603-A589-7422A47A8E4A}"/>
-    </a:ext>
-  </a:extLst>
-</a:theme>
-</file>
-
-<file path=ppt/theme/theme6.xml><?xml version="1.0" encoding="utf-8"?>
 <a:theme xmlns:a="http://schemas.openxmlformats.org/drawingml/2006/main" name="Office 主题​​">
   <a:themeElements>
     <a:clrScheme name="Office">
